--- a/artigo/Alves, Rodrigo - SUÍTE DE INTEGRAÇÃO DE SISTEMAS WEB.pptx
+++ b/artigo/Alves, Rodrigo - SUÍTE DE INTEGRAÇÃO DE SISTEMAS WEB.pptx
@@ -1,6 +1,6 @@
 
 <file path=ppt/presentation.xml><?xml version="1.0" encoding="utf-8"?>
-<p:presentation xmlns:a="http://schemas.openxmlformats.org/drawingml/2006/main" xmlns:r="http://schemas.openxmlformats.org/officeDocument/2006/relationships" xmlns:p="http://schemas.openxmlformats.org/presentationml/2006/main">
+<p:presentation xmlns:a="http://schemas.openxmlformats.org/drawingml/2006/main" xmlns:r="http://schemas.openxmlformats.org/officeDocument/2006/relationships" xmlns:p="http://schemas.openxmlformats.org/presentationml/2006/main" saveSubsetFonts="1">
   <p:sldMasterIdLst>
     <p:sldMasterId id="2147483696" r:id="rId1"/>
   </p:sldMasterIdLst>
@@ -9,11 +9,15 @@
     <p:sldId id="258" r:id="rId3"/>
     <p:sldId id="267" r:id="rId4"/>
     <p:sldId id="259" r:id="rId5"/>
-    <p:sldId id="278" r:id="rId6"/>
+    <p:sldId id="277" r:id="rId6"/>
     <p:sldId id="260" r:id="rId7"/>
-    <p:sldId id="277" r:id="rId8"/>
-    <p:sldId id="262" r:id="rId9"/>
-    <p:sldId id="279" r:id="rId10"/>
+    <p:sldId id="278" r:id="rId8"/>
+    <p:sldId id="280" r:id="rId9"/>
+    <p:sldId id="281" r:id="rId10"/>
+    <p:sldId id="282" r:id="rId11"/>
+    <p:sldId id="262" r:id="rId12"/>
+    <p:sldId id="283" r:id="rId13"/>
+    <p:sldId id="279" r:id="rId14"/>
   </p:sldIdLst>
   <p:sldSz cx="12192000" cy="6858000"/>
   <p:notesSz cx="6858000" cy="9144000"/>
@@ -112,6 +116,22 @@
       </a:defRPr>
     </a:lvl9pPr>
   </p:defaultTextStyle>
+  <p:extLst>
+    <p:ext uri="{EFAFB233-063F-42B5-8137-9DF3F51BA10A}">
+      <p15:sldGuideLst xmlns:p15="http://schemas.microsoft.com/office/powerpoint/2012/main">
+        <p15:guide id="1" orient="horz" pos="2160">
+          <p15:clr>
+            <a:srgbClr val="A4A3A4"/>
+          </p15:clr>
+        </p15:guide>
+        <p15:guide id="2" pos="3840">
+          <p15:clr>
+            <a:srgbClr val="A4A3A4"/>
+          </p15:clr>
+        </p15:guide>
+      </p15:sldGuideLst>
+    </p:ext>
+  </p:extLst>
 </p:presentation>
 </file>
 
@@ -195,9 +215,7 @@
         </p:style>
         <p:txBody>
           <a:bodyPr anchor="ctr"/>
-          <a:lstStyle>
-            <a:extLst/>
-          </a:lstStyle>
+          <a:lstStyle/>
           <a:p>
             <a:pPr algn="ctr" eaLnBrk="1" latinLnBrk="0" hangingPunct="1"/>
             <a:endParaRPr kumimoji="0" lang="en-US"/>
@@ -250,7 +268,7 @@
           </a:lstStyle>
           <a:p>
             <a:r>
-              <a:rPr kumimoji="0" lang="pt-BR" smtClean="0"/>
+              <a:rPr kumimoji="0" lang="pt-BR"/>
               <a:t>Clique para editar o título mestre</a:t>
             </a:r>
             <a:endParaRPr kumimoji="0" lang="en-US"/>
@@ -312,7 +330,7 @@
           </a:lstStyle>
           <a:p>
             <a:r>
-              <a:rPr kumimoji="0" lang="pt-BR" smtClean="0"/>
+              <a:rPr kumimoji="0" lang="pt-BR"/>
               <a:t>Clique para editar o estilo do subtítulo mestre</a:t>
             </a:r>
             <a:endParaRPr kumimoji="0" lang="en-US"/>
@@ -410,9 +428,7 @@
           </p:spPr>
           <p:txBody>
             <a:bodyPr vert="horz" wrap="square" lIns="91440" tIns="45720" rIns="91440" bIns="45720" anchor="t" compatLnSpc="1"/>
-            <a:lstStyle>
-              <a:extLst/>
-            </a:lstStyle>
+            <a:lstStyle/>
             <a:p>
               <a:endParaRPr kumimoji="0" lang="en-US"/>
             </a:p>
@@ -492,9 +508,7 @@
           </p:spPr>
           <p:txBody>
             <a:bodyPr vert="horz" wrap="square" lIns="91440" tIns="45720" rIns="91440" bIns="45720" anchor="t" compatLnSpc="1"/>
-            <a:lstStyle>
-              <a:extLst/>
-            </a:lstStyle>
+            <a:lstStyle/>
             <a:p>
               <a:endParaRPr kumimoji="0" lang="en-US"/>
             </a:p>
@@ -651,9 +665,7 @@
           </p:style>
           <p:txBody>
             <a:bodyPr vert="horz" wrap="square" lIns="91440" tIns="45720" rIns="91440" bIns="45720" anchor="ctr" compatLnSpc="1"/>
-            <a:lstStyle>
-              <a:extLst/>
-            </a:lstStyle>
+            <a:lstStyle/>
             <a:p>
               <a:pPr algn="ctr" eaLnBrk="1" latinLnBrk="0" hangingPunct="1"/>
               <a:endParaRPr kumimoji="0" lang="en-US"/>
@@ -740,7 +752,7 @@
           <a:p>
             <a:fld id="{63A1C593-65D0-4073-BCC9-577B9352EA97}" type="datetimeFigureOut">
               <a:rPr lang="en-US" smtClean="0"/>
-              <a:t>9/28/2019</a:t>
+              <a:t>10/30/2019</a:t>
             </a:fld>
             <a:endParaRPr lang="en-US"/>
           </a:p>
@@ -846,12 +858,10 @@
         <p:spPr/>
         <p:txBody>
           <a:bodyPr/>
-          <a:lstStyle>
-            <a:extLst/>
-          </a:lstStyle>
-          <a:p>
-            <a:r>
-              <a:rPr kumimoji="0" lang="pt-BR" smtClean="0"/>
+          <a:lstStyle/>
+          <a:p>
+            <a:r>
+              <a:rPr kumimoji="0" lang="pt-BR"/>
               <a:t>Clique para editar o título mestre</a:t>
             </a:r>
             <a:endParaRPr kumimoji="0" lang="en-US"/>
@@ -876,41 +886,39 @@
         </p:spPr>
         <p:txBody>
           <a:bodyPr vert="eaVert"/>
-          <a:lstStyle>
-            <a:extLst/>
-          </a:lstStyle>
+          <a:lstStyle/>
           <a:p>
             <a:pPr lvl="0" eaLnBrk="1" latinLnBrk="0" hangingPunct="1"/>
             <a:r>
-              <a:rPr lang="pt-BR" smtClean="0"/>
+              <a:rPr lang="pt-BR"/>
               <a:t>Clique para editar o texto mestre</a:t>
             </a:r>
           </a:p>
           <a:p>
             <a:pPr lvl="1" eaLnBrk="1" latinLnBrk="0" hangingPunct="1"/>
             <a:r>
-              <a:rPr lang="pt-BR" smtClean="0"/>
+              <a:rPr lang="pt-BR"/>
               <a:t>Segundo nível</a:t>
             </a:r>
           </a:p>
           <a:p>
             <a:pPr lvl="2" eaLnBrk="1" latinLnBrk="0" hangingPunct="1"/>
             <a:r>
-              <a:rPr lang="pt-BR" smtClean="0"/>
+              <a:rPr lang="pt-BR"/>
               <a:t>Terceiro nível</a:t>
             </a:r>
           </a:p>
           <a:p>
             <a:pPr lvl="3" eaLnBrk="1" latinLnBrk="0" hangingPunct="1"/>
             <a:r>
-              <a:rPr lang="pt-BR" smtClean="0"/>
+              <a:rPr lang="pt-BR"/>
               <a:t>Quarto nível</a:t>
             </a:r>
           </a:p>
           <a:p>
             <a:pPr lvl="4" eaLnBrk="1" latinLnBrk="0" hangingPunct="1"/>
             <a:r>
-              <a:rPr lang="pt-BR" smtClean="0"/>
+              <a:rPr lang="pt-BR"/>
               <a:t>Quinto nível</a:t>
             </a:r>
             <a:endParaRPr kumimoji="0" lang="en-US"/>
@@ -930,13 +938,11 @@
         <p:spPr/>
         <p:txBody>
           <a:bodyPr/>
-          <a:lstStyle>
-            <a:extLst/>
-          </a:lstStyle>
+          <a:lstStyle/>
           <a:p>
             <a:fld id="{63A1C593-65D0-4073-BCC9-577B9352EA97}" type="datetimeFigureOut">
               <a:rPr lang="en-US" smtClean="0"/>
-              <a:t>9/28/2019</a:t>
+              <a:t>10/30/2019</a:t>
             </a:fld>
             <a:endParaRPr lang="en-US"/>
           </a:p>
@@ -955,9 +961,7 @@
         <p:spPr/>
         <p:txBody>
           <a:bodyPr/>
-          <a:lstStyle>
-            <a:extLst/>
-          </a:lstStyle>
+          <a:lstStyle/>
           <a:p>
             <a:endParaRPr lang="en-US"/>
           </a:p>
@@ -976,9 +980,7 @@
         <p:spPr/>
         <p:txBody>
           <a:bodyPr/>
-          <a:lstStyle>
-            <a:extLst/>
-          </a:lstStyle>
+          <a:lstStyle/>
           <a:p>
             <a:fld id="{9B618960-8005-486C-9A75-10CB2AAC16F9}" type="slidenum">
               <a:rPr lang="en-US" smtClean="0"/>
@@ -1031,12 +1033,10 @@
         </p:spPr>
         <p:txBody>
           <a:bodyPr vert="eaVert"/>
-          <a:lstStyle>
-            <a:extLst/>
-          </a:lstStyle>
-          <a:p>
-            <a:r>
-              <a:rPr kumimoji="0" lang="pt-BR" smtClean="0"/>
+          <a:lstStyle/>
+          <a:p>
+            <a:r>
+              <a:rPr kumimoji="0" lang="pt-BR"/>
               <a:t>Clique para editar o título mestre</a:t>
             </a:r>
             <a:endParaRPr kumimoji="0" lang="en-US"/>
@@ -1061,41 +1061,39 @@
         </p:spPr>
         <p:txBody>
           <a:bodyPr vert="eaVert"/>
-          <a:lstStyle>
-            <a:extLst/>
-          </a:lstStyle>
+          <a:lstStyle/>
           <a:p>
             <a:pPr lvl="0" eaLnBrk="1" latinLnBrk="0" hangingPunct="1"/>
             <a:r>
-              <a:rPr lang="pt-BR" smtClean="0"/>
+              <a:rPr lang="pt-BR"/>
               <a:t>Clique para editar o texto mestre</a:t>
             </a:r>
           </a:p>
           <a:p>
             <a:pPr lvl="1" eaLnBrk="1" latinLnBrk="0" hangingPunct="1"/>
             <a:r>
-              <a:rPr lang="pt-BR" smtClean="0"/>
+              <a:rPr lang="pt-BR"/>
               <a:t>Segundo nível</a:t>
             </a:r>
           </a:p>
           <a:p>
             <a:pPr lvl="2" eaLnBrk="1" latinLnBrk="0" hangingPunct="1"/>
             <a:r>
-              <a:rPr lang="pt-BR" smtClean="0"/>
+              <a:rPr lang="pt-BR"/>
               <a:t>Terceiro nível</a:t>
             </a:r>
           </a:p>
           <a:p>
             <a:pPr lvl="3" eaLnBrk="1" latinLnBrk="0" hangingPunct="1"/>
             <a:r>
-              <a:rPr lang="pt-BR" smtClean="0"/>
+              <a:rPr lang="pt-BR"/>
               <a:t>Quarto nível</a:t>
             </a:r>
           </a:p>
           <a:p>
             <a:pPr lvl="4" eaLnBrk="1" latinLnBrk="0" hangingPunct="1"/>
             <a:r>
-              <a:rPr lang="pt-BR" smtClean="0"/>
+              <a:rPr lang="pt-BR"/>
               <a:t>Quinto nível</a:t>
             </a:r>
             <a:endParaRPr kumimoji="0" lang="en-US"/>
@@ -1115,13 +1113,11 @@
         <p:spPr/>
         <p:txBody>
           <a:bodyPr/>
-          <a:lstStyle>
-            <a:extLst/>
-          </a:lstStyle>
+          <a:lstStyle/>
           <a:p>
             <a:fld id="{63A1C593-65D0-4073-BCC9-577B9352EA97}" type="datetimeFigureOut">
               <a:rPr lang="en-US" smtClean="0"/>
-              <a:t>9/28/2019</a:t>
+              <a:t>10/30/2019</a:t>
             </a:fld>
             <a:endParaRPr lang="en-US"/>
           </a:p>
@@ -1140,9 +1136,7 @@
         <p:spPr/>
         <p:txBody>
           <a:bodyPr/>
-          <a:lstStyle>
-            <a:extLst/>
-          </a:lstStyle>
+          <a:lstStyle/>
           <a:p>
             <a:endParaRPr lang="en-US"/>
           </a:p>
@@ -1161,9 +1155,7 @@
         <p:spPr/>
         <p:txBody>
           <a:bodyPr/>
-          <a:lstStyle>
-            <a:extLst/>
-          </a:lstStyle>
+          <a:lstStyle/>
           <a:p>
             <a:fld id="{9B618960-8005-486C-9A75-10CB2AAC16F9}" type="slidenum">
               <a:rPr lang="en-US" smtClean="0"/>
@@ -1211,41 +1203,39 @@
         <p:spPr/>
         <p:txBody>
           <a:bodyPr/>
-          <a:lstStyle>
-            <a:extLst/>
-          </a:lstStyle>
+          <a:lstStyle/>
           <a:p>
             <a:pPr lvl="0" eaLnBrk="1" latinLnBrk="0" hangingPunct="1"/>
             <a:r>
-              <a:rPr lang="pt-BR" smtClean="0"/>
+              <a:rPr lang="pt-BR"/>
               <a:t>Clique para editar o texto mestre</a:t>
             </a:r>
           </a:p>
           <a:p>
             <a:pPr lvl="1" eaLnBrk="1" latinLnBrk="0" hangingPunct="1"/>
             <a:r>
-              <a:rPr lang="pt-BR" smtClean="0"/>
+              <a:rPr lang="pt-BR"/>
               <a:t>Segundo nível</a:t>
             </a:r>
           </a:p>
           <a:p>
             <a:pPr lvl="2" eaLnBrk="1" latinLnBrk="0" hangingPunct="1"/>
             <a:r>
-              <a:rPr lang="pt-BR" smtClean="0"/>
+              <a:rPr lang="pt-BR"/>
               <a:t>Terceiro nível</a:t>
             </a:r>
           </a:p>
           <a:p>
             <a:pPr lvl="3" eaLnBrk="1" latinLnBrk="0" hangingPunct="1"/>
             <a:r>
-              <a:rPr lang="pt-BR" smtClean="0"/>
+              <a:rPr lang="pt-BR"/>
               <a:t>Quarto nível</a:t>
             </a:r>
           </a:p>
           <a:p>
             <a:pPr lvl="4" eaLnBrk="1" latinLnBrk="0" hangingPunct="1"/>
             <a:r>
-              <a:rPr lang="pt-BR" smtClean="0"/>
+              <a:rPr lang="pt-BR"/>
               <a:t>Quinto nível</a:t>
             </a:r>
             <a:endParaRPr kumimoji="0" lang="en-US"/>
@@ -1265,13 +1255,11 @@
         <p:spPr/>
         <p:txBody>
           <a:bodyPr/>
-          <a:lstStyle>
-            <a:extLst/>
-          </a:lstStyle>
+          <a:lstStyle/>
           <a:p>
             <a:fld id="{63A1C593-65D0-4073-BCC9-577B9352EA97}" type="datetimeFigureOut">
               <a:rPr lang="en-US" smtClean="0"/>
-              <a:t>9/28/2019</a:t>
+              <a:t>10/30/2019</a:t>
             </a:fld>
             <a:endParaRPr lang="en-US"/>
           </a:p>
@@ -1290,9 +1278,7 @@
         <p:spPr/>
         <p:txBody>
           <a:bodyPr/>
-          <a:lstStyle>
-            <a:extLst/>
-          </a:lstStyle>
+          <a:lstStyle/>
           <a:p>
             <a:endParaRPr lang="en-US"/>
           </a:p>
@@ -1311,9 +1297,7 @@
         <p:spPr/>
         <p:txBody>
           <a:bodyPr/>
-          <a:lstStyle>
-            <a:extLst/>
-          </a:lstStyle>
+          <a:lstStyle/>
           <a:p>
             <a:fld id="{9B618960-8005-486C-9A75-10CB2AAC16F9}" type="slidenum">
               <a:rPr lang="en-US" smtClean="0"/>
@@ -1336,12 +1320,10 @@
         <p:spPr/>
         <p:txBody>
           <a:bodyPr rtlCol="0"/>
-          <a:lstStyle>
-            <a:extLst/>
-          </a:lstStyle>
-          <a:p>
-            <a:r>
-              <a:rPr kumimoji="0" lang="pt-BR" smtClean="0"/>
+          <a:lstStyle/>
+          <a:p>
+            <a:r>
+              <a:rPr kumimoji="0" lang="pt-BR"/>
               <a:t>Clique para editar o título mestre</a:t>
             </a:r>
             <a:endParaRPr kumimoji="0" lang="en-US"/>
@@ -1422,7 +1404,7 @@
           </a:lstStyle>
           <a:p>
             <a:r>
-              <a:rPr kumimoji="0" lang="pt-BR" smtClean="0"/>
+              <a:rPr kumimoji="0" lang="pt-BR"/>
               <a:t>Clique para editar o título mestre</a:t>
             </a:r>
             <a:endParaRPr kumimoji="0" lang="en-US"/>
@@ -1501,7 +1483,7 @@
           <a:p>
             <a:pPr lvl="0" eaLnBrk="1" latinLnBrk="0" hangingPunct="1"/>
             <a:r>
-              <a:rPr kumimoji="0" lang="pt-BR" smtClean="0"/>
+              <a:rPr kumimoji="0" lang="pt-BR"/>
               <a:t>Clique para editar o texto mestre</a:t>
             </a:r>
           </a:p>
@@ -1520,13 +1502,11 @@
         <p:spPr/>
         <p:txBody>
           <a:bodyPr/>
-          <a:lstStyle>
-            <a:extLst/>
-          </a:lstStyle>
+          <a:lstStyle/>
           <a:p>
             <a:fld id="{63A1C593-65D0-4073-BCC9-577B9352EA97}" type="datetimeFigureOut">
               <a:rPr lang="en-US" smtClean="0"/>
-              <a:t>9/28/2019</a:t>
+              <a:t>10/30/2019</a:t>
             </a:fld>
             <a:endParaRPr lang="en-US"/>
           </a:p>
@@ -1545,9 +1525,7 @@
         <p:spPr/>
         <p:txBody>
           <a:bodyPr/>
-          <a:lstStyle>
-            <a:extLst/>
-          </a:lstStyle>
+          <a:lstStyle/>
           <a:p>
             <a:endParaRPr lang="en-US"/>
           </a:p>
@@ -1566,9 +1544,7 @@
         <p:spPr/>
         <p:txBody>
           <a:bodyPr/>
-          <a:lstStyle>
-            <a:extLst/>
-          </a:lstStyle>
+          <a:lstStyle/>
           <a:p>
             <a:fld id="{9B618960-8005-486C-9A75-10CB2AAC16F9}" type="slidenum">
               <a:rPr lang="en-US" smtClean="0"/>
@@ -1649,9 +1625,7 @@
         </p:style>
         <p:txBody>
           <a:bodyPr anchor="ctr"/>
-          <a:lstStyle>
-            <a:extLst/>
-          </a:lstStyle>
+          <a:lstStyle/>
           <a:p>
             <a:pPr algn="l" eaLnBrk="1" latinLnBrk="0" hangingPunct="1"/>
             <a:endParaRPr kumimoji="0" lang="en-US"/>
@@ -1729,9 +1703,7 @@
         </p:style>
         <p:txBody>
           <a:bodyPr anchor="ctr"/>
-          <a:lstStyle>
-            <a:extLst/>
-          </a:lstStyle>
+          <a:lstStyle/>
           <a:p>
             <a:pPr algn="l" eaLnBrk="1" latinLnBrk="0" hangingPunct="1"/>
             <a:endParaRPr kumimoji="0" lang="en-US"/>
@@ -1807,35 +1779,35 @@
           <a:p>
             <a:pPr lvl="0" eaLnBrk="1" latinLnBrk="0" hangingPunct="1"/>
             <a:r>
-              <a:rPr lang="pt-BR" smtClean="0"/>
+              <a:rPr lang="pt-BR"/>
               <a:t>Clique para editar o texto mestre</a:t>
             </a:r>
           </a:p>
           <a:p>
             <a:pPr lvl="1" eaLnBrk="1" latinLnBrk="0" hangingPunct="1"/>
             <a:r>
-              <a:rPr lang="pt-BR" smtClean="0"/>
+              <a:rPr lang="pt-BR"/>
               <a:t>Segundo nível</a:t>
             </a:r>
           </a:p>
           <a:p>
             <a:pPr lvl="2" eaLnBrk="1" latinLnBrk="0" hangingPunct="1"/>
             <a:r>
-              <a:rPr lang="pt-BR" smtClean="0"/>
+              <a:rPr lang="pt-BR"/>
               <a:t>Terceiro nível</a:t>
             </a:r>
           </a:p>
           <a:p>
             <a:pPr lvl="3" eaLnBrk="1" latinLnBrk="0" hangingPunct="1"/>
             <a:r>
-              <a:rPr lang="pt-BR" smtClean="0"/>
+              <a:rPr lang="pt-BR"/>
               <a:t>Quarto nível</a:t>
             </a:r>
           </a:p>
           <a:p>
             <a:pPr lvl="4" eaLnBrk="1" latinLnBrk="0" hangingPunct="1"/>
             <a:r>
-              <a:rPr lang="pt-BR" smtClean="0"/>
+              <a:rPr lang="pt-BR"/>
               <a:t>Quinto nível</a:t>
             </a:r>
             <a:endParaRPr kumimoji="0" lang="en-US"/>
@@ -1881,35 +1853,35 @@
           <a:p>
             <a:pPr lvl="0" eaLnBrk="1" latinLnBrk="0" hangingPunct="1"/>
             <a:r>
-              <a:rPr lang="pt-BR" smtClean="0"/>
+              <a:rPr lang="pt-BR"/>
               <a:t>Clique para editar o texto mestre</a:t>
             </a:r>
           </a:p>
           <a:p>
             <a:pPr lvl="1" eaLnBrk="1" latinLnBrk="0" hangingPunct="1"/>
             <a:r>
-              <a:rPr lang="pt-BR" smtClean="0"/>
+              <a:rPr lang="pt-BR"/>
               <a:t>Segundo nível</a:t>
             </a:r>
           </a:p>
           <a:p>
             <a:pPr lvl="2" eaLnBrk="1" latinLnBrk="0" hangingPunct="1"/>
             <a:r>
-              <a:rPr lang="pt-BR" smtClean="0"/>
+              <a:rPr lang="pt-BR"/>
               <a:t>Terceiro nível</a:t>
             </a:r>
           </a:p>
           <a:p>
             <a:pPr lvl="3" eaLnBrk="1" latinLnBrk="0" hangingPunct="1"/>
             <a:r>
-              <a:rPr lang="pt-BR" smtClean="0"/>
+              <a:rPr lang="pt-BR"/>
               <a:t>Quarto nível</a:t>
             </a:r>
           </a:p>
           <a:p>
             <a:pPr lvl="4" eaLnBrk="1" latinLnBrk="0" hangingPunct="1"/>
             <a:r>
-              <a:rPr lang="pt-BR" smtClean="0"/>
+              <a:rPr lang="pt-BR"/>
               <a:t>Quinto nível</a:t>
             </a:r>
             <a:endParaRPr kumimoji="0" lang="en-US"/>
@@ -1929,13 +1901,11 @@
         <p:spPr/>
         <p:txBody>
           <a:bodyPr/>
-          <a:lstStyle>
-            <a:extLst/>
-          </a:lstStyle>
+          <a:lstStyle/>
           <a:p>
             <a:fld id="{63A1C593-65D0-4073-BCC9-577B9352EA97}" type="datetimeFigureOut">
               <a:rPr lang="en-US" smtClean="0"/>
-              <a:t>9/28/2019</a:t>
+              <a:t>10/30/2019</a:t>
             </a:fld>
             <a:endParaRPr lang="en-US"/>
           </a:p>
@@ -1954,9 +1924,7 @@
         <p:spPr/>
         <p:txBody>
           <a:bodyPr/>
-          <a:lstStyle>
-            <a:extLst/>
-          </a:lstStyle>
+          <a:lstStyle/>
           <a:p>
             <a:endParaRPr lang="en-US"/>
           </a:p>
@@ -1975,9 +1943,7 @@
         <p:spPr/>
         <p:txBody>
           <a:bodyPr/>
-          <a:lstStyle>
-            <a:extLst/>
-          </a:lstStyle>
+          <a:lstStyle/>
           <a:p>
             <a:fld id="{9B618960-8005-486C-9A75-10CB2AAC16F9}" type="slidenum">
               <a:rPr lang="en-US" smtClean="0"/>
@@ -2000,12 +1966,10 @@
         <p:spPr/>
         <p:txBody>
           <a:bodyPr rtlCol="0"/>
-          <a:lstStyle>
-            <a:extLst/>
-          </a:lstStyle>
-          <a:p>
-            <a:r>
-              <a:rPr kumimoji="0" lang="pt-BR" smtClean="0"/>
+          <a:lstStyle/>
+          <a:p>
+            <a:r>
+              <a:rPr kumimoji="0" lang="pt-BR"/>
               <a:t>Clique para editar o título mestre</a:t>
             </a:r>
             <a:endParaRPr kumimoji="0" lang="en-US"/>
@@ -2068,7 +2032,7 @@
           </a:lstStyle>
           <a:p>
             <a:r>
-              <a:rPr kumimoji="0" lang="pt-BR" smtClean="0"/>
+              <a:rPr kumimoji="0" lang="pt-BR"/>
               <a:t>Clique para editar o título mestre</a:t>
             </a:r>
             <a:endParaRPr kumimoji="0" lang="en-US"/>
@@ -2132,7 +2096,7 @@
           <a:p>
             <a:pPr lvl="0" eaLnBrk="1" latinLnBrk="0" hangingPunct="1"/>
             <a:r>
-              <a:rPr kumimoji="0" lang="pt-BR" smtClean="0"/>
+              <a:rPr kumimoji="0" lang="pt-BR"/>
               <a:t>Clique para editar o texto mestre</a:t>
             </a:r>
           </a:p>
@@ -2195,7 +2159,7 @@
           <a:p>
             <a:pPr lvl="0" eaLnBrk="1" latinLnBrk="0" hangingPunct="1"/>
             <a:r>
-              <a:rPr kumimoji="0" lang="pt-BR" smtClean="0"/>
+              <a:rPr kumimoji="0" lang="pt-BR"/>
               <a:t>Clique para editar o texto mestre</a:t>
             </a:r>
           </a:p>
@@ -2245,35 +2209,35 @@
           <a:p>
             <a:pPr lvl="0" eaLnBrk="1" latinLnBrk="0" hangingPunct="1"/>
             <a:r>
-              <a:rPr lang="pt-BR" smtClean="0"/>
+              <a:rPr lang="pt-BR"/>
               <a:t>Clique para editar o texto mestre</a:t>
             </a:r>
           </a:p>
           <a:p>
             <a:pPr lvl="1" eaLnBrk="1" latinLnBrk="0" hangingPunct="1"/>
             <a:r>
-              <a:rPr lang="pt-BR" smtClean="0"/>
+              <a:rPr lang="pt-BR"/>
               <a:t>Segundo nível</a:t>
             </a:r>
           </a:p>
           <a:p>
             <a:pPr lvl="2" eaLnBrk="1" latinLnBrk="0" hangingPunct="1"/>
             <a:r>
-              <a:rPr lang="pt-BR" smtClean="0"/>
+              <a:rPr lang="pt-BR"/>
               <a:t>Terceiro nível</a:t>
             </a:r>
           </a:p>
           <a:p>
             <a:pPr lvl="3" eaLnBrk="1" latinLnBrk="0" hangingPunct="1"/>
             <a:r>
-              <a:rPr lang="pt-BR" smtClean="0"/>
+              <a:rPr lang="pt-BR"/>
               <a:t>Quarto nível</a:t>
             </a:r>
           </a:p>
           <a:p>
             <a:pPr lvl="4" eaLnBrk="1" latinLnBrk="0" hangingPunct="1"/>
             <a:r>
-              <a:rPr lang="pt-BR" smtClean="0"/>
+              <a:rPr lang="pt-BR"/>
               <a:t>Quinto nível</a:t>
             </a:r>
             <a:endParaRPr kumimoji="0" lang="en-US"/>
@@ -2327,35 +2291,35 @@
           <a:p>
             <a:pPr lvl="0" eaLnBrk="1" latinLnBrk="0" hangingPunct="1"/>
             <a:r>
-              <a:rPr lang="pt-BR" smtClean="0"/>
+              <a:rPr lang="pt-BR"/>
               <a:t>Clique para editar o texto mestre</a:t>
             </a:r>
           </a:p>
           <a:p>
             <a:pPr lvl="1" eaLnBrk="1" latinLnBrk="0" hangingPunct="1"/>
             <a:r>
-              <a:rPr lang="pt-BR" smtClean="0"/>
+              <a:rPr lang="pt-BR"/>
               <a:t>Segundo nível</a:t>
             </a:r>
           </a:p>
           <a:p>
             <a:pPr lvl="2" eaLnBrk="1" latinLnBrk="0" hangingPunct="1"/>
             <a:r>
-              <a:rPr lang="pt-BR" smtClean="0"/>
+              <a:rPr lang="pt-BR"/>
               <a:t>Terceiro nível</a:t>
             </a:r>
           </a:p>
           <a:p>
             <a:pPr lvl="3" eaLnBrk="1" latinLnBrk="0" hangingPunct="1"/>
             <a:r>
-              <a:rPr lang="pt-BR" smtClean="0"/>
+              <a:rPr lang="pt-BR"/>
               <a:t>Quarto nível</a:t>
             </a:r>
           </a:p>
           <a:p>
             <a:pPr lvl="4" eaLnBrk="1" latinLnBrk="0" hangingPunct="1"/>
             <a:r>
-              <a:rPr lang="pt-BR" smtClean="0"/>
+              <a:rPr lang="pt-BR"/>
               <a:t>Quinto nível</a:t>
             </a:r>
             <a:endParaRPr kumimoji="0" lang="en-US"/>
@@ -2375,13 +2339,11 @@
         <p:spPr/>
         <p:txBody>
           <a:bodyPr/>
-          <a:lstStyle>
-            <a:extLst/>
-          </a:lstStyle>
+          <a:lstStyle/>
           <a:p>
             <a:fld id="{63A1C593-65D0-4073-BCC9-577B9352EA97}" type="datetimeFigureOut">
               <a:rPr lang="en-US" smtClean="0"/>
-              <a:t>9/28/2019</a:t>
+              <a:t>10/30/2019</a:t>
             </a:fld>
             <a:endParaRPr lang="en-US"/>
           </a:p>
@@ -2400,9 +2362,7 @@
         <p:spPr/>
         <p:txBody>
           <a:bodyPr/>
-          <a:lstStyle>
-            <a:extLst/>
-          </a:lstStyle>
+          <a:lstStyle/>
           <a:p>
             <a:endParaRPr lang="en-US"/>
           </a:p>
@@ -2421,9 +2381,7 @@
         <p:spPr/>
         <p:txBody>
           <a:bodyPr/>
-          <a:lstStyle>
-            <a:extLst/>
-          </a:lstStyle>
+          <a:lstStyle/>
           <a:p>
             <a:fld id="{9B618960-8005-486C-9A75-10CB2AAC16F9}" type="slidenum">
               <a:rPr lang="en-US" smtClean="0"/>
@@ -2476,13 +2434,11 @@
         <p:spPr/>
         <p:txBody>
           <a:bodyPr/>
-          <a:lstStyle>
-            <a:extLst/>
-          </a:lstStyle>
+          <a:lstStyle/>
           <a:p>
             <a:fld id="{63A1C593-65D0-4073-BCC9-577B9352EA97}" type="datetimeFigureOut">
               <a:rPr lang="en-US" smtClean="0"/>
-              <a:t>9/28/2019</a:t>
+              <a:t>10/30/2019</a:t>
             </a:fld>
             <a:endParaRPr lang="en-US"/>
           </a:p>
@@ -2501,9 +2457,7 @@
         <p:spPr/>
         <p:txBody>
           <a:bodyPr/>
-          <a:lstStyle>
-            <a:extLst/>
-          </a:lstStyle>
+          <a:lstStyle/>
           <a:p>
             <a:endParaRPr lang="en-US"/>
           </a:p>
@@ -2522,9 +2476,7 @@
         <p:spPr/>
         <p:txBody>
           <a:bodyPr/>
-          <a:lstStyle>
-            <a:extLst/>
-          </a:lstStyle>
+          <a:lstStyle/>
           <a:p>
             <a:fld id="{9B618960-8005-486C-9A75-10CB2AAC16F9}" type="slidenum">
               <a:rPr lang="en-US" smtClean="0"/>
@@ -2547,12 +2499,10 @@
         <p:spPr/>
         <p:txBody>
           <a:bodyPr rtlCol="0"/>
-          <a:lstStyle>
-            <a:extLst/>
-          </a:lstStyle>
-          <a:p>
-            <a:r>
-              <a:rPr kumimoji="0" lang="pt-BR" smtClean="0"/>
+          <a:lstStyle/>
+          <a:p>
+            <a:r>
+              <a:rPr kumimoji="0" lang="pt-BR"/>
               <a:t>Clique para editar o título mestre</a:t>
             </a:r>
             <a:endParaRPr kumimoji="0" lang="en-US"/>
@@ -2597,13 +2547,11 @@
         <p:spPr/>
         <p:txBody>
           <a:bodyPr/>
-          <a:lstStyle>
-            <a:extLst/>
-          </a:lstStyle>
+          <a:lstStyle/>
           <a:p>
             <a:fld id="{63A1C593-65D0-4073-BCC9-577B9352EA97}" type="datetimeFigureOut">
               <a:rPr lang="en-US" smtClean="0"/>
-              <a:t>9/28/2019</a:t>
+              <a:t>10/30/2019</a:t>
             </a:fld>
             <a:endParaRPr lang="en-US"/>
           </a:p>
@@ -2622,9 +2570,7 @@
         <p:spPr/>
         <p:txBody>
           <a:bodyPr/>
-          <a:lstStyle>
-            <a:extLst/>
-          </a:lstStyle>
+          <a:lstStyle/>
           <a:p>
             <a:endParaRPr lang="en-US"/>
           </a:p>
@@ -2643,9 +2589,7 @@
         <p:spPr/>
         <p:txBody>
           <a:bodyPr/>
-          <a:lstStyle>
-            <a:extLst/>
-          </a:lstStyle>
+          <a:lstStyle/>
           <a:p>
             <a:fld id="{9B618960-8005-486C-9A75-10CB2AAC16F9}" type="slidenum">
               <a:rPr lang="en-US" smtClean="0"/>
@@ -2722,7 +2666,7 @@
           </a:lstStyle>
           <a:p>
             <a:r>
-              <a:rPr kumimoji="0" lang="pt-BR" smtClean="0"/>
+              <a:rPr kumimoji="0" lang="pt-BR"/>
               <a:t>Clique para editar o título mestre</a:t>
             </a:r>
             <a:endParaRPr kumimoji="0" lang="en-US"/>
@@ -2773,7 +2717,7 @@
           <a:p>
             <a:pPr lvl="0" eaLnBrk="1" latinLnBrk="0" hangingPunct="1"/>
             <a:r>
-              <a:rPr kumimoji="0" lang="pt-BR" smtClean="0"/>
+              <a:rPr kumimoji="0" lang="pt-BR"/>
               <a:t>Clique para editar o texto mestre</a:t>
             </a:r>
           </a:p>
@@ -2818,35 +2762,35 @@
           <a:p>
             <a:pPr lvl="0" eaLnBrk="1" latinLnBrk="0" hangingPunct="1"/>
             <a:r>
-              <a:rPr lang="pt-BR" smtClean="0"/>
+              <a:rPr lang="pt-BR"/>
               <a:t>Clique para editar o texto mestre</a:t>
             </a:r>
           </a:p>
           <a:p>
             <a:pPr lvl="1" eaLnBrk="1" latinLnBrk="0" hangingPunct="1"/>
             <a:r>
-              <a:rPr lang="pt-BR" smtClean="0"/>
+              <a:rPr lang="pt-BR"/>
               <a:t>Segundo nível</a:t>
             </a:r>
           </a:p>
           <a:p>
             <a:pPr lvl="2" eaLnBrk="1" latinLnBrk="0" hangingPunct="1"/>
             <a:r>
-              <a:rPr lang="pt-BR" smtClean="0"/>
+              <a:rPr lang="pt-BR"/>
               <a:t>Terceiro nível</a:t>
             </a:r>
           </a:p>
           <a:p>
             <a:pPr lvl="3" eaLnBrk="1" latinLnBrk="0" hangingPunct="1"/>
             <a:r>
-              <a:rPr lang="pt-BR" smtClean="0"/>
+              <a:rPr lang="pt-BR"/>
               <a:t>Quarto nível</a:t>
             </a:r>
           </a:p>
           <a:p>
             <a:pPr lvl="4" eaLnBrk="1" latinLnBrk="0" hangingPunct="1"/>
             <a:r>
-              <a:rPr lang="pt-BR" smtClean="0"/>
+              <a:rPr lang="pt-BR"/>
               <a:t>Quinto nível</a:t>
             </a:r>
             <a:endParaRPr kumimoji="0" lang="en-US"/>
@@ -2871,13 +2815,11 @@
         </p:spPr>
         <p:txBody>
           <a:bodyPr/>
-          <a:lstStyle>
-            <a:extLst/>
-          </a:lstStyle>
+          <a:lstStyle/>
           <a:p>
             <a:fld id="{63A1C593-65D0-4073-BCC9-577B9352EA97}" type="datetimeFigureOut">
               <a:rPr lang="en-US" smtClean="0"/>
-              <a:t>9/28/2019</a:t>
+              <a:t>10/30/2019</a:t>
             </a:fld>
             <a:endParaRPr lang="en-US"/>
           </a:p>
@@ -2896,9 +2838,7 @@
         <p:spPr/>
         <p:txBody>
           <a:bodyPr/>
-          <a:lstStyle>
-            <a:extLst/>
-          </a:lstStyle>
+          <a:lstStyle/>
           <a:p>
             <a:endParaRPr lang="en-US"/>
           </a:p>
@@ -2917,9 +2857,7 @@
         <p:spPr/>
         <p:txBody>
           <a:bodyPr/>
-          <a:lstStyle>
-            <a:extLst/>
-          </a:lstStyle>
+          <a:lstStyle/>
           <a:p>
             <a:fld id="{9B618960-8005-486C-9A75-10CB2AAC16F9}" type="slidenum">
               <a:rPr lang="en-US" smtClean="0"/>
@@ -3000,7 +2938,7 @@
           <a:p>
             <a:pPr lvl="0" eaLnBrk="1" latinLnBrk="0" hangingPunct="1"/>
             <a:r>
-              <a:rPr kumimoji="0" lang="pt-BR" smtClean="0"/>
+              <a:rPr kumimoji="0" lang="pt-BR"/>
               <a:t>Clique para editar o texto mestre</a:t>
             </a:r>
           </a:p>
@@ -3049,7 +2987,7 @@
           </a:lstStyle>
           <a:p>
             <a:r>
-              <a:rPr kumimoji="0" lang="pt-BR" smtClean="0"/>
+              <a:rPr kumimoji="0" lang="pt-BR"/>
               <a:t>Clique no ícone para adicionar uma imagem</a:t>
             </a:r>
             <a:endParaRPr kumimoji="0" lang="en-US" dirty="0"/>
@@ -3082,7 +3020,7 @@
           <a:p>
             <a:fld id="{63A1C593-65D0-4073-BCC9-577B9352EA97}" type="datetimeFigureOut">
               <a:rPr lang="en-US" smtClean="0"/>
-              <a:t>9/28/2019</a:t>
+              <a:t>10/30/2019</a:t>
             </a:fld>
             <a:endParaRPr lang="en-US"/>
           </a:p>
@@ -3194,7 +3132,7 @@
           </a:lstStyle>
           <a:p>
             <a:r>
-              <a:rPr kumimoji="0" lang="pt-BR" smtClean="0"/>
+              <a:rPr kumimoji="0" lang="pt-BR"/>
               <a:t>Clique para editar o título mestre</a:t>
             </a:r>
             <a:endParaRPr kumimoji="0" lang="en-US"/>
@@ -3277,9 +3215,7 @@
         </p:spPr>
         <p:txBody>
           <a:bodyPr vert="horz" wrap="square" lIns="91440" tIns="45720" rIns="91440" bIns="45720" anchor="t" compatLnSpc="1"/>
-          <a:lstStyle>
-            <a:extLst/>
-          </a:lstStyle>
+          <a:lstStyle/>
           <a:p>
             <a:endParaRPr kumimoji="0" lang="en-US"/>
           </a:p>
@@ -3359,9 +3295,7 @@
         </p:spPr>
         <p:txBody>
           <a:bodyPr vert="horz" wrap="square" lIns="91440" tIns="45720" rIns="91440" bIns="45720" anchor="t" compatLnSpc="1"/>
-          <a:lstStyle>
-            <a:extLst/>
-          </a:lstStyle>
+          <a:lstStyle/>
           <a:p>
             <a:endParaRPr kumimoji="0" lang="en-US"/>
           </a:p>
@@ -3469,9 +3403,7 @@
         </p:style>
         <p:txBody>
           <a:bodyPr vert="horz" wrap="square" lIns="91440" tIns="45720" rIns="91440" bIns="45720" anchor="ctr" compatLnSpc="1"/>
-          <a:lstStyle>
-            <a:extLst/>
-          </a:lstStyle>
+          <a:lstStyle/>
           <a:p>
             <a:pPr algn="ctr" eaLnBrk="1" latinLnBrk="0" hangingPunct="1"/>
             <a:endParaRPr kumimoji="0" lang="en-US"/>
@@ -3602,9 +3534,7 @@
         </p:style>
         <p:txBody>
           <a:bodyPr anchor="ctr"/>
-          <a:lstStyle>
-            <a:extLst/>
-          </a:lstStyle>
+          <a:lstStyle/>
           <a:p>
             <a:pPr algn="l" eaLnBrk="1" latinLnBrk="0" hangingPunct="1"/>
             <a:endParaRPr kumimoji="0" lang="en-US"/>
@@ -3682,9 +3612,7 @@
         </p:style>
         <p:txBody>
           <a:bodyPr anchor="ctr"/>
-          <a:lstStyle>
-            <a:extLst/>
-          </a:lstStyle>
+          <a:lstStyle/>
           <a:p>
             <a:pPr algn="l" eaLnBrk="1" latinLnBrk="0" hangingPunct="1"/>
             <a:endParaRPr kumimoji="0" lang="en-US"/>
@@ -3797,9 +3725,7 @@
         </p:spPr>
         <p:txBody>
           <a:bodyPr vert="horz" wrap="square" lIns="91440" tIns="45720" rIns="91440" bIns="45720" anchor="t" compatLnSpc="1"/>
-          <a:lstStyle>
-            <a:extLst/>
-          </a:lstStyle>
+          <a:lstStyle/>
           <a:p>
             <a:endParaRPr kumimoji="0" lang="en-US"/>
           </a:p>
@@ -3879,9 +3805,7 @@
         </p:spPr>
         <p:txBody>
           <a:bodyPr vert="horz" wrap="square" lIns="91440" tIns="45720" rIns="91440" bIns="45720" anchor="t" compatLnSpc="1"/>
-          <a:lstStyle>
-            <a:extLst/>
-          </a:lstStyle>
+          <a:lstStyle/>
           <a:p>
             <a:endParaRPr kumimoji="0" lang="en-US"/>
           </a:p>
@@ -3989,9 +3913,7 @@
         </p:style>
         <p:txBody>
           <a:bodyPr vert="horz" wrap="square" lIns="91440" tIns="45720" rIns="91440" bIns="45720" anchor="ctr" compatLnSpc="1"/>
-          <a:lstStyle>
-            <a:extLst/>
-          </a:lstStyle>
+          <a:lstStyle/>
           <a:p>
             <a:pPr algn="ctr" eaLnBrk="1" latinLnBrk="0" hangingPunct="1"/>
             <a:endParaRPr kumimoji="0" lang="en-US"/>
@@ -4081,12 +4003,10 @@
               <a:bevelT w="25400" h="25400"/>
             </a:sp3d>
           </a:bodyPr>
-          <a:lstStyle>
-            <a:extLst/>
-          </a:lstStyle>
-          <a:p>
-            <a:r>
-              <a:rPr kumimoji="0" lang="pt-BR" smtClean="0"/>
+          <a:lstStyle/>
+          <a:p>
+            <a:r>
+              <a:rPr kumimoji="0" lang="pt-BR"/>
               <a:t>Clique para editar o título mestre</a:t>
             </a:r>
             <a:endParaRPr kumimoji="0" lang="en-US"/>
@@ -4116,41 +4036,39 @@
           <a:bodyPr vert="horz">
             <a:normAutofit/>
           </a:bodyPr>
-          <a:lstStyle>
-            <a:extLst/>
-          </a:lstStyle>
+          <a:lstStyle/>
           <a:p>
             <a:pPr lvl="0" eaLnBrk="1" latinLnBrk="0" hangingPunct="1"/>
             <a:r>
-              <a:rPr kumimoji="0" lang="pt-BR" smtClean="0"/>
+              <a:rPr kumimoji="0" lang="pt-BR"/>
               <a:t>Clique para editar o texto mestre</a:t>
             </a:r>
           </a:p>
           <a:p>
             <a:pPr lvl="1" eaLnBrk="1" latinLnBrk="0" hangingPunct="1"/>
             <a:r>
-              <a:rPr kumimoji="0" lang="pt-BR" smtClean="0"/>
+              <a:rPr kumimoji="0" lang="pt-BR"/>
               <a:t>Segundo nível</a:t>
             </a:r>
           </a:p>
           <a:p>
             <a:pPr lvl="2" eaLnBrk="1" latinLnBrk="0" hangingPunct="1"/>
             <a:r>
-              <a:rPr kumimoji="0" lang="pt-BR" smtClean="0"/>
+              <a:rPr kumimoji="0" lang="pt-BR"/>
               <a:t>Terceiro nível</a:t>
             </a:r>
           </a:p>
           <a:p>
             <a:pPr lvl="3" eaLnBrk="1" latinLnBrk="0" hangingPunct="1"/>
             <a:r>
-              <a:rPr kumimoji="0" lang="pt-BR" smtClean="0"/>
+              <a:rPr kumimoji="0" lang="pt-BR"/>
               <a:t>Quarto nível</a:t>
             </a:r>
           </a:p>
           <a:p>
             <a:pPr lvl="4" eaLnBrk="1" latinLnBrk="0" hangingPunct="1"/>
             <a:r>
-              <a:rPr kumimoji="0" lang="pt-BR" smtClean="0"/>
+              <a:rPr kumimoji="0" lang="pt-BR"/>
               <a:t>Quinto nível</a:t>
             </a:r>
             <a:endParaRPr kumimoji="0" lang="en-US"/>
@@ -4191,7 +4109,7 @@
           <a:p>
             <a:fld id="{63A1C593-65D0-4073-BCC9-577B9352EA97}" type="datetimeFigureOut">
               <a:rPr lang="en-US" smtClean="0"/>
-              <a:t>9/28/2019</a:t>
+              <a:t>10/30/2019</a:t>
             </a:fld>
             <a:endParaRPr lang="en-US"/>
           </a:p>
@@ -4821,38 +4739,22 @@
             <a:pPr algn="r"/>
             <a:r>
               <a:rPr lang="pt-BR" altLang="en-US" sz="1600" dirty="0"/>
-              <a:t>PPG Aplicações para </a:t>
-            </a:r>
-            <a:r>
-              <a:rPr lang="pt-BR" altLang="en-US" sz="1600" dirty="0" smtClean="0"/>
-              <a:t>Web - </a:t>
-            </a:r>
-            <a:r>
-              <a:rPr lang="pt-BR" altLang="en-US" sz="1600" dirty="0" smtClean="0">
-                <a:sym typeface="+mn-ea"/>
-              </a:rPr>
-              <a:t>Polo </a:t>
-            </a:r>
-            <a:r>
-              <a:rPr lang="pt-BR" altLang="en-US" sz="1600" dirty="0" smtClean="0">
-                <a:sym typeface="+mn-ea"/>
-              </a:rPr>
-              <a:t>SJN</a:t>
-            </a:r>
-          </a:p>
-          <a:p>
-            <a:pPr algn="r"/>
-            <a:r>
-              <a:rPr lang="pt-BR" altLang="en-US" sz="1600" dirty="0" smtClean="0">
-                <a:sym typeface="+mn-ea"/>
-              </a:rPr>
-              <a:t>Prof. Dr. Vinicius Menezes de Oliveira</a:t>
+              <a:t>PPG Aplicações para Web - </a:t>
             </a:r>
             <a:r>
               <a:rPr lang="pt-BR" altLang="en-US" sz="1600" dirty="0">
                 <a:sym typeface="+mn-ea"/>
               </a:rPr>
-              <a:t/>
+              <a:t>Polo SJN</a:t>
+            </a:r>
+          </a:p>
+          <a:p>
+            <a:pPr algn="r"/>
+            <a:r>
+              <a:rPr lang="pt-BR" altLang="en-US" sz="1600" dirty="0">
+                <a:sym typeface="+mn-ea"/>
+              </a:rPr>
+              <a:t>Prof. Dr. Vinicius Menezes de Oliveira</a:t>
             </a:r>
             <a:br>
               <a:rPr lang="pt-BR" altLang="en-US" sz="1600" dirty="0">
@@ -4884,13 +4786,5430 @@
   <p:clrMapOvr>
     <a:masterClrMapping/>
   </p:clrMapOvr>
-  <p:timing>
-    <p:tnLst>
-      <p:par>
-        <p:cTn id="1" dur="indefinite" restart="never" nodeType="tmRoot"/>
-      </p:par>
-    </p:tnLst>
-  </p:timing>
+</p:sld>
+</file>
+
+<file path=ppt/slides/slide10.xml><?xml version="1.0" encoding="utf-8"?>
+<p:sld xmlns:a="http://schemas.openxmlformats.org/drawingml/2006/main" xmlns:r="http://schemas.openxmlformats.org/officeDocument/2006/relationships" xmlns:p="http://schemas.openxmlformats.org/presentationml/2006/main">
+  <p:cSld>
+    <p:spTree>
+      <p:nvGrpSpPr>
+        <p:cNvPr id="1" name=""/>
+        <p:cNvGrpSpPr/>
+        <p:nvPr/>
+      </p:nvGrpSpPr>
+      <p:grpSpPr>
+        <a:xfrm>
+          <a:off x="0" y="0"/>
+          <a:ext cx="0" cy="0"/>
+          <a:chOff x="0" y="0"/>
+          <a:chExt cx="0" cy="0"/>
+        </a:xfrm>
+      </p:grpSpPr>
+      <p:sp>
+        <p:nvSpPr>
+          <p:cNvPr id="3" name="Espaço Reservado para Conteúdo 2"/>
+          <p:cNvSpPr>
+            <a:spLocks noGrp="1"/>
+          </p:cNvSpPr>
+          <p:nvPr>
+            <p:ph idx="1"/>
+          </p:nvPr>
+        </p:nvSpPr>
+        <p:spPr/>
+        <p:txBody>
+          <a:bodyPr>
+            <a:noAutofit/>
+          </a:bodyPr>
+          <a:lstStyle/>
+          <a:p>
+            <a:pPr rtl="0"/>
+            <a:r>
+              <a:rPr lang="pt-BR" sz="2000" b="0" dirty="0">
+                <a:solidFill>
+                  <a:srgbClr val="000000"/>
+                </a:solidFill>
+                <a:effectLst/>
+              </a:rPr>
+              <a:t>Aplicações de alto nível onde pessoas com menor conhecimento técnico, porém com maior conhecimento da área de negócio, podem obter um resultado satisfatório. </a:t>
+            </a:r>
+          </a:p>
+          <a:p>
+            <a:pPr rtl="0"/>
+            <a:r>
+              <a:rPr lang="pt-BR" sz="2000" b="0" dirty="0">
+                <a:solidFill>
+                  <a:srgbClr val="000000"/>
+                </a:solidFill>
+                <a:effectLst/>
+              </a:rPr>
+              <a:t>Reafirmando a computação como uma ferramenta facilitadora, focada na solução de problemas e não na necessidade de resolução de problemas técnicos.</a:t>
+            </a:r>
+          </a:p>
+        </p:txBody>
+      </p:sp>
+      <p:sp>
+        <p:nvSpPr>
+          <p:cNvPr id="2" name="Título 1"/>
+          <p:cNvSpPr>
+            <a:spLocks noGrp="1"/>
+          </p:cNvSpPr>
+          <p:nvPr>
+            <p:ph type="title"/>
+          </p:nvPr>
+        </p:nvSpPr>
+        <p:spPr/>
+        <p:txBody>
+          <a:bodyPr/>
+          <a:lstStyle/>
+          <a:p>
+            <a:r>
+              <a:rPr lang="pt-BR" altLang="en-US" dirty="0"/>
+              <a:t>Conclusões</a:t>
+            </a:r>
+          </a:p>
+        </p:txBody>
+      </p:sp>
+    </p:spTree>
+    <p:extLst>
+      <p:ext uri="{BB962C8B-B14F-4D97-AF65-F5344CB8AC3E}">
+        <p14:creationId xmlns:p14="http://schemas.microsoft.com/office/powerpoint/2010/main" val="1998599728"/>
+      </p:ext>
+    </p:extLst>
+  </p:cSld>
+  <p:clrMapOvr>
+    <a:masterClrMapping/>
+  </p:clrMapOvr>
+</p:sld>
+</file>
+
+<file path=ppt/slides/slide11.xml><?xml version="1.0" encoding="utf-8"?>
+<p:sld xmlns:a="http://schemas.openxmlformats.org/drawingml/2006/main" xmlns:r="http://schemas.openxmlformats.org/officeDocument/2006/relationships" xmlns:p="http://schemas.openxmlformats.org/presentationml/2006/main">
+  <p:cSld>
+    <p:spTree>
+      <p:nvGrpSpPr>
+        <p:cNvPr id="1" name=""/>
+        <p:cNvGrpSpPr/>
+        <p:nvPr/>
+      </p:nvGrpSpPr>
+      <p:grpSpPr>
+        <a:xfrm>
+          <a:off x="0" y="0"/>
+          <a:ext cx="0" cy="0"/>
+          <a:chOff x="0" y="0"/>
+          <a:chExt cx="0" cy="0"/>
+        </a:xfrm>
+      </p:grpSpPr>
+      <p:sp>
+        <p:nvSpPr>
+          <p:cNvPr id="3" name="Espaço Reservado para Conteúdo 2"/>
+          <p:cNvSpPr>
+            <a:spLocks noGrp="1"/>
+          </p:cNvSpPr>
+          <p:nvPr>
+            <p:ph idx="1"/>
+          </p:nvPr>
+        </p:nvSpPr>
+        <p:spPr/>
+        <p:txBody>
+          <a:bodyPr>
+            <a:normAutofit fontScale="55000" lnSpcReduction="20000"/>
+          </a:bodyPr>
+          <a:lstStyle/>
+          <a:p>
+            <a:pPr rtl="0"/>
+            <a:r>
+              <a:rPr lang="pt-BR" sz="1900" b="0" i="0" dirty="0">
+                <a:solidFill>
+                  <a:srgbClr val="000000"/>
+                </a:solidFill>
+                <a:effectLst/>
+                <a:latin typeface="Times, serif"/>
+              </a:rPr>
+              <a:t>BHARDWAJ, </a:t>
+            </a:r>
+            <a:r>
+              <a:rPr lang="pt-BR" sz="1900" b="0" i="0" dirty="0" err="1">
+                <a:solidFill>
+                  <a:srgbClr val="000000"/>
+                </a:solidFill>
+                <a:effectLst/>
+                <a:latin typeface="Times, serif"/>
+              </a:rPr>
+              <a:t>Sushil</a:t>
+            </a:r>
+            <a:r>
+              <a:rPr lang="pt-BR" sz="1900" b="0" i="0" dirty="0">
+                <a:solidFill>
+                  <a:srgbClr val="000000"/>
+                </a:solidFill>
+                <a:effectLst/>
+                <a:latin typeface="Times, serif"/>
+              </a:rPr>
+              <a:t>; </a:t>
+            </a:r>
+            <a:r>
+              <a:rPr lang="pt-BR" sz="1900" b="0" i="0" dirty="0" err="1">
+                <a:solidFill>
+                  <a:srgbClr val="000000"/>
+                </a:solidFill>
+                <a:effectLst/>
+                <a:latin typeface="Times, serif"/>
+              </a:rPr>
+              <a:t>Jain</a:t>
+            </a:r>
+            <a:r>
+              <a:rPr lang="pt-BR" sz="1900" b="0" i="0" dirty="0">
+                <a:solidFill>
+                  <a:srgbClr val="000000"/>
+                </a:solidFill>
+                <a:effectLst/>
+                <a:latin typeface="Times, serif"/>
+              </a:rPr>
+              <a:t>, </a:t>
+            </a:r>
+            <a:r>
+              <a:rPr lang="pt-BR" sz="1900" b="0" i="0" dirty="0" err="1">
+                <a:solidFill>
+                  <a:srgbClr val="000000"/>
+                </a:solidFill>
+                <a:effectLst/>
+                <a:latin typeface="Times, serif"/>
+              </a:rPr>
+              <a:t>Leena</a:t>
+            </a:r>
+            <a:r>
+              <a:rPr lang="pt-BR" sz="1900" b="0" i="0" dirty="0">
+                <a:solidFill>
+                  <a:srgbClr val="000000"/>
+                </a:solidFill>
+                <a:effectLst/>
+                <a:latin typeface="Times, serif"/>
+              </a:rPr>
+              <a:t>; </a:t>
+            </a:r>
+            <a:r>
+              <a:rPr lang="pt-BR" sz="1900" b="0" i="0" dirty="0" err="1">
+                <a:solidFill>
+                  <a:srgbClr val="000000"/>
+                </a:solidFill>
+                <a:effectLst/>
+                <a:latin typeface="Times, serif"/>
+              </a:rPr>
+              <a:t>Jain</a:t>
+            </a:r>
+            <a:r>
+              <a:rPr lang="pt-BR" sz="1900" b="0" i="0" dirty="0">
+                <a:solidFill>
+                  <a:srgbClr val="000000"/>
+                </a:solidFill>
+                <a:effectLst/>
+                <a:latin typeface="Times, serif"/>
+              </a:rPr>
+              <a:t>, </a:t>
+            </a:r>
+            <a:r>
+              <a:rPr lang="pt-BR" sz="1900" b="0" i="0" dirty="0" err="1">
+                <a:solidFill>
+                  <a:srgbClr val="000000"/>
+                </a:solidFill>
+                <a:effectLst/>
+                <a:latin typeface="Times, serif"/>
+              </a:rPr>
+              <a:t>Sandeep</a:t>
+            </a:r>
+            <a:r>
+              <a:rPr lang="pt-BR" sz="1900" b="0" i="0" dirty="0">
+                <a:solidFill>
+                  <a:srgbClr val="000000"/>
+                </a:solidFill>
+                <a:effectLst/>
+                <a:latin typeface="Times, serif"/>
+              </a:rPr>
+              <a:t>. </a:t>
+            </a:r>
+            <a:r>
+              <a:rPr lang="pt-BR" sz="1900" b="0" i="0" dirty="0" err="1">
+                <a:solidFill>
+                  <a:srgbClr val="000000"/>
+                </a:solidFill>
+                <a:effectLst/>
+                <a:latin typeface="Times, serif"/>
+              </a:rPr>
+              <a:t>Cloud</a:t>
+            </a:r>
+            <a:r>
+              <a:rPr lang="pt-BR" sz="1900" b="0" i="0" dirty="0">
+                <a:solidFill>
+                  <a:srgbClr val="000000"/>
+                </a:solidFill>
+                <a:effectLst/>
+                <a:latin typeface="Times, serif"/>
+              </a:rPr>
+              <a:t> </a:t>
+            </a:r>
+            <a:r>
+              <a:rPr lang="pt-BR" sz="1900" b="0" i="0" dirty="0" err="1">
+                <a:solidFill>
+                  <a:srgbClr val="000000"/>
+                </a:solidFill>
+                <a:effectLst/>
+                <a:latin typeface="Times, serif"/>
+              </a:rPr>
+              <a:t>computing</a:t>
+            </a:r>
+            <a:r>
+              <a:rPr lang="pt-BR" sz="1900" b="0" i="0" dirty="0">
+                <a:solidFill>
+                  <a:srgbClr val="000000"/>
+                </a:solidFill>
+                <a:effectLst/>
+                <a:latin typeface="Times, serif"/>
+              </a:rPr>
+              <a:t>: A </a:t>
+            </a:r>
+            <a:r>
+              <a:rPr lang="pt-BR" sz="1900" b="0" i="0" dirty="0" err="1">
+                <a:solidFill>
+                  <a:srgbClr val="000000"/>
+                </a:solidFill>
+                <a:effectLst/>
+                <a:latin typeface="Times, serif"/>
+              </a:rPr>
+              <a:t>study</a:t>
+            </a:r>
+            <a:r>
+              <a:rPr lang="pt-BR" sz="1900" b="0" i="0" dirty="0">
+                <a:solidFill>
+                  <a:srgbClr val="000000"/>
+                </a:solidFill>
+                <a:effectLst/>
+                <a:latin typeface="Times, serif"/>
+              </a:rPr>
+              <a:t> </a:t>
+            </a:r>
+            <a:r>
+              <a:rPr lang="pt-BR" sz="1900" b="0" i="0" dirty="0" err="1">
+                <a:solidFill>
+                  <a:srgbClr val="000000"/>
+                </a:solidFill>
+                <a:effectLst/>
+                <a:latin typeface="Times, serif"/>
+              </a:rPr>
+              <a:t>of</a:t>
+            </a:r>
+            <a:r>
+              <a:rPr lang="pt-BR" sz="1900" b="0" i="0" dirty="0">
+                <a:solidFill>
+                  <a:srgbClr val="000000"/>
+                </a:solidFill>
+                <a:effectLst/>
+                <a:latin typeface="Times, serif"/>
+              </a:rPr>
+              <a:t> </a:t>
+            </a:r>
+            <a:r>
+              <a:rPr lang="pt-BR" sz="1900" b="0" i="0" dirty="0" err="1">
+                <a:solidFill>
+                  <a:srgbClr val="000000"/>
+                </a:solidFill>
+                <a:effectLst/>
+                <a:latin typeface="Times, serif"/>
+              </a:rPr>
+              <a:t>infrastructure</a:t>
+            </a:r>
+            <a:r>
+              <a:rPr lang="pt-BR" sz="1900" b="0" i="0" dirty="0">
+                <a:solidFill>
+                  <a:srgbClr val="000000"/>
+                </a:solidFill>
+                <a:effectLst/>
+                <a:latin typeface="Times, serif"/>
+              </a:rPr>
+              <a:t> as a </a:t>
+            </a:r>
+            <a:r>
+              <a:rPr lang="pt-BR" sz="1900" b="0" i="0" dirty="0" err="1">
+                <a:solidFill>
+                  <a:srgbClr val="000000"/>
+                </a:solidFill>
+                <a:effectLst/>
+                <a:latin typeface="Times, serif"/>
+              </a:rPr>
+              <a:t>service</a:t>
+            </a:r>
+            <a:r>
+              <a:rPr lang="pt-BR" sz="1900" b="0" i="0" dirty="0">
+                <a:solidFill>
+                  <a:srgbClr val="000000"/>
+                </a:solidFill>
+                <a:effectLst/>
+                <a:latin typeface="Times, serif"/>
+              </a:rPr>
+              <a:t> (IAAS). </a:t>
+            </a:r>
+            <a:r>
+              <a:rPr lang="pt-BR" sz="1900" b="0" i="0" dirty="0" err="1">
+                <a:solidFill>
+                  <a:srgbClr val="000000"/>
+                </a:solidFill>
+                <a:effectLst/>
+                <a:latin typeface="Times, serif"/>
+              </a:rPr>
+              <a:t>International</a:t>
+            </a:r>
+            <a:r>
+              <a:rPr lang="pt-BR" sz="1900" b="0" i="0" dirty="0">
+                <a:solidFill>
+                  <a:srgbClr val="000000"/>
+                </a:solidFill>
+                <a:effectLst/>
+                <a:latin typeface="Times, serif"/>
+              </a:rPr>
+              <a:t> </a:t>
+            </a:r>
+            <a:r>
+              <a:rPr lang="pt-BR" sz="1900" b="0" i="0" dirty="0" err="1">
+                <a:solidFill>
+                  <a:srgbClr val="000000"/>
+                </a:solidFill>
+                <a:effectLst/>
+                <a:latin typeface="Times, serif"/>
+              </a:rPr>
+              <a:t>Journal</a:t>
+            </a:r>
+            <a:r>
+              <a:rPr lang="pt-BR" sz="1900" b="0" i="0" dirty="0">
+                <a:solidFill>
+                  <a:srgbClr val="000000"/>
+                </a:solidFill>
+                <a:effectLst/>
+                <a:latin typeface="Times, serif"/>
+              </a:rPr>
+              <a:t> </a:t>
+            </a:r>
+            <a:r>
+              <a:rPr lang="pt-BR" sz="1900" b="0" i="0" dirty="0" err="1">
+                <a:solidFill>
+                  <a:srgbClr val="000000"/>
+                </a:solidFill>
+                <a:effectLst/>
+                <a:latin typeface="Times, serif"/>
+              </a:rPr>
+              <a:t>of</a:t>
+            </a:r>
+            <a:r>
+              <a:rPr lang="pt-BR" sz="1900" b="0" i="0" dirty="0">
+                <a:solidFill>
+                  <a:srgbClr val="000000"/>
+                </a:solidFill>
+                <a:effectLst/>
+                <a:latin typeface="Times, serif"/>
+              </a:rPr>
+              <a:t> </a:t>
+            </a:r>
+            <a:r>
+              <a:rPr lang="pt-BR" sz="1900" b="0" i="0" dirty="0" err="1">
+                <a:solidFill>
+                  <a:srgbClr val="000000"/>
+                </a:solidFill>
+                <a:effectLst/>
+                <a:latin typeface="Times, serif"/>
+              </a:rPr>
+              <a:t>engineering</a:t>
+            </a:r>
+            <a:r>
+              <a:rPr lang="pt-BR" sz="1900" b="0" i="0" dirty="0">
+                <a:solidFill>
+                  <a:srgbClr val="000000"/>
+                </a:solidFill>
+                <a:effectLst/>
+                <a:latin typeface="Times, serif"/>
+              </a:rPr>
+              <a:t> </a:t>
+            </a:r>
+            <a:r>
+              <a:rPr lang="pt-BR" sz="1900" b="0" i="0" dirty="0" err="1">
+                <a:solidFill>
+                  <a:srgbClr val="000000"/>
+                </a:solidFill>
+                <a:effectLst/>
+                <a:latin typeface="Times, serif"/>
+              </a:rPr>
+              <a:t>and</a:t>
+            </a:r>
+            <a:r>
+              <a:rPr lang="pt-BR" sz="1900" b="0" i="0" dirty="0">
+                <a:solidFill>
+                  <a:srgbClr val="000000"/>
+                </a:solidFill>
+                <a:effectLst/>
+                <a:latin typeface="Times, serif"/>
+              </a:rPr>
+              <a:t> </a:t>
+            </a:r>
+            <a:r>
+              <a:rPr lang="pt-BR" sz="1900" b="0" i="0" dirty="0" err="1">
+                <a:solidFill>
+                  <a:srgbClr val="000000"/>
+                </a:solidFill>
+                <a:effectLst/>
+                <a:latin typeface="Times, serif"/>
+              </a:rPr>
+              <a:t>information</a:t>
+            </a:r>
+            <a:r>
+              <a:rPr lang="pt-BR" sz="1900" b="0" i="0" dirty="0">
+                <a:solidFill>
+                  <a:srgbClr val="000000"/>
+                </a:solidFill>
+                <a:effectLst/>
+                <a:latin typeface="Times, serif"/>
+              </a:rPr>
+              <a:t> Technology, v. 2, n. 1, p. 60-63, Publicação eletrônica em </a:t>
+            </a:r>
+            <a:r>
+              <a:rPr lang="pt-BR" sz="1900" b="0" i="0" u="sng" dirty="0">
+                <a:solidFill>
+                  <a:srgbClr val="000000"/>
+                </a:solidFill>
+                <a:effectLst/>
+                <a:latin typeface="Times, serif"/>
+                <a:hlinkClick r:id="rId2"/>
+              </a:rPr>
+              <a:t>http://www.academia.edu/download/7299777/cloud%20computing%20a%20study%20of.pdf</a:t>
+            </a:r>
+            <a:r>
+              <a:rPr lang="pt-BR" sz="1900" b="0" i="0" dirty="0">
+                <a:solidFill>
+                  <a:srgbClr val="000000"/>
+                </a:solidFill>
+                <a:effectLst/>
+                <a:latin typeface="Times, serif"/>
+              </a:rPr>
+              <a:t>, 2010. </a:t>
+            </a:r>
+            <a:endParaRPr lang="pt-BR" sz="1900" b="0" i="0" dirty="0">
+              <a:solidFill>
+                <a:srgbClr val="000000"/>
+              </a:solidFill>
+              <a:effectLst/>
+            </a:endParaRPr>
+          </a:p>
+          <a:p>
+            <a:pPr rtl="0"/>
+            <a:r>
+              <a:rPr lang="pt-BR" sz="1900" b="0" i="0" dirty="0">
+                <a:solidFill>
+                  <a:srgbClr val="000000"/>
+                </a:solidFill>
+                <a:effectLst/>
+                <a:latin typeface="Times, serif"/>
+              </a:rPr>
+              <a:t>BERGMAN, </a:t>
+            </a:r>
+            <a:r>
+              <a:rPr lang="pt-BR" sz="1900" b="0" i="0" dirty="0" err="1">
+                <a:solidFill>
+                  <a:srgbClr val="000000"/>
+                </a:solidFill>
+                <a:effectLst/>
+                <a:latin typeface="Times, serif"/>
+              </a:rPr>
+              <a:t>Ofer</a:t>
+            </a:r>
+            <a:r>
+              <a:rPr lang="pt-BR" sz="1900" b="0" i="0" dirty="0">
+                <a:solidFill>
+                  <a:srgbClr val="000000"/>
+                </a:solidFill>
+                <a:effectLst/>
+                <a:latin typeface="Times, serif"/>
+              </a:rPr>
+              <a:t> &amp; </a:t>
+            </a:r>
+            <a:r>
+              <a:rPr lang="pt-BR" sz="1900" b="0" i="0" dirty="0" err="1">
+                <a:solidFill>
+                  <a:srgbClr val="000000"/>
+                </a:solidFill>
+                <a:effectLst/>
+                <a:latin typeface="Times, serif"/>
+              </a:rPr>
+              <a:t>Beyth-Marom</a:t>
+            </a:r>
+            <a:r>
+              <a:rPr lang="pt-BR" sz="1900" b="0" i="0" dirty="0">
+                <a:solidFill>
+                  <a:srgbClr val="000000"/>
+                </a:solidFill>
+                <a:effectLst/>
+                <a:latin typeface="Times, serif"/>
+              </a:rPr>
+              <a:t>, Ruth &amp; </a:t>
+            </a:r>
+            <a:r>
+              <a:rPr lang="pt-BR" sz="1900" b="0" i="0" dirty="0" err="1">
+                <a:solidFill>
+                  <a:srgbClr val="000000"/>
+                </a:solidFill>
+                <a:effectLst/>
+                <a:latin typeface="Times, serif"/>
+              </a:rPr>
+              <a:t>Nachmias</a:t>
+            </a:r>
+            <a:r>
+              <a:rPr lang="pt-BR" sz="1900" b="0" i="0" dirty="0">
+                <a:solidFill>
+                  <a:srgbClr val="000000"/>
+                </a:solidFill>
+                <a:effectLst/>
+                <a:latin typeface="Times, serif"/>
+              </a:rPr>
+              <a:t>, </a:t>
+            </a:r>
+            <a:r>
+              <a:rPr lang="pt-BR" sz="1900" b="0" i="0" dirty="0" err="1">
+                <a:solidFill>
+                  <a:srgbClr val="000000"/>
+                </a:solidFill>
+                <a:effectLst/>
+                <a:latin typeface="Times, serif"/>
+              </a:rPr>
+              <a:t>Rafi</a:t>
+            </a:r>
+            <a:r>
+              <a:rPr lang="pt-BR" sz="1900" b="0" i="0" dirty="0">
+                <a:solidFill>
+                  <a:srgbClr val="000000"/>
+                </a:solidFill>
+                <a:effectLst/>
+                <a:latin typeface="Times, serif"/>
+              </a:rPr>
+              <a:t>. The </a:t>
+            </a:r>
+            <a:r>
+              <a:rPr lang="pt-BR" sz="1900" b="0" i="0" dirty="0" err="1">
+                <a:solidFill>
+                  <a:srgbClr val="000000"/>
+                </a:solidFill>
+                <a:effectLst/>
+                <a:latin typeface="Times, serif"/>
+              </a:rPr>
+              <a:t>project</a:t>
+            </a:r>
+            <a:r>
+              <a:rPr lang="pt-BR" sz="1900" b="0" i="0" dirty="0">
+                <a:solidFill>
+                  <a:srgbClr val="000000"/>
+                </a:solidFill>
+                <a:effectLst/>
+                <a:latin typeface="Times, serif"/>
+              </a:rPr>
+              <a:t> </a:t>
+            </a:r>
+            <a:r>
+              <a:rPr lang="pt-BR" sz="1900" b="0" i="0" dirty="0" err="1">
+                <a:solidFill>
+                  <a:srgbClr val="000000"/>
+                </a:solidFill>
+                <a:effectLst/>
+                <a:latin typeface="Times, serif"/>
+              </a:rPr>
+              <a:t>fragmentation</a:t>
+            </a:r>
+            <a:r>
+              <a:rPr lang="pt-BR" sz="1900" b="0" i="0" dirty="0">
+                <a:solidFill>
+                  <a:srgbClr val="000000"/>
+                </a:solidFill>
+                <a:effectLst/>
+                <a:latin typeface="Times, serif"/>
+              </a:rPr>
+              <a:t> </a:t>
+            </a:r>
+            <a:r>
+              <a:rPr lang="pt-BR" sz="1900" b="0" i="0" dirty="0" err="1">
+                <a:solidFill>
+                  <a:srgbClr val="000000"/>
+                </a:solidFill>
+                <a:effectLst/>
+                <a:latin typeface="Times, serif"/>
+              </a:rPr>
+              <a:t>problem</a:t>
+            </a:r>
+            <a:r>
+              <a:rPr lang="pt-BR" sz="1900" b="0" i="0" dirty="0">
+                <a:solidFill>
+                  <a:srgbClr val="000000"/>
+                </a:solidFill>
+                <a:effectLst/>
+                <a:latin typeface="Times, serif"/>
+              </a:rPr>
+              <a:t> in </a:t>
+            </a:r>
+            <a:r>
+              <a:rPr lang="pt-BR" sz="1900" b="0" i="0" dirty="0" err="1">
+                <a:solidFill>
+                  <a:srgbClr val="000000"/>
+                </a:solidFill>
+                <a:effectLst/>
+                <a:latin typeface="Times, serif"/>
+              </a:rPr>
+              <a:t>personal</a:t>
+            </a:r>
+            <a:r>
+              <a:rPr lang="pt-BR" sz="1900" b="0" i="0" dirty="0">
+                <a:solidFill>
+                  <a:srgbClr val="000000"/>
+                </a:solidFill>
+                <a:effectLst/>
+                <a:latin typeface="Times, serif"/>
+              </a:rPr>
+              <a:t> </a:t>
+            </a:r>
+            <a:r>
+              <a:rPr lang="pt-BR" sz="1900" b="0" i="0" dirty="0" err="1">
+                <a:solidFill>
+                  <a:srgbClr val="000000"/>
+                </a:solidFill>
+                <a:effectLst/>
+                <a:latin typeface="Times, serif"/>
+              </a:rPr>
+              <a:t>information</a:t>
+            </a:r>
+            <a:r>
+              <a:rPr lang="pt-BR" sz="1900" b="0" i="0" dirty="0">
+                <a:solidFill>
+                  <a:srgbClr val="000000"/>
+                </a:solidFill>
+                <a:effectLst/>
+                <a:latin typeface="Times, serif"/>
+              </a:rPr>
+              <a:t> management. 271-274. 10.1145/1124772.1124813. Publicação eletrônica em </a:t>
+            </a:r>
+            <a:r>
+              <a:rPr lang="pt-BR" sz="1900" u="sng" dirty="0">
+                <a:solidFill>
+                  <a:srgbClr val="000000"/>
+                </a:solidFill>
+                <a:effectLst/>
+                <a:hlinkClick r:id="rId3"/>
+              </a:rPr>
+              <a:t>https://www.researchgate.net/publication/221518347_The_project_fragmentation_problem_in_personal_information_management</a:t>
+            </a:r>
+            <a:r>
+              <a:rPr lang="pt-BR" sz="1900" dirty="0">
+                <a:solidFill>
+                  <a:srgbClr val="000000"/>
+                </a:solidFill>
+                <a:effectLst/>
+              </a:rPr>
+              <a:t>.</a:t>
+            </a:r>
+            <a:r>
+              <a:rPr lang="pt-BR" sz="1900" b="0" i="0" dirty="0">
+                <a:solidFill>
+                  <a:srgbClr val="000000"/>
+                </a:solidFill>
+                <a:effectLst/>
+                <a:latin typeface="Times, serif"/>
+              </a:rPr>
+              <a:t> 2006.</a:t>
+            </a:r>
+            <a:endParaRPr lang="pt-BR" sz="1900" dirty="0">
+              <a:solidFill>
+                <a:srgbClr val="000000"/>
+              </a:solidFill>
+              <a:effectLst/>
+            </a:endParaRPr>
+          </a:p>
+          <a:p>
+            <a:pPr rtl="0"/>
+            <a:r>
+              <a:rPr lang="pt-BR" sz="1900" b="0" i="0" dirty="0">
+                <a:solidFill>
+                  <a:srgbClr val="000000"/>
+                </a:solidFill>
+                <a:effectLst/>
+                <a:latin typeface="Times, serif"/>
+              </a:rPr>
+              <a:t>KELLEN, Vince; </a:t>
+            </a:r>
+            <a:r>
+              <a:rPr lang="pt-BR" sz="1900" b="0" i="0" dirty="0" err="1">
+                <a:solidFill>
+                  <a:srgbClr val="000000"/>
+                </a:solidFill>
+                <a:effectLst/>
+                <a:latin typeface="Times, serif"/>
+              </a:rPr>
+              <a:t>Stefanczyk</a:t>
+            </a:r>
+            <a:r>
+              <a:rPr lang="pt-BR" sz="1900" b="0" i="0" dirty="0">
+                <a:solidFill>
+                  <a:srgbClr val="000000"/>
+                </a:solidFill>
+                <a:effectLst/>
+                <a:latin typeface="Times, serif"/>
+              </a:rPr>
+              <a:t>, Keith. </a:t>
+            </a:r>
+            <a:r>
+              <a:rPr lang="pt-BR" sz="1900" b="0" i="0" dirty="0" err="1">
+                <a:solidFill>
+                  <a:srgbClr val="000000"/>
+                </a:solidFill>
+                <a:effectLst/>
+                <a:latin typeface="Times, serif"/>
+              </a:rPr>
+              <a:t>Complexity</a:t>
+            </a:r>
+            <a:r>
+              <a:rPr lang="pt-BR" sz="1900" b="0" i="0" dirty="0">
+                <a:solidFill>
+                  <a:srgbClr val="000000"/>
+                </a:solidFill>
+                <a:effectLst/>
+                <a:latin typeface="Times, serif"/>
+              </a:rPr>
+              <a:t>, </a:t>
+            </a:r>
+            <a:r>
+              <a:rPr lang="pt-BR" sz="1900" b="0" i="0" dirty="0" err="1">
+                <a:solidFill>
+                  <a:srgbClr val="000000"/>
+                </a:solidFill>
+                <a:effectLst/>
+                <a:latin typeface="Times, serif"/>
+              </a:rPr>
+              <a:t>Fragmentation</a:t>
+            </a:r>
+            <a:r>
+              <a:rPr lang="pt-BR" sz="1900" b="0" i="0" dirty="0">
+                <a:solidFill>
+                  <a:srgbClr val="000000"/>
+                </a:solidFill>
+                <a:effectLst/>
+                <a:latin typeface="Times, serif"/>
+              </a:rPr>
+              <a:t>, </a:t>
+            </a:r>
+            <a:r>
+              <a:rPr lang="pt-BR" sz="1900" b="0" i="0" dirty="0" err="1">
+                <a:solidFill>
+                  <a:srgbClr val="000000"/>
+                </a:solidFill>
+                <a:effectLst/>
+                <a:latin typeface="Times, serif"/>
+              </a:rPr>
+              <a:t>Uncertainty</a:t>
+            </a:r>
+            <a:r>
+              <a:rPr lang="pt-BR" sz="1900" b="0" i="0" dirty="0">
+                <a:solidFill>
+                  <a:srgbClr val="000000"/>
+                </a:solidFill>
+                <a:effectLst/>
+                <a:latin typeface="Times, serif"/>
+              </a:rPr>
+              <a:t> </a:t>
+            </a:r>
+            <a:r>
+              <a:rPr lang="pt-BR" sz="1900" b="0" i="0" dirty="0" err="1">
+                <a:solidFill>
+                  <a:srgbClr val="000000"/>
+                </a:solidFill>
+                <a:effectLst/>
+                <a:latin typeface="Times, serif"/>
+              </a:rPr>
+              <a:t>and</a:t>
+            </a:r>
+            <a:r>
+              <a:rPr lang="pt-BR" sz="1900" b="0" i="0" dirty="0">
+                <a:solidFill>
+                  <a:srgbClr val="000000"/>
+                </a:solidFill>
+                <a:effectLst/>
+                <a:latin typeface="Times, serif"/>
+              </a:rPr>
+              <a:t> </a:t>
+            </a:r>
+            <a:r>
+              <a:rPr lang="pt-BR" sz="1900" b="0" i="0" dirty="0" err="1">
+                <a:solidFill>
+                  <a:srgbClr val="000000"/>
+                </a:solidFill>
+                <a:effectLst/>
+                <a:latin typeface="Times, serif"/>
+              </a:rPr>
+              <a:t>Emergence</a:t>
+            </a:r>
+            <a:r>
+              <a:rPr lang="pt-BR" sz="1900" b="0" i="0" dirty="0">
+                <a:solidFill>
+                  <a:srgbClr val="000000"/>
+                </a:solidFill>
+                <a:effectLst/>
+                <a:latin typeface="Times, serif"/>
+              </a:rPr>
+              <a:t> in CRM. CRM White </a:t>
+            </a:r>
+            <a:r>
+              <a:rPr lang="pt-BR" sz="1900" b="0" i="0" dirty="0" err="1">
+                <a:solidFill>
+                  <a:srgbClr val="000000"/>
+                </a:solidFill>
+                <a:effectLst/>
+                <a:latin typeface="Times, serif"/>
+              </a:rPr>
+              <a:t>Paper</a:t>
+            </a:r>
+            <a:r>
+              <a:rPr lang="pt-BR" sz="1900" b="0" i="0" dirty="0">
+                <a:solidFill>
+                  <a:srgbClr val="000000"/>
+                </a:solidFill>
+                <a:effectLst/>
+                <a:latin typeface="Times, serif"/>
+              </a:rPr>
+              <a:t>, p. 1-15, Publicação eletrônica disponível em </a:t>
+            </a:r>
+            <a:r>
+              <a:rPr lang="pt-BR" sz="1900" u="sng" dirty="0">
+                <a:solidFill>
+                  <a:srgbClr val="000000"/>
+                </a:solidFill>
+                <a:effectLst/>
+                <a:hlinkClick r:id="rId4"/>
+              </a:rPr>
+              <a:t>http://www.kellen.net/crmcomp.pdf</a:t>
+            </a:r>
+            <a:r>
+              <a:rPr lang="pt-BR" sz="1900" b="0" i="0" dirty="0">
+                <a:solidFill>
+                  <a:srgbClr val="000000"/>
+                </a:solidFill>
+                <a:effectLst/>
+                <a:latin typeface="Times, serif"/>
+              </a:rPr>
+              <a:t>, 2002. </a:t>
+            </a:r>
+            <a:endParaRPr lang="pt-BR" sz="1900" dirty="0">
+              <a:solidFill>
+                <a:srgbClr val="000000"/>
+              </a:solidFill>
+              <a:effectLst/>
+            </a:endParaRPr>
+          </a:p>
+          <a:p>
+            <a:pPr rtl="0"/>
+            <a:r>
+              <a:rPr lang="pt-BR" sz="1900" b="0" i="0" dirty="0">
+                <a:solidFill>
+                  <a:srgbClr val="000000"/>
+                </a:solidFill>
+                <a:effectLst/>
+                <a:latin typeface="Times, serif"/>
+              </a:rPr>
+              <a:t>KOPNIAK, </a:t>
+            </a:r>
+            <a:r>
+              <a:rPr lang="pt-BR" sz="1900" b="0" i="0" dirty="0" err="1">
+                <a:solidFill>
+                  <a:srgbClr val="000000"/>
+                </a:solidFill>
+                <a:effectLst/>
+                <a:latin typeface="Times, serif"/>
+              </a:rPr>
+              <a:t>Piotr</a:t>
+            </a:r>
+            <a:r>
+              <a:rPr lang="pt-BR" sz="1900" b="0" i="0" dirty="0">
+                <a:solidFill>
+                  <a:srgbClr val="000000"/>
+                </a:solidFill>
+                <a:effectLst/>
+                <a:latin typeface="Times, serif"/>
+              </a:rPr>
+              <a:t>. SOA System </a:t>
+            </a:r>
+            <a:r>
+              <a:rPr lang="pt-BR" sz="1900" b="0" i="0" dirty="0" err="1">
+                <a:solidFill>
+                  <a:srgbClr val="000000"/>
+                </a:solidFill>
+                <a:effectLst/>
+                <a:latin typeface="Times, serif"/>
+              </a:rPr>
+              <a:t>Integration</a:t>
+            </a:r>
+            <a:r>
+              <a:rPr lang="pt-BR" sz="1900" b="0" i="0" dirty="0">
+                <a:solidFill>
+                  <a:srgbClr val="000000"/>
+                </a:solidFill>
+                <a:effectLst/>
+                <a:latin typeface="Times, serif"/>
+              </a:rPr>
+              <a:t> </a:t>
+            </a:r>
+            <a:r>
+              <a:rPr lang="pt-BR" sz="1900" b="0" i="0" dirty="0" err="1">
+                <a:solidFill>
+                  <a:srgbClr val="000000"/>
+                </a:solidFill>
+                <a:effectLst/>
+                <a:latin typeface="Times, serif"/>
+              </a:rPr>
+              <a:t>with</a:t>
+            </a:r>
+            <a:r>
+              <a:rPr lang="pt-BR" sz="1900" b="0" i="0" dirty="0">
+                <a:solidFill>
+                  <a:srgbClr val="000000"/>
+                </a:solidFill>
+                <a:effectLst/>
+                <a:latin typeface="Times, serif"/>
+              </a:rPr>
+              <a:t> Web Services, Varia </a:t>
+            </a:r>
+            <a:r>
+              <a:rPr lang="pt-BR" sz="1900" b="0" i="0" dirty="0" err="1">
+                <a:solidFill>
+                  <a:srgbClr val="000000"/>
+                </a:solidFill>
+                <a:effectLst/>
+                <a:latin typeface="Times, serif"/>
+              </a:rPr>
+              <a:t>Informatica</a:t>
+            </a:r>
+            <a:r>
+              <a:rPr lang="pt-BR" sz="1900" b="0" i="0" dirty="0">
+                <a:solidFill>
+                  <a:srgbClr val="000000"/>
+                </a:solidFill>
+                <a:effectLst/>
+                <a:latin typeface="Times, serif"/>
+              </a:rPr>
+              <a:t>, PIPS </a:t>
+            </a:r>
+            <a:r>
+              <a:rPr lang="pt-BR" sz="1900" b="0" i="0" dirty="0" err="1">
+                <a:solidFill>
+                  <a:srgbClr val="000000"/>
+                </a:solidFill>
+                <a:effectLst/>
+                <a:latin typeface="Times, serif"/>
+              </a:rPr>
+              <a:t>Polish</a:t>
+            </a:r>
+            <a:r>
+              <a:rPr lang="pt-BR" sz="1900" b="0" i="0" dirty="0">
+                <a:solidFill>
+                  <a:srgbClr val="000000"/>
+                </a:solidFill>
+                <a:effectLst/>
+                <a:latin typeface="Times, serif"/>
+              </a:rPr>
+              <a:t> </a:t>
+            </a:r>
+            <a:r>
+              <a:rPr lang="pt-BR" sz="1900" b="0" i="0" dirty="0" err="1">
+                <a:solidFill>
+                  <a:srgbClr val="000000"/>
+                </a:solidFill>
+                <a:effectLst/>
+                <a:latin typeface="Times, serif"/>
+              </a:rPr>
+              <a:t>Information</a:t>
+            </a:r>
+            <a:r>
+              <a:rPr lang="pt-BR" sz="1900" b="0" i="0" dirty="0">
+                <a:solidFill>
+                  <a:srgbClr val="000000"/>
+                </a:solidFill>
+                <a:effectLst/>
+                <a:latin typeface="Times, serif"/>
+              </a:rPr>
+              <a:t> </a:t>
+            </a:r>
+            <a:r>
+              <a:rPr lang="pt-BR" sz="1900" b="0" i="0" dirty="0" err="1">
+                <a:solidFill>
+                  <a:srgbClr val="000000"/>
+                </a:solidFill>
+                <a:effectLst/>
+                <a:latin typeface="Times, serif"/>
+              </a:rPr>
+              <a:t>Processing</a:t>
+            </a:r>
+            <a:r>
+              <a:rPr lang="pt-BR" sz="1900" b="0" i="0" dirty="0">
+                <a:solidFill>
+                  <a:srgbClr val="000000"/>
+                </a:solidFill>
+                <a:effectLst/>
+                <a:latin typeface="Times, serif"/>
+              </a:rPr>
+              <a:t> </a:t>
+            </a:r>
+            <a:r>
+              <a:rPr lang="pt-BR" sz="1900" b="0" i="0" dirty="0" err="1">
+                <a:solidFill>
+                  <a:srgbClr val="000000"/>
+                </a:solidFill>
+                <a:effectLst/>
+                <a:latin typeface="Times, serif"/>
+              </a:rPr>
+              <a:t>Society</a:t>
+            </a:r>
+            <a:r>
+              <a:rPr lang="pt-BR" sz="1900" b="0" i="0" dirty="0">
+                <a:solidFill>
+                  <a:srgbClr val="000000"/>
+                </a:solidFill>
+                <a:effectLst/>
+                <a:latin typeface="Times, serif"/>
+              </a:rPr>
+              <a:t>, Publicação eletrônica disponível em </a:t>
+            </a:r>
+            <a:r>
+              <a:rPr lang="pt-BR" sz="1900" u="sng" dirty="0">
+                <a:solidFill>
+                  <a:srgbClr val="000000"/>
+                </a:solidFill>
+                <a:effectLst/>
+                <a:hlinkClick r:id="rId5"/>
+              </a:rPr>
+              <a:t>https://www.researchgate.net/publication/235675420_SOA_System_Integration_with_Web_Services</a:t>
+            </a:r>
+            <a:r>
+              <a:rPr lang="pt-BR" sz="1900" b="0" i="0" dirty="0">
+                <a:solidFill>
+                  <a:srgbClr val="000000"/>
+                </a:solidFill>
+                <a:effectLst/>
+                <a:latin typeface="Times, serif"/>
+              </a:rPr>
+              <a:t> , 2011.</a:t>
+            </a:r>
+            <a:endParaRPr lang="pt-BR" sz="1900" dirty="0">
+              <a:solidFill>
+                <a:srgbClr val="000000"/>
+              </a:solidFill>
+              <a:effectLst/>
+            </a:endParaRPr>
+          </a:p>
+          <a:p>
+            <a:pPr rtl="0"/>
+            <a:r>
+              <a:rPr lang="pt-BR" sz="1900" b="0" i="0" dirty="0">
+                <a:solidFill>
+                  <a:srgbClr val="000000"/>
+                </a:solidFill>
+                <a:effectLst/>
+                <a:latin typeface="Times, serif"/>
+              </a:rPr>
+              <a:t>PAPAZOGLOU, Michael P.; </a:t>
+            </a:r>
+            <a:r>
+              <a:rPr lang="pt-BR" sz="1900" b="0" i="0" dirty="0" err="1">
+                <a:solidFill>
+                  <a:srgbClr val="000000"/>
+                </a:solidFill>
+                <a:effectLst/>
+                <a:latin typeface="Times, serif"/>
+              </a:rPr>
+              <a:t>Georgakopoulos</a:t>
+            </a:r>
+            <a:r>
+              <a:rPr lang="pt-BR" sz="1900" b="0" i="0" dirty="0">
+                <a:solidFill>
+                  <a:srgbClr val="000000"/>
+                </a:solidFill>
+                <a:effectLst/>
+                <a:latin typeface="Times, serif"/>
+              </a:rPr>
+              <a:t>, </a:t>
+            </a:r>
+            <a:r>
+              <a:rPr lang="pt-BR" sz="1900" b="0" i="0" dirty="0" err="1">
+                <a:solidFill>
+                  <a:srgbClr val="000000"/>
+                </a:solidFill>
+                <a:effectLst/>
+                <a:latin typeface="Times, serif"/>
+              </a:rPr>
+              <a:t>Dimitrios</a:t>
+            </a:r>
+            <a:r>
+              <a:rPr lang="pt-BR" sz="1900" b="0" i="0" dirty="0">
+                <a:solidFill>
+                  <a:srgbClr val="000000"/>
+                </a:solidFill>
+                <a:effectLst/>
+                <a:latin typeface="Times, serif"/>
+              </a:rPr>
+              <a:t>. Service-</a:t>
+            </a:r>
+            <a:r>
+              <a:rPr lang="pt-BR" sz="1900" b="0" i="0" dirty="0" err="1">
+                <a:solidFill>
+                  <a:srgbClr val="000000"/>
+                </a:solidFill>
+                <a:effectLst/>
+                <a:latin typeface="Times, serif"/>
+              </a:rPr>
+              <a:t>oriented</a:t>
+            </a:r>
+            <a:r>
+              <a:rPr lang="pt-BR" sz="1900" b="0" i="0" dirty="0">
+                <a:solidFill>
+                  <a:srgbClr val="000000"/>
+                </a:solidFill>
+                <a:effectLst/>
+                <a:latin typeface="Times, serif"/>
+              </a:rPr>
+              <a:t> </a:t>
+            </a:r>
+            <a:r>
+              <a:rPr lang="pt-BR" sz="1900" b="0" i="0" dirty="0" err="1">
+                <a:solidFill>
+                  <a:srgbClr val="000000"/>
+                </a:solidFill>
+                <a:effectLst/>
+                <a:latin typeface="Times, serif"/>
+              </a:rPr>
+              <a:t>computing</a:t>
+            </a:r>
+            <a:r>
+              <a:rPr lang="pt-BR" sz="1900" b="0" i="0" dirty="0">
+                <a:solidFill>
+                  <a:srgbClr val="000000"/>
+                </a:solidFill>
+                <a:effectLst/>
+                <a:latin typeface="Times, serif"/>
+              </a:rPr>
+              <a:t>. Communications </a:t>
+            </a:r>
+            <a:r>
+              <a:rPr lang="pt-BR" sz="1900" b="0" i="0" dirty="0" err="1">
+                <a:solidFill>
+                  <a:srgbClr val="000000"/>
+                </a:solidFill>
+                <a:effectLst/>
+                <a:latin typeface="Times, serif"/>
+              </a:rPr>
+              <a:t>of</a:t>
+            </a:r>
+            <a:r>
+              <a:rPr lang="pt-BR" sz="1900" b="0" i="0" dirty="0">
+                <a:solidFill>
+                  <a:srgbClr val="000000"/>
+                </a:solidFill>
+                <a:effectLst/>
+                <a:latin typeface="Times, serif"/>
+              </a:rPr>
+              <a:t> </a:t>
+            </a:r>
+            <a:r>
+              <a:rPr lang="pt-BR" sz="1900" b="0" i="0" dirty="0" err="1">
+                <a:solidFill>
+                  <a:srgbClr val="000000"/>
+                </a:solidFill>
+                <a:effectLst/>
+                <a:latin typeface="Times, serif"/>
+              </a:rPr>
+              <a:t>the</a:t>
+            </a:r>
+            <a:r>
+              <a:rPr lang="pt-BR" sz="1900" b="0" i="0" dirty="0">
+                <a:solidFill>
+                  <a:srgbClr val="000000"/>
+                </a:solidFill>
+                <a:effectLst/>
+                <a:latin typeface="Times, serif"/>
+              </a:rPr>
+              <a:t> ACM, v. 46, n. 10, p. 25-28, Publicação eletrônica disponível em </a:t>
+            </a:r>
+            <a:r>
+              <a:rPr lang="pt-BR" sz="1900" u="sng" dirty="0">
+                <a:solidFill>
+                  <a:srgbClr val="000000"/>
+                </a:solidFill>
+                <a:effectLst/>
+                <a:hlinkClick r:id="rId6"/>
+              </a:rPr>
+              <a:t>https://www.researchgate.net/publication/234829343_Introduction_Service-oriented_computing</a:t>
+            </a:r>
+            <a:r>
+              <a:rPr lang="pt-BR" sz="1900" b="0" i="0" dirty="0">
+                <a:solidFill>
+                  <a:srgbClr val="000000"/>
+                </a:solidFill>
+                <a:effectLst/>
+                <a:latin typeface="Times, serif"/>
+              </a:rPr>
+              <a:t>, 2003. </a:t>
+            </a:r>
+            <a:endParaRPr lang="pt-BR" sz="1900" dirty="0">
+              <a:solidFill>
+                <a:srgbClr val="000000"/>
+              </a:solidFill>
+              <a:effectLst/>
+            </a:endParaRPr>
+          </a:p>
+          <a:p>
+            <a:pPr rtl="0"/>
+            <a:r>
+              <a:rPr lang="pt-BR" sz="1900" b="0" i="0" dirty="0">
+                <a:solidFill>
+                  <a:srgbClr val="000000"/>
+                </a:solidFill>
+                <a:effectLst/>
+                <a:latin typeface="Times, serif"/>
+              </a:rPr>
+              <a:t>HE, </a:t>
+            </a:r>
+            <a:r>
+              <a:rPr lang="pt-BR" sz="1900" b="0" i="0" dirty="0" err="1">
+                <a:solidFill>
+                  <a:srgbClr val="000000"/>
+                </a:solidFill>
+                <a:effectLst/>
+                <a:latin typeface="Times, serif"/>
+              </a:rPr>
+              <a:t>Hao</a:t>
+            </a:r>
+            <a:r>
+              <a:rPr lang="pt-BR" sz="1900" b="0" i="0" dirty="0">
+                <a:solidFill>
+                  <a:srgbClr val="000000"/>
+                </a:solidFill>
+                <a:effectLst/>
+                <a:latin typeface="Times, serif"/>
+              </a:rPr>
+              <a:t>. </a:t>
+            </a:r>
+            <a:r>
+              <a:rPr lang="pt-BR" sz="1900" b="0" i="0" dirty="0" err="1">
+                <a:solidFill>
+                  <a:srgbClr val="000000"/>
+                </a:solidFill>
+                <a:effectLst/>
+                <a:latin typeface="Times, serif"/>
+              </a:rPr>
+              <a:t>What</a:t>
+            </a:r>
+            <a:r>
+              <a:rPr lang="pt-BR" sz="1900" b="0" i="0" dirty="0">
+                <a:solidFill>
+                  <a:srgbClr val="000000"/>
+                </a:solidFill>
+                <a:effectLst/>
+                <a:latin typeface="Times, serif"/>
+              </a:rPr>
+              <a:t> </a:t>
+            </a:r>
+            <a:r>
+              <a:rPr lang="pt-BR" sz="1900" b="0" i="0" dirty="0" err="1">
+                <a:solidFill>
+                  <a:srgbClr val="000000"/>
+                </a:solidFill>
+                <a:effectLst/>
+                <a:latin typeface="Times, serif"/>
+              </a:rPr>
+              <a:t>is</a:t>
+            </a:r>
+            <a:r>
+              <a:rPr lang="pt-BR" sz="1900" b="0" i="0" dirty="0">
+                <a:solidFill>
+                  <a:srgbClr val="000000"/>
+                </a:solidFill>
+                <a:effectLst/>
+                <a:latin typeface="Times, serif"/>
+              </a:rPr>
+              <a:t> </a:t>
+            </a:r>
+            <a:r>
+              <a:rPr lang="pt-BR" sz="1900" b="0" i="0" dirty="0" err="1">
+                <a:solidFill>
+                  <a:srgbClr val="000000"/>
+                </a:solidFill>
+                <a:effectLst/>
+                <a:latin typeface="Times, serif"/>
+              </a:rPr>
+              <a:t>service-oriented</a:t>
+            </a:r>
+            <a:r>
+              <a:rPr lang="pt-BR" sz="1900" b="0" i="0" dirty="0">
+                <a:solidFill>
+                  <a:srgbClr val="000000"/>
+                </a:solidFill>
+                <a:effectLst/>
+                <a:latin typeface="Times, serif"/>
+              </a:rPr>
+              <a:t> </a:t>
+            </a:r>
+            <a:r>
+              <a:rPr lang="pt-BR" sz="1900" b="0" i="0" dirty="0" err="1">
+                <a:solidFill>
+                  <a:srgbClr val="000000"/>
+                </a:solidFill>
+                <a:effectLst/>
+                <a:latin typeface="Times, serif"/>
+              </a:rPr>
+              <a:t>architecture</a:t>
+            </a:r>
+            <a:r>
+              <a:rPr lang="pt-BR" sz="1900" b="0" i="0" dirty="0">
+                <a:solidFill>
+                  <a:srgbClr val="000000"/>
+                </a:solidFill>
+                <a:effectLst/>
+                <a:latin typeface="Times, serif"/>
+              </a:rPr>
+              <a:t>. Publicação eletrônica em </a:t>
+            </a:r>
+            <a:r>
+              <a:rPr lang="pt-BR" sz="1900" u="sng" dirty="0">
+                <a:solidFill>
+                  <a:srgbClr val="000000"/>
+                </a:solidFill>
+                <a:effectLst/>
+                <a:hlinkClick r:id="rId7"/>
+              </a:rPr>
+              <a:t>http://www.cdrlm.com/whitepapers/other/xml_what_is_service_oriented_architecture_sep2003.pdf</a:t>
+            </a:r>
+            <a:r>
+              <a:rPr lang="pt-BR" sz="1900" b="0" i="0" dirty="0">
+                <a:solidFill>
+                  <a:srgbClr val="000000"/>
+                </a:solidFill>
+                <a:effectLst/>
+                <a:latin typeface="Times, serif"/>
+              </a:rPr>
+              <a:t> , v. 30, p. 1-5, 2003.</a:t>
+            </a:r>
+            <a:endParaRPr lang="pt-BR" sz="1900" dirty="0">
+              <a:solidFill>
+                <a:srgbClr val="000000"/>
+              </a:solidFill>
+              <a:effectLst/>
+            </a:endParaRPr>
+          </a:p>
+          <a:p>
+            <a:pPr rtl="0"/>
+            <a:r>
+              <a:rPr lang="pt-BR" sz="1900" b="0" i="0" dirty="0">
+                <a:solidFill>
+                  <a:srgbClr val="000000"/>
+                </a:solidFill>
+                <a:effectLst/>
+                <a:latin typeface="Times, serif"/>
+              </a:rPr>
+              <a:t>ORACLE INTEGRATION CLOUD - Publicação eletrônica em </a:t>
+            </a:r>
+            <a:r>
+              <a:rPr lang="pt-BR" sz="1900" b="0" i="0" u="sng" dirty="0">
+                <a:solidFill>
+                  <a:srgbClr val="000000"/>
+                </a:solidFill>
+                <a:effectLst/>
+                <a:latin typeface="Times, serif"/>
+                <a:hlinkClick r:id="rId8"/>
+              </a:rPr>
+              <a:t>https://cloud.oracle.com/pt_BR/OIC</a:t>
+            </a:r>
+            <a:r>
+              <a:rPr lang="pt-BR" sz="1900" b="0" i="0" dirty="0">
+                <a:solidFill>
+                  <a:srgbClr val="000000"/>
+                </a:solidFill>
+                <a:effectLst/>
+                <a:latin typeface="Times, serif"/>
+              </a:rPr>
+              <a:t> acessado em 07/10/2019. </a:t>
+            </a:r>
+            <a:endParaRPr lang="pt-BR" sz="1900" dirty="0">
+              <a:solidFill>
+                <a:srgbClr val="000000"/>
+              </a:solidFill>
+              <a:effectLst/>
+            </a:endParaRPr>
+          </a:p>
+          <a:p>
+            <a:pPr rtl="0"/>
+            <a:r>
+              <a:rPr lang="pt-BR" sz="1900" b="0" i="0" dirty="0">
+                <a:solidFill>
+                  <a:srgbClr val="000000"/>
+                </a:solidFill>
+                <a:effectLst/>
+                <a:latin typeface="Times, serif"/>
+              </a:rPr>
+              <a:t>SUNDVALL, Erik &amp; </a:t>
+            </a:r>
+            <a:r>
+              <a:rPr lang="pt-BR" sz="1900" b="0" i="0" dirty="0" err="1">
+                <a:solidFill>
+                  <a:srgbClr val="000000"/>
+                </a:solidFill>
+                <a:effectLst/>
+                <a:latin typeface="Times, serif"/>
+              </a:rPr>
+              <a:t>Nyström</a:t>
+            </a:r>
+            <a:r>
+              <a:rPr lang="pt-BR" sz="1900" b="0" i="0" dirty="0">
+                <a:solidFill>
+                  <a:srgbClr val="000000"/>
+                </a:solidFill>
+                <a:effectLst/>
+                <a:latin typeface="Times, serif"/>
+              </a:rPr>
+              <a:t>, </a:t>
+            </a:r>
+            <a:r>
+              <a:rPr lang="pt-BR" sz="1900" b="0" i="0" dirty="0" err="1">
+                <a:solidFill>
+                  <a:srgbClr val="000000"/>
+                </a:solidFill>
+                <a:effectLst/>
+                <a:latin typeface="Times, serif"/>
+              </a:rPr>
+              <a:t>Mikael</a:t>
+            </a:r>
+            <a:r>
+              <a:rPr lang="pt-BR" sz="1900" b="0" i="0" dirty="0">
+                <a:solidFill>
+                  <a:srgbClr val="000000"/>
+                </a:solidFill>
+                <a:effectLst/>
+                <a:latin typeface="Times, serif"/>
+              </a:rPr>
+              <a:t> &amp; </a:t>
+            </a:r>
+            <a:r>
+              <a:rPr lang="pt-BR" sz="1900" b="0" i="0" dirty="0" err="1">
+                <a:solidFill>
+                  <a:srgbClr val="000000"/>
+                </a:solidFill>
+                <a:effectLst/>
+                <a:latin typeface="Times, serif"/>
+              </a:rPr>
+              <a:t>Karlsson</a:t>
+            </a:r>
+            <a:r>
+              <a:rPr lang="pt-BR" sz="1900" b="0" i="0" dirty="0">
+                <a:solidFill>
+                  <a:srgbClr val="000000"/>
+                </a:solidFill>
+                <a:effectLst/>
+                <a:latin typeface="Times, serif"/>
+              </a:rPr>
+              <a:t>, Daniel &amp; </a:t>
+            </a:r>
+            <a:r>
+              <a:rPr lang="pt-BR" sz="1900" b="0" i="0" dirty="0" err="1">
+                <a:solidFill>
+                  <a:srgbClr val="000000"/>
+                </a:solidFill>
+                <a:effectLst/>
+                <a:latin typeface="Times, serif"/>
+              </a:rPr>
+              <a:t>Eneling</a:t>
+            </a:r>
+            <a:r>
+              <a:rPr lang="pt-BR" sz="1900" b="0" i="0" dirty="0">
+                <a:solidFill>
+                  <a:srgbClr val="000000"/>
+                </a:solidFill>
+                <a:effectLst/>
+                <a:latin typeface="Times, serif"/>
+              </a:rPr>
+              <a:t>, Martin &amp; Chen, </a:t>
+            </a:r>
+            <a:r>
+              <a:rPr lang="pt-BR" sz="1900" b="0" i="0" dirty="0" err="1">
+                <a:solidFill>
+                  <a:srgbClr val="000000"/>
+                </a:solidFill>
+                <a:effectLst/>
+                <a:latin typeface="Times, serif"/>
+              </a:rPr>
+              <a:t>Rong</a:t>
+            </a:r>
+            <a:r>
+              <a:rPr lang="pt-BR" sz="1900" b="0" i="0" dirty="0">
+                <a:solidFill>
+                  <a:srgbClr val="000000"/>
+                </a:solidFill>
+                <a:effectLst/>
+                <a:latin typeface="Times, serif"/>
+              </a:rPr>
+              <a:t> &amp; </a:t>
+            </a:r>
+            <a:r>
+              <a:rPr lang="pt-BR" sz="1900" b="0" i="0" dirty="0" err="1">
+                <a:solidFill>
+                  <a:srgbClr val="000000"/>
+                </a:solidFill>
+                <a:effectLst/>
+                <a:latin typeface="Times, serif"/>
+              </a:rPr>
+              <a:t>Orman</a:t>
+            </a:r>
+            <a:r>
+              <a:rPr lang="pt-BR" sz="1900" b="0" i="0" dirty="0">
+                <a:solidFill>
+                  <a:srgbClr val="000000"/>
+                </a:solidFill>
+                <a:effectLst/>
+                <a:latin typeface="Times, serif"/>
+              </a:rPr>
+              <a:t>, </a:t>
+            </a:r>
+            <a:r>
+              <a:rPr lang="pt-BR" sz="1900" b="0" i="0" dirty="0" err="1">
+                <a:solidFill>
+                  <a:srgbClr val="000000"/>
+                </a:solidFill>
+                <a:effectLst/>
+                <a:latin typeface="Times, serif"/>
+              </a:rPr>
+              <a:t>Håkan</a:t>
+            </a:r>
+            <a:r>
+              <a:rPr lang="pt-BR" sz="1900" b="0" i="0" dirty="0">
+                <a:solidFill>
+                  <a:srgbClr val="000000"/>
+                </a:solidFill>
+                <a:effectLst/>
+                <a:latin typeface="Times, serif"/>
+              </a:rPr>
+              <a:t>. </a:t>
+            </a:r>
+            <a:r>
+              <a:rPr lang="pt-BR" sz="1900" b="0" i="0" dirty="0" err="1">
+                <a:solidFill>
+                  <a:srgbClr val="000000"/>
+                </a:solidFill>
+                <a:effectLst/>
+                <a:latin typeface="Times, serif"/>
+              </a:rPr>
+              <a:t>Applying</a:t>
+            </a:r>
+            <a:r>
+              <a:rPr lang="pt-BR" sz="1900" b="0" i="0" dirty="0">
+                <a:solidFill>
+                  <a:srgbClr val="000000"/>
+                </a:solidFill>
+                <a:effectLst/>
+                <a:latin typeface="Times, serif"/>
+              </a:rPr>
+              <a:t> </a:t>
+            </a:r>
+            <a:r>
+              <a:rPr lang="pt-BR" sz="1900" b="0" i="0" dirty="0" err="1">
+                <a:solidFill>
+                  <a:srgbClr val="000000"/>
+                </a:solidFill>
+                <a:effectLst/>
+                <a:latin typeface="Times, serif"/>
+              </a:rPr>
+              <a:t>representational</a:t>
+            </a:r>
+            <a:r>
+              <a:rPr lang="pt-BR" sz="1900" b="0" i="0" dirty="0">
+                <a:solidFill>
+                  <a:srgbClr val="000000"/>
+                </a:solidFill>
+                <a:effectLst/>
+                <a:latin typeface="Times, serif"/>
+              </a:rPr>
+              <a:t> </a:t>
+            </a:r>
+            <a:r>
+              <a:rPr lang="pt-BR" sz="1900" b="0" i="0" dirty="0" err="1">
+                <a:solidFill>
+                  <a:srgbClr val="000000"/>
+                </a:solidFill>
+                <a:effectLst/>
+                <a:latin typeface="Times, serif"/>
+              </a:rPr>
+              <a:t>state</a:t>
+            </a:r>
+            <a:r>
+              <a:rPr lang="pt-BR" sz="1900" b="0" i="0" dirty="0">
+                <a:solidFill>
+                  <a:srgbClr val="000000"/>
+                </a:solidFill>
+                <a:effectLst/>
+                <a:latin typeface="Times, serif"/>
+              </a:rPr>
+              <a:t> </a:t>
+            </a:r>
+            <a:r>
+              <a:rPr lang="pt-BR" sz="1900" b="0" i="0" dirty="0" err="1">
+                <a:solidFill>
+                  <a:srgbClr val="000000"/>
+                </a:solidFill>
+                <a:effectLst/>
+                <a:latin typeface="Times, serif"/>
+              </a:rPr>
+              <a:t>transfer</a:t>
+            </a:r>
+            <a:r>
+              <a:rPr lang="pt-BR" sz="1900" b="0" i="0" dirty="0">
+                <a:solidFill>
+                  <a:srgbClr val="000000"/>
+                </a:solidFill>
+                <a:effectLst/>
+                <a:latin typeface="Times, serif"/>
+              </a:rPr>
+              <a:t> (REST) </a:t>
+            </a:r>
+            <a:r>
+              <a:rPr lang="pt-BR" sz="1900" b="0" i="0" dirty="0" err="1">
+                <a:solidFill>
+                  <a:srgbClr val="000000"/>
+                </a:solidFill>
+                <a:effectLst/>
+                <a:latin typeface="Times, serif"/>
+              </a:rPr>
+              <a:t>architecture</a:t>
+            </a:r>
+            <a:r>
+              <a:rPr lang="pt-BR" sz="1900" b="0" i="0" dirty="0">
+                <a:solidFill>
+                  <a:srgbClr val="000000"/>
+                </a:solidFill>
+                <a:effectLst/>
+                <a:latin typeface="Times, serif"/>
+              </a:rPr>
+              <a:t> </a:t>
+            </a:r>
+            <a:r>
+              <a:rPr lang="pt-BR" sz="1900" b="0" i="0" dirty="0" err="1">
+                <a:solidFill>
+                  <a:srgbClr val="000000"/>
+                </a:solidFill>
+                <a:effectLst/>
+                <a:latin typeface="Times, serif"/>
+              </a:rPr>
+              <a:t>to</a:t>
+            </a:r>
+            <a:r>
+              <a:rPr lang="pt-BR" sz="1900" b="0" i="0" dirty="0">
+                <a:solidFill>
+                  <a:srgbClr val="000000"/>
+                </a:solidFill>
+                <a:effectLst/>
+                <a:latin typeface="Times, serif"/>
+              </a:rPr>
+              <a:t> </a:t>
+            </a:r>
+            <a:r>
+              <a:rPr lang="pt-BR" sz="1900" b="0" i="0" dirty="0" err="1">
+                <a:solidFill>
+                  <a:srgbClr val="000000"/>
+                </a:solidFill>
+                <a:effectLst/>
+                <a:latin typeface="Times, serif"/>
+              </a:rPr>
+              <a:t>archetype-based</a:t>
+            </a:r>
+            <a:r>
+              <a:rPr lang="pt-BR" sz="1900" b="0" i="0" dirty="0">
+                <a:solidFill>
+                  <a:srgbClr val="000000"/>
+                </a:solidFill>
+                <a:effectLst/>
+                <a:latin typeface="Times, serif"/>
+              </a:rPr>
+              <a:t> </a:t>
+            </a:r>
+            <a:r>
+              <a:rPr lang="pt-BR" sz="1900" b="0" i="0" dirty="0" err="1">
+                <a:solidFill>
+                  <a:srgbClr val="000000"/>
+                </a:solidFill>
+                <a:effectLst/>
+                <a:latin typeface="Times, serif"/>
+              </a:rPr>
+              <a:t>electronic</a:t>
+            </a:r>
+            <a:r>
+              <a:rPr lang="pt-BR" sz="1900" b="0" i="0" dirty="0">
+                <a:solidFill>
+                  <a:srgbClr val="000000"/>
+                </a:solidFill>
+                <a:effectLst/>
+                <a:latin typeface="Times, serif"/>
+              </a:rPr>
+              <a:t> </a:t>
+            </a:r>
+            <a:r>
+              <a:rPr lang="pt-BR" sz="1900" b="0" i="0" dirty="0" err="1">
+                <a:solidFill>
+                  <a:srgbClr val="000000"/>
+                </a:solidFill>
+                <a:effectLst/>
+                <a:latin typeface="Times, serif"/>
+              </a:rPr>
+              <a:t>health</a:t>
+            </a:r>
+            <a:r>
+              <a:rPr lang="pt-BR" sz="1900" b="0" i="0" dirty="0">
+                <a:solidFill>
+                  <a:srgbClr val="000000"/>
+                </a:solidFill>
+                <a:effectLst/>
+                <a:latin typeface="Times, serif"/>
+              </a:rPr>
+              <a:t> </a:t>
+            </a:r>
+            <a:r>
+              <a:rPr lang="pt-BR" sz="1900" b="0" i="0" dirty="0" err="1">
+                <a:solidFill>
+                  <a:srgbClr val="000000"/>
+                </a:solidFill>
+                <a:effectLst/>
+                <a:latin typeface="Times, serif"/>
+              </a:rPr>
+              <a:t>record</a:t>
+            </a:r>
+            <a:r>
+              <a:rPr lang="pt-BR" sz="1900" b="0" i="0" dirty="0">
+                <a:solidFill>
+                  <a:srgbClr val="000000"/>
+                </a:solidFill>
+                <a:effectLst/>
+                <a:latin typeface="Times, serif"/>
+              </a:rPr>
+              <a:t> systems. BMC medical </a:t>
+            </a:r>
+            <a:r>
+              <a:rPr lang="pt-BR" sz="1900" b="0" i="0" dirty="0" err="1">
+                <a:solidFill>
+                  <a:srgbClr val="000000"/>
+                </a:solidFill>
+                <a:effectLst/>
+                <a:latin typeface="Times, serif"/>
+              </a:rPr>
+              <a:t>informatics</a:t>
+            </a:r>
+            <a:r>
+              <a:rPr lang="pt-BR" sz="1900" b="0" i="0" dirty="0">
+                <a:solidFill>
+                  <a:srgbClr val="000000"/>
+                </a:solidFill>
+                <a:effectLst/>
+                <a:latin typeface="Times, serif"/>
+              </a:rPr>
+              <a:t> </a:t>
+            </a:r>
+            <a:r>
+              <a:rPr lang="pt-BR" sz="1900" b="0" i="0" dirty="0" err="1">
+                <a:solidFill>
+                  <a:srgbClr val="000000"/>
+                </a:solidFill>
+                <a:effectLst/>
+                <a:latin typeface="Times, serif"/>
+              </a:rPr>
+              <a:t>and</a:t>
+            </a:r>
+            <a:r>
+              <a:rPr lang="pt-BR" sz="1900" b="0" i="0" dirty="0">
+                <a:solidFill>
+                  <a:srgbClr val="000000"/>
+                </a:solidFill>
+                <a:effectLst/>
+                <a:latin typeface="Times, serif"/>
+              </a:rPr>
+              <a:t> </a:t>
+            </a:r>
+            <a:r>
+              <a:rPr lang="pt-BR" sz="1900" b="0" i="0" dirty="0" err="1">
+                <a:solidFill>
+                  <a:srgbClr val="000000"/>
+                </a:solidFill>
+                <a:effectLst/>
+                <a:latin typeface="Times, serif"/>
+              </a:rPr>
+              <a:t>decision</a:t>
+            </a:r>
+            <a:r>
+              <a:rPr lang="pt-BR" sz="1900" b="0" i="0" dirty="0">
+                <a:solidFill>
+                  <a:srgbClr val="000000"/>
+                </a:solidFill>
+                <a:effectLst/>
+                <a:latin typeface="Times, serif"/>
+              </a:rPr>
+              <a:t> </a:t>
+            </a:r>
+            <a:r>
+              <a:rPr lang="pt-BR" sz="1900" b="0" i="0" dirty="0" err="1">
+                <a:solidFill>
+                  <a:srgbClr val="000000"/>
+                </a:solidFill>
+                <a:effectLst/>
+                <a:latin typeface="Times, serif"/>
+              </a:rPr>
+              <a:t>making</a:t>
+            </a:r>
+            <a:r>
+              <a:rPr lang="pt-BR" sz="1900" b="0" i="0" dirty="0">
+                <a:solidFill>
+                  <a:srgbClr val="000000"/>
+                </a:solidFill>
+                <a:effectLst/>
+                <a:latin typeface="Times, serif"/>
+              </a:rPr>
+              <a:t>. 13. 57. 10.1186/1472-6947-13-57, Publicação eletrônica disponível em</a:t>
+            </a:r>
+            <a:r>
+              <a:rPr lang="pt-BR" sz="1900" u="sng" dirty="0">
+                <a:solidFill>
+                  <a:srgbClr val="000000"/>
+                </a:solidFill>
+                <a:effectLst/>
+                <a:hlinkClick r:id="rId9"/>
+              </a:rPr>
+              <a:t>https://www.researchgate.net/publication/236664838_Applying_representational_state_transfer_REST_architecture_to_archetype-based_electronic_health_record_systems</a:t>
+            </a:r>
+            <a:r>
+              <a:rPr lang="pt-BR" sz="1900" b="0" i="0" dirty="0">
+                <a:solidFill>
+                  <a:srgbClr val="000000"/>
+                </a:solidFill>
+                <a:effectLst/>
+                <a:latin typeface="Times, serif"/>
+              </a:rPr>
+              <a:t>, 2013. </a:t>
+            </a:r>
+            <a:endParaRPr lang="pt-BR" sz="1900" dirty="0">
+              <a:solidFill>
+                <a:srgbClr val="000000"/>
+              </a:solidFill>
+              <a:effectLst/>
+            </a:endParaRPr>
+          </a:p>
+          <a:p>
+            <a:pPr rtl="0"/>
+            <a:r>
+              <a:rPr lang="pt-BR" sz="1900" b="0" i="0" dirty="0">
+                <a:solidFill>
+                  <a:srgbClr val="000000"/>
+                </a:solidFill>
+                <a:effectLst/>
+                <a:latin typeface="Times, serif"/>
+              </a:rPr>
+              <a:t>RICHARDSON, Leonard; RUBY, Sam. </a:t>
+            </a:r>
+            <a:r>
+              <a:rPr lang="pt-BR" sz="1900" b="0" i="0" dirty="0" err="1">
+                <a:solidFill>
+                  <a:srgbClr val="000000"/>
+                </a:solidFill>
+                <a:effectLst/>
+                <a:latin typeface="Times, serif"/>
+              </a:rPr>
+              <a:t>RESTful</a:t>
+            </a:r>
+            <a:r>
+              <a:rPr lang="pt-BR" sz="1900" b="0" i="0" dirty="0">
+                <a:solidFill>
+                  <a:srgbClr val="000000"/>
+                </a:solidFill>
+                <a:effectLst/>
+                <a:latin typeface="Times, serif"/>
+              </a:rPr>
+              <a:t> web </a:t>
+            </a:r>
+            <a:r>
+              <a:rPr lang="pt-BR" sz="1900" b="0" i="0" dirty="0" err="1">
+                <a:solidFill>
+                  <a:srgbClr val="000000"/>
+                </a:solidFill>
+                <a:effectLst/>
+                <a:latin typeface="Times, serif"/>
+              </a:rPr>
+              <a:t>services</a:t>
+            </a:r>
+            <a:r>
+              <a:rPr lang="pt-BR" sz="1900" b="0" i="0" dirty="0">
+                <a:solidFill>
+                  <a:srgbClr val="000000"/>
+                </a:solidFill>
+                <a:effectLst/>
+                <a:latin typeface="Times, serif"/>
+              </a:rPr>
+              <a:t>. “</a:t>
+            </a:r>
+            <a:r>
+              <a:rPr lang="pt-BR" sz="1900" b="0" i="0" dirty="0" err="1">
+                <a:solidFill>
+                  <a:srgbClr val="000000"/>
+                </a:solidFill>
+                <a:effectLst/>
+                <a:latin typeface="Times, serif"/>
+              </a:rPr>
+              <a:t>O'Reilly</a:t>
+            </a:r>
+            <a:r>
+              <a:rPr lang="pt-BR" sz="1900" b="0" i="0" dirty="0">
+                <a:solidFill>
+                  <a:srgbClr val="000000"/>
+                </a:solidFill>
+                <a:effectLst/>
+                <a:latin typeface="Times, serif"/>
+              </a:rPr>
+              <a:t> Media, Inc.", 2008. </a:t>
+            </a:r>
+            <a:endParaRPr lang="pt-BR" sz="1900" b="0" i="0" dirty="0">
+              <a:solidFill>
+                <a:srgbClr val="000000"/>
+              </a:solidFill>
+              <a:effectLst/>
+            </a:endParaRPr>
+          </a:p>
+          <a:p>
+            <a:pPr rtl="0"/>
+            <a:r>
+              <a:rPr lang="pt-BR" sz="1900" b="0" i="0" dirty="0">
+                <a:solidFill>
+                  <a:srgbClr val="000000"/>
+                </a:solidFill>
+                <a:effectLst/>
+                <a:latin typeface="Times, serif"/>
+              </a:rPr>
+              <a:t>YERGEAU, François et al. </a:t>
+            </a:r>
+            <a:r>
+              <a:rPr lang="pt-BR" sz="1900" b="0" i="0" dirty="0" err="1">
+                <a:solidFill>
+                  <a:srgbClr val="000000"/>
+                </a:solidFill>
+                <a:effectLst/>
+                <a:latin typeface="Times, serif"/>
+              </a:rPr>
+              <a:t>Extensible</a:t>
+            </a:r>
+            <a:r>
+              <a:rPr lang="pt-BR" sz="1900" b="0" i="0" dirty="0">
+                <a:solidFill>
+                  <a:srgbClr val="000000"/>
+                </a:solidFill>
+                <a:effectLst/>
+                <a:latin typeface="Times, serif"/>
+              </a:rPr>
+              <a:t> </a:t>
+            </a:r>
+            <a:r>
+              <a:rPr lang="pt-BR" sz="1900" b="0" i="0" dirty="0" err="1">
+                <a:solidFill>
+                  <a:srgbClr val="000000"/>
+                </a:solidFill>
+                <a:effectLst/>
+                <a:latin typeface="Times, serif"/>
+              </a:rPr>
+              <a:t>markup</a:t>
+            </a:r>
+            <a:r>
+              <a:rPr lang="pt-BR" sz="1900" b="0" i="0" dirty="0">
+                <a:solidFill>
+                  <a:srgbClr val="000000"/>
+                </a:solidFill>
+                <a:effectLst/>
+                <a:latin typeface="Times, serif"/>
+              </a:rPr>
+              <a:t> </a:t>
+            </a:r>
+            <a:r>
+              <a:rPr lang="pt-BR" sz="1900" b="0" i="0" dirty="0" err="1">
+                <a:solidFill>
+                  <a:srgbClr val="000000"/>
+                </a:solidFill>
+                <a:effectLst/>
+                <a:latin typeface="Times, serif"/>
+              </a:rPr>
+              <a:t>language</a:t>
+            </a:r>
+            <a:r>
+              <a:rPr lang="pt-BR" sz="1900" b="0" i="0" dirty="0">
+                <a:solidFill>
+                  <a:srgbClr val="000000"/>
+                </a:solidFill>
+                <a:effectLst/>
+                <a:latin typeface="Times, serif"/>
+              </a:rPr>
+              <a:t> (XML) 1.0. W3C </a:t>
+            </a:r>
+            <a:r>
+              <a:rPr lang="pt-BR" sz="1900" b="0" i="0" dirty="0" err="1">
+                <a:solidFill>
+                  <a:srgbClr val="000000"/>
+                </a:solidFill>
+                <a:effectLst/>
+                <a:latin typeface="Times, serif"/>
+              </a:rPr>
+              <a:t>Recommendation</a:t>
+            </a:r>
+            <a:r>
+              <a:rPr lang="pt-BR" sz="1900" b="0" i="0" dirty="0">
+                <a:solidFill>
+                  <a:srgbClr val="000000"/>
+                </a:solidFill>
+                <a:effectLst/>
+                <a:latin typeface="Times, serif"/>
+              </a:rPr>
+              <a:t>, v. 5, p. 220, 2008, Publicação eletrônica em </a:t>
+            </a:r>
+            <a:r>
+              <a:rPr lang="pt-BR" sz="1900" u="sng" dirty="0">
+                <a:solidFill>
+                  <a:srgbClr val="000000"/>
+                </a:solidFill>
+                <a:effectLst/>
+                <a:hlinkClick r:id="rId10"/>
+              </a:rPr>
+              <a:t>https://www.w3.org/TR/xml/</a:t>
+            </a:r>
+            <a:r>
+              <a:rPr lang="pt-BR" sz="1900" b="0" i="0" dirty="0">
+                <a:solidFill>
+                  <a:srgbClr val="000000"/>
+                </a:solidFill>
+                <a:effectLst/>
+                <a:latin typeface="Times, serif"/>
+              </a:rPr>
+              <a:t> </a:t>
+            </a:r>
+            <a:endParaRPr lang="pt-BR" sz="1900" dirty="0">
+              <a:solidFill>
+                <a:srgbClr val="000000"/>
+              </a:solidFill>
+              <a:effectLst/>
+            </a:endParaRPr>
+          </a:p>
+          <a:p>
+            <a:pPr rtl="0"/>
+            <a:r>
+              <a:rPr lang="pt-BR" sz="1900" b="0" i="0" dirty="0">
+                <a:solidFill>
+                  <a:srgbClr val="000000"/>
+                </a:solidFill>
+                <a:effectLst/>
+                <a:latin typeface="Times, serif"/>
+              </a:rPr>
+              <a:t>THOMPSON, Henry S. et al. W3C XML </a:t>
+            </a:r>
+            <a:r>
+              <a:rPr lang="pt-BR" sz="1900" b="0" i="0" dirty="0" err="1">
+                <a:solidFill>
+                  <a:srgbClr val="000000"/>
+                </a:solidFill>
+                <a:effectLst/>
+                <a:latin typeface="Times, serif"/>
+              </a:rPr>
+              <a:t>Schema</a:t>
+            </a:r>
+            <a:r>
+              <a:rPr lang="pt-BR" sz="1900" b="0" i="0" dirty="0">
+                <a:solidFill>
+                  <a:srgbClr val="000000"/>
+                </a:solidFill>
+                <a:effectLst/>
+                <a:latin typeface="Times, serif"/>
+              </a:rPr>
+              <a:t> </a:t>
+            </a:r>
+            <a:r>
+              <a:rPr lang="pt-BR" sz="1900" b="0" i="0" dirty="0" err="1">
+                <a:solidFill>
+                  <a:srgbClr val="000000"/>
+                </a:solidFill>
+                <a:effectLst/>
+                <a:latin typeface="Times, serif"/>
+              </a:rPr>
+              <a:t>Definition</a:t>
+            </a:r>
+            <a:r>
+              <a:rPr lang="pt-BR" sz="1900" b="0" i="0" dirty="0">
+                <a:solidFill>
+                  <a:srgbClr val="000000"/>
+                </a:solidFill>
+                <a:effectLst/>
+                <a:latin typeface="Times, serif"/>
+              </a:rPr>
+              <a:t> </a:t>
+            </a:r>
+            <a:r>
+              <a:rPr lang="pt-BR" sz="1900" b="0" i="0" dirty="0" err="1">
+                <a:solidFill>
+                  <a:srgbClr val="000000"/>
+                </a:solidFill>
+                <a:effectLst/>
+                <a:latin typeface="Times, serif"/>
+              </a:rPr>
+              <a:t>Language</a:t>
+            </a:r>
+            <a:r>
+              <a:rPr lang="pt-BR" sz="1900" b="0" i="0" dirty="0">
+                <a:solidFill>
+                  <a:srgbClr val="000000"/>
+                </a:solidFill>
+                <a:effectLst/>
+                <a:latin typeface="Times, serif"/>
+              </a:rPr>
+              <a:t> (XSD) 1.1 </a:t>
+            </a:r>
+            <a:r>
+              <a:rPr lang="pt-BR" sz="1900" b="0" i="0" dirty="0" err="1">
+                <a:solidFill>
+                  <a:srgbClr val="000000"/>
+                </a:solidFill>
+                <a:effectLst/>
+                <a:latin typeface="Times, serif"/>
+              </a:rPr>
+              <a:t>Part</a:t>
+            </a:r>
+            <a:r>
+              <a:rPr lang="pt-BR" sz="1900" b="0" i="0" dirty="0">
+                <a:solidFill>
+                  <a:srgbClr val="000000"/>
+                </a:solidFill>
+                <a:effectLst/>
+                <a:latin typeface="Times, serif"/>
+              </a:rPr>
+              <a:t> 1: </a:t>
+            </a:r>
+            <a:r>
+              <a:rPr lang="pt-BR" sz="1900" b="0" i="0" dirty="0" err="1">
+                <a:solidFill>
+                  <a:srgbClr val="000000"/>
+                </a:solidFill>
+                <a:effectLst/>
+                <a:latin typeface="Times, serif"/>
+              </a:rPr>
+              <a:t>Structures</a:t>
+            </a:r>
+            <a:r>
+              <a:rPr lang="pt-BR" sz="1900" b="0" i="0" dirty="0">
+                <a:solidFill>
+                  <a:srgbClr val="000000"/>
+                </a:solidFill>
+                <a:effectLst/>
+                <a:latin typeface="Times, serif"/>
+              </a:rPr>
+              <a:t>, The World </a:t>
+            </a:r>
+            <a:r>
+              <a:rPr lang="pt-BR" sz="1900" b="0" i="0" dirty="0" err="1">
+                <a:solidFill>
+                  <a:srgbClr val="000000"/>
+                </a:solidFill>
+                <a:effectLst/>
+                <a:latin typeface="Times, serif"/>
+              </a:rPr>
+              <a:t>Wide</a:t>
+            </a:r>
+            <a:r>
+              <a:rPr lang="pt-BR" sz="1900" b="0" i="0" dirty="0">
+                <a:solidFill>
+                  <a:srgbClr val="000000"/>
+                </a:solidFill>
+                <a:effectLst/>
+                <a:latin typeface="Times, serif"/>
+              </a:rPr>
+              <a:t> Web Consortium (W3C), W3C, 2012, Publicação eletrônica em </a:t>
+            </a:r>
+            <a:r>
+              <a:rPr lang="pt-BR" sz="1900" u="sng" dirty="0">
+                <a:solidFill>
+                  <a:srgbClr val="000000"/>
+                </a:solidFill>
+                <a:effectLst/>
+                <a:hlinkClick r:id="rId11"/>
+              </a:rPr>
+              <a:t>https://www.w3.org/TR/xmlschema11-1/</a:t>
+            </a:r>
+            <a:r>
+              <a:rPr lang="pt-BR" sz="1900" b="0" i="0" dirty="0">
+                <a:solidFill>
+                  <a:srgbClr val="000000"/>
+                </a:solidFill>
+                <a:effectLst/>
+                <a:latin typeface="Times, serif"/>
+              </a:rPr>
+              <a:t> </a:t>
+            </a:r>
+            <a:endParaRPr lang="pt-BR" sz="1900" dirty="0">
+              <a:solidFill>
+                <a:srgbClr val="000000"/>
+              </a:solidFill>
+              <a:effectLst/>
+            </a:endParaRPr>
+          </a:p>
+          <a:p>
+            <a:pPr rtl="0"/>
+            <a:r>
+              <a:rPr lang="pt-BR" sz="1900" b="0" i="0" dirty="0">
+                <a:solidFill>
+                  <a:srgbClr val="000000"/>
+                </a:solidFill>
+                <a:effectLst/>
+                <a:latin typeface="Times, serif"/>
+              </a:rPr>
+              <a:t>THOMPSON, Henry S. et al.W3C XML </a:t>
+            </a:r>
+            <a:r>
+              <a:rPr lang="pt-BR" sz="1900" b="0" i="0" dirty="0" err="1">
+                <a:solidFill>
+                  <a:srgbClr val="000000"/>
+                </a:solidFill>
+                <a:effectLst/>
+                <a:latin typeface="Times, serif"/>
+              </a:rPr>
+              <a:t>Schema</a:t>
+            </a:r>
+            <a:r>
+              <a:rPr lang="pt-BR" sz="1900" b="0" i="0" dirty="0">
+                <a:solidFill>
+                  <a:srgbClr val="000000"/>
+                </a:solidFill>
+                <a:effectLst/>
+                <a:latin typeface="Times, serif"/>
+              </a:rPr>
+              <a:t> </a:t>
+            </a:r>
+            <a:r>
+              <a:rPr lang="pt-BR" sz="1900" b="0" i="0" dirty="0" err="1">
+                <a:solidFill>
+                  <a:srgbClr val="000000"/>
+                </a:solidFill>
+                <a:effectLst/>
+                <a:latin typeface="Times, serif"/>
+              </a:rPr>
+              <a:t>Definition</a:t>
+            </a:r>
+            <a:r>
+              <a:rPr lang="pt-BR" sz="1900" b="0" i="0" dirty="0">
+                <a:solidFill>
+                  <a:srgbClr val="000000"/>
+                </a:solidFill>
+                <a:effectLst/>
+                <a:latin typeface="Times, serif"/>
+              </a:rPr>
+              <a:t> </a:t>
+            </a:r>
+            <a:r>
+              <a:rPr lang="pt-BR" sz="1900" b="0" i="0" dirty="0" err="1">
+                <a:solidFill>
+                  <a:srgbClr val="000000"/>
+                </a:solidFill>
+                <a:effectLst/>
+                <a:latin typeface="Times, serif"/>
+              </a:rPr>
+              <a:t>Language</a:t>
+            </a:r>
+            <a:r>
+              <a:rPr lang="pt-BR" sz="1900" b="0" i="0" dirty="0">
+                <a:solidFill>
+                  <a:srgbClr val="000000"/>
+                </a:solidFill>
+                <a:effectLst/>
+                <a:latin typeface="Times, serif"/>
+              </a:rPr>
+              <a:t> (XSD) 1.1 </a:t>
+            </a:r>
+            <a:r>
+              <a:rPr lang="pt-BR" sz="1900" b="0" i="0" dirty="0" err="1">
+                <a:solidFill>
+                  <a:srgbClr val="000000"/>
+                </a:solidFill>
+                <a:effectLst/>
+                <a:latin typeface="Times, serif"/>
+              </a:rPr>
+              <a:t>Part</a:t>
+            </a:r>
+            <a:r>
+              <a:rPr lang="pt-BR" sz="1900" b="0" i="0" dirty="0">
+                <a:solidFill>
+                  <a:srgbClr val="000000"/>
+                </a:solidFill>
+                <a:effectLst/>
+                <a:latin typeface="Times, serif"/>
+              </a:rPr>
+              <a:t> 2: </a:t>
+            </a:r>
+            <a:r>
+              <a:rPr lang="pt-BR" sz="1900" b="0" i="0" dirty="0" err="1">
+                <a:solidFill>
+                  <a:srgbClr val="000000"/>
+                </a:solidFill>
+                <a:effectLst/>
+                <a:latin typeface="Times, serif"/>
+              </a:rPr>
+              <a:t>Datatypes</a:t>
+            </a:r>
+            <a:r>
+              <a:rPr lang="pt-BR" sz="1900" b="0" i="0" dirty="0">
+                <a:solidFill>
+                  <a:srgbClr val="000000"/>
+                </a:solidFill>
+                <a:effectLst/>
+                <a:latin typeface="Times, serif"/>
+              </a:rPr>
+              <a:t>, The World </a:t>
+            </a:r>
+            <a:r>
+              <a:rPr lang="pt-BR" sz="1900" b="0" i="0" dirty="0" err="1">
+                <a:solidFill>
+                  <a:srgbClr val="000000"/>
+                </a:solidFill>
+                <a:effectLst/>
+                <a:latin typeface="Times, serif"/>
+              </a:rPr>
+              <a:t>Wide</a:t>
+            </a:r>
+            <a:r>
+              <a:rPr lang="pt-BR" sz="1900" b="0" i="0" dirty="0">
+                <a:solidFill>
+                  <a:srgbClr val="000000"/>
+                </a:solidFill>
+                <a:effectLst/>
+                <a:latin typeface="Times, serif"/>
+              </a:rPr>
+              <a:t> Web Consortium (W3C), W3C, 2012, Publicação eletrônica em </a:t>
+            </a:r>
+            <a:r>
+              <a:rPr lang="pt-BR" sz="1900" u="sng" dirty="0">
+                <a:solidFill>
+                  <a:srgbClr val="000000"/>
+                </a:solidFill>
+                <a:effectLst/>
+                <a:hlinkClick r:id="rId12"/>
+              </a:rPr>
+              <a:t>https://www.w3.org/TR/xmlschema11-2/</a:t>
+            </a:r>
+            <a:endParaRPr lang="pt-BR" sz="1900" dirty="0">
+              <a:solidFill>
+                <a:srgbClr val="000000"/>
+              </a:solidFill>
+              <a:effectLst/>
+            </a:endParaRPr>
+          </a:p>
+          <a:p>
+            <a:pPr rtl="0"/>
+            <a:r>
+              <a:rPr lang="pt-BR" sz="1900" b="0" i="0" dirty="0">
+                <a:solidFill>
+                  <a:srgbClr val="000000"/>
+                </a:solidFill>
+                <a:effectLst/>
+                <a:latin typeface="Times, serif"/>
+              </a:rPr>
+              <a:t>LIU, </a:t>
+            </a:r>
+            <a:r>
+              <a:rPr lang="pt-BR" sz="1900" b="0" i="0" dirty="0" err="1">
+                <a:solidFill>
+                  <a:srgbClr val="000000"/>
+                </a:solidFill>
+                <a:effectLst/>
+                <a:latin typeface="Times, serif"/>
+              </a:rPr>
+              <a:t>Canyang</a:t>
+            </a:r>
+            <a:r>
+              <a:rPr lang="pt-BR" sz="1900" b="0" i="0" dirty="0">
+                <a:solidFill>
+                  <a:srgbClr val="000000"/>
+                </a:solidFill>
+                <a:effectLst/>
+                <a:latin typeface="Times, serif"/>
+              </a:rPr>
+              <a:t> Kevin et </a:t>
+            </a:r>
+            <a:r>
+              <a:rPr lang="pt-BR" sz="1900" b="0" i="0" dirty="0" err="1">
+                <a:solidFill>
+                  <a:srgbClr val="000000"/>
+                </a:solidFill>
+                <a:effectLst/>
+                <a:latin typeface="Times, serif"/>
+              </a:rPr>
+              <a:t>al.Web</a:t>
+            </a:r>
+            <a:r>
+              <a:rPr lang="pt-BR" sz="1900" b="0" i="0" dirty="0">
+                <a:solidFill>
+                  <a:srgbClr val="000000"/>
+                </a:solidFill>
+                <a:effectLst/>
+                <a:latin typeface="Times, serif"/>
+              </a:rPr>
+              <a:t> Services </a:t>
+            </a:r>
+            <a:r>
+              <a:rPr lang="pt-BR" sz="1900" b="0" i="0" dirty="0" err="1">
+                <a:solidFill>
+                  <a:srgbClr val="000000"/>
+                </a:solidFill>
+                <a:effectLst/>
+                <a:latin typeface="Times, serif"/>
+              </a:rPr>
+              <a:t>Description</a:t>
+            </a:r>
+            <a:r>
+              <a:rPr lang="pt-BR" sz="1900" b="0" i="0" dirty="0">
+                <a:solidFill>
+                  <a:srgbClr val="000000"/>
+                </a:solidFill>
+                <a:effectLst/>
+                <a:latin typeface="Times, serif"/>
+              </a:rPr>
+              <a:t> </a:t>
+            </a:r>
+            <a:r>
+              <a:rPr lang="pt-BR" sz="1900" b="0" i="0" dirty="0" err="1">
+                <a:solidFill>
+                  <a:srgbClr val="000000"/>
+                </a:solidFill>
+                <a:effectLst/>
+                <a:latin typeface="Times, serif"/>
+              </a:rPr>
+              <a:t>Language</a:t>
+            </a:r>
+            <a:r>
+              <a:rPr lang="pt-BR" sz="1900" b="0" i="0" dirty="0">
+                <a:solidFill>
+                  <a:srgbClr val="000000"/>
+                </a:solidFill>
+                <a:effectLst/>
+                <a:latin typeface="Times, serif"/>
+              </a:rPr>
+              <a:t> (WSDL) </a:t>
+            </a:r>
+            <a:r>
+              <a:rPr lang="pt-BR" sz="1900" b="0" i="0" dirty="0" err="1">
+                <a:solidFill>
+                  <a:srgbClr val="000000"/>
+                </a:solidFill>
+                <a:effectLst/>
+                <a:latin typeface="Times, serif"/>
+              </a:rPr>
+              <a:t>Version</a:t>
+            </a:r>
+            <a:r>
+              <a:rPr lang="pt-BR" sz="1900" b="0" i="0" dirty="0">
+                <a:solidFill>
+                  <a:srgbClr val="000000"/>
+                </a:solidFill>
+                <a:effectLst/>
+                <a:latin typeface="Times, serif"/>
+              </a:rPr>
+              <a:t> 2.0 </a:t>
+            </a:r>
+            <a:r>
+              <a:rPr lang="pt-BR" sz="1900" b="0" i="0" dirty="0" err="1">
+                <a:solidFill>
+                  <a:srgbClr val="000000"/>
+                </a:solidFill>
+                <a:effectLst/>
+                <a:latin typeface="Times, serif"/>
+              </a:rPr>
+              <a:t>Part</a:t>
+            </a:r>
+            <a:r>
+              <a:rPr lang="pt-BR" sz="1900" b="0" i="0" dirty="0">
+                <a:solidFill>
+                  <a:srgbClr val="000000"/>
+                </a:solidFill>
+                <a:effectLst/>
+                <a:latin typeface="Times, serif"/>
+              </a:rPr>
+              <a:t> 0: Primer. 2007, Publicação eletrônica em </a:t>
+            </a:r>
+            <a:r>
+              <a:rPr lang="pt-BR" sz="1900" u="sng" dirty="0">
+                <a:solidFill>
+                  <a:srgbClr val="000000"/>
+                </a:solidFill>
+                <a:effectLst/>
+                <a:hlinkClick r:id="rId13"/>
+              </a:rPr>
+              <a:t>https://www.w3.org/TR/wsdl20-primer/</a:t>
+            </a:r>
+            <a:endParaRPr lang="pt-BR" sz="1900" dirty="0">
+              <a:solidFill>
+                <a:srgbClr val="000000"/>
+              </a:solidFill>
+              <a:effectLst/>
+            </a:endParaRPr>
+          </a:p>
+          <a:p>
+            <a:pPr marL="109728" indent="0" rtl="0">
+              <a:buNone/>
+            </a:pPr>
+            <a:endParaRPr lang="pt-BR" dirty="0">
+              <a:solidFill>
+                <a:srgbClr val="000000"/>
+              </a:solidFill>
+              <a:effectLst/>
+            </a:endParaRPr>
+          </a:p>
+        </p:txBody>
+      </p:sp>
+      <p:sp>
+        <p:nvSpPr>
+          <p:cNvPr id="2" name="Título 1"/>
+          <p:cNvSpPr>
+            <a:spLocks noGrp="1"/>
+          </p:cNvSpPr>
+          <p:nvPr>
+            <p:ph type="title"/>
+          </p:nvPr>
+        </p:nvSpPr>
+        <p:spPr/>
+        <p:txBody>
+          <a:bodyPr/>
+          <a:lstStyle/>
+          <a:p>
+            <a:r>
+              <a:rPr lang="pt-BR" altLang="en-US"/>
+              <a:t>Referencias Bibliograficas</a:t>
+            </a:r>
+          </a:p>
+        </p:txBody>
+      </p:sp>
+    </p:spTree>
+  </p:cSld>
+  <p:clrMapOvr>
+    <a:masterClrMapping/>
+  </p:clrMapOvr>
+</p:sld>
+</file>
+
+<file path=ppt/slides/slide12.xml><?xml version="1.0" encoding="utf-8"?>
+<p:sld xmlns:a="http://schemas.openxmlformats.org/drawingml/2006/main" xmlns:r="http://schemas.openxmlformats.org/officeDocument/2006/relationships" xmlns:p="http://schemas.openxmlformats.org/presentationml/2006/main">
+  <p:cSld>
+    <p:spTree>
+      <p:nvGrpSpPr>
+        <p:cNvPr id="1" name=""/>
+        <p:cNvGrpSpPr/>
+        <p:nvPr/>
+      </p:nvGrpSpPr>
+      <p:grpSpPr>
+        <a:xfrm>
+          <a:off x="0" y="0"/>
+          <a:ext cx="0" cy="0"/>
+          <a:chOff x="0" y="0"/>
+          <a:chExt cx="0" cy="0"/>
+        </a:xfrm>
+      </p:grpSpPr>
+      <p:sp>
+        <p:nvSpPr>
+          <p:cNvPr id="3" name="Espaço Reservado para Conteúdo 2"/>
+          <p:cNvSpPr>
+            <a:spLocks noGrp="1"/>
+          </p:cNvSpPr>
+          <p:nvPr>
+            <p:ph idx="1"/>
+          </p:nvPr>
+        </p:nvSpPr>
+        <p:spPr/>
+        <p:txBody>
+          <a:bodyPr>
+            <a:noAutofit/>
+          </a:bodyPr>
+          <a:lstStyle/>
+          <a:p>
+            <a:pPr rtl="0"/>
+            <a:r>
+              <a:rPr lang="pt-BR" sz="900" b="0" i="0" dirty="0">
+                <a:solidFill>
+                  <a:srgbClr val="000000"/>
+                </a:solidFill>
+                <a:effectLst/>
+                <a:latin typeface="Times, serif"/>
+              </a:rPr>
+              <a:t>WEERAWARANA, </a:t>
+            </a:r>
+            <a:r>
+              <a:rPr lang="pt-BR" sz="900" b="0" i="0" dirty="0" err="1">
+                <a:solidFill>
+                  <a:srgbClr val="000000"/>
+                </a:solidFill>
+                <a:effectLst/>
+                <a:latin typeface="Times, serif"/>
+              </a:rPr>
+              <a:t>Sanjiva</a:t>
+            </a:r>
+            <a:r>
+              <a:rPr lang="pt-BR" sz="900" b="0" i="0" dirty="0">
+                <a:solidFill>
+                  <a:srgbClr val="000000"/>
+                </a:solidFill>
+                <a:effectLst/>
+                <a:latin typeface="Times, serif"/>
+              </a:rPr>
+              <a:t> et al. Web Services </a:t>
+            </a:r>
+            <a:r>
+              <a:rPr lang="pt-BR" sz="900" b="0" i="0" dirty="0" err="1">
+                <a:solidFill>
+                  <a:srgbClr val="000000"/>
+                </a:solidFill>
+                <a:effectLst/>
+                <a:latin typeface="Times, serif"/>
+              </a:rPr>
+              <a:t>Description</a:t>
+            </a:r>
+            <a:r>
+              <a:rPr lang="pt-BR" sz="900" b="0" i="0" dirty="0">
+                <a:solidFill>
+                  <a:srgbClr val="000000"/>
+                </a:solidFill>
+                <a:effectLst/>
+                <a:latin typeface="Times, serif"/>
+              </a:rPr>
+              <a:t> </a:t>
+            </a:r>
+            <a:r>
+              <a:rPr lang="pt-BR" sz="900" b="0" i="0" dirty="0" err="1">
+                <a:solidFill>
+                  <a:srgbClr val="000000"/>
+                </a:solidFill>
+                <a:effectLst/>
+                <a:latin typeface="Times, serif"/>
+              </a:rPr>
+              <a:t>Language</a:t>
+            </a:r>
+            <a:r>
+              <a:rPr lang="pt-BR" sz="900" b="0" i="0" dirty="0">
+                <a:solidFill>
+                  <a:srgbClr val="000000"/>
+                </a:solidFill>
+                <a:effectLst/>
+                <a:latin typeface="Times, serif"/>
+              </a:rPr>
+              <a:t> (WSDL) </a:t>
+            </a:r>
+            <a:r>
+              <a:rPr lang="pt-BR" sz="900" b="0" i="0" dirty="0" err="1">
+                <a:solidFill>
+                  <a:srgbClr val="000000"/>
+                </a:solidFill>
+                <a:effectLst/>
+                <a:latin typeface="Times, serif"/>
+              </a:rPr>
+              <a:t>Version</a:t>
+            </a:r>
+            <a:r>
+              <a:rPr lang="pt-BR" sz="900" b="0" i="0" dirty="0">
+                <a:solidFill>
+                  <a:srgbClr val="000000"/>
+                </a:solidFill>
+                <a:effectLst/>
+                <a:latin typeface="Times, serif"/>
+              </a:rPr>
+              <a:t> 2.0 </a:t>
+            </a:r>
+            <a:r>
+              <a:rPr lang="pt-BR" sz="900" b="0" i="0" dirty="0" err="1">
+                <a:solidFill>
+                  <a:srgbClr val="000000"/>
+                </a:solidFill>
+                <a:effectLst/>
+                <a:latin typeface="Times, serif"/>
+              </a:rPr>
+              <a:t>Part</a:t>
+            </a:r>
+            <a:r>
+              <a:rPr lang="pt-BR" sz="900" b="0" i="0" dirty="0">
+                <a:solidFill>
+                  <a:srgbClr val="000000"/>
+                </a:solidFill>
+                <a:effectLst/>
+                <a:latin typeface="Times, serif"/>
+              </a:rPr>
+              <a:t> 1: Core </a:t>
+            </a:r>
+            <a:r>
+              <a:rPr lang="pt-BR" sz="900" b="0" i="0" dirty="0" err="1">
+                <a:solidFill>
+                  <a:srgbClr val="000000"/>
+                </a:solidFill>
+                <a:effectLst/>
+                <a:latin typeface="Times, serif"/>
+              </a:rPr>
+              <a:t>Language</a:t>
+            </a:r>
+            <a:r>
+              <a:rPr lang="pt-BR" sz="900" b="0" i="0" dirty="0">
+                <a:solidFill>
+                  <a:srgbClr val="000000"/>
+                </a:solidFill>
+                <a:effectLst/>
+                <a:latin typeface="Times, serif"/>
+              </a:rPr>
+              <a:t>. 2007, Publicação eletrônica em </a:t>
+            </a:r>
+            <a:r>
+              <a:rPr lang="pt-BR" sz="900" u="sng" dirty="0">
+                <a:solidFill>
+                  <a:srgbClr val="000000"/>
+                </a:solidFill>
+                <a:effectLst/>
+                <a:hlinkClick r:id="rId2"/>
+              </a:rPr>
+              <a:t>https://www.w3.org/TR/wsdl20/</a:t>
+            </a:r>
+            <a:endParaRPr lang="pt-BR" sz="900" dirty="0">
+              <a:solidFill>
+                <a:srgbClr val="000000"/>
+              </a:solidFill>
+              <a:effectLst/>
+            </a:endParaRPr>
+          </a:p>
+          <a:p>
+            <a:pPr rtl="0"/>
+            <a:r>
+              <a:rPr lang="pt-BR" sz="900" b="0" i="0" dirty="0">
+                <a:solidFill>
+                  <a:srgbClr val="000000"/>
+                </a:solidFill>
+                <a:effectLst/>
+                <a:latin typeface="Times, serif"/>
+              </a:rPr>
+              <a:t>WEERAWARANA, </a:t>
+            </a:r>
+            <a:r>
+              <a:rPr lang="pt-BR" sz="900" b="0" i="0" dirty="0" err="1">
+                <a:solidFill>
+                  <a:srgbClr val="000000"/>
+                </a:solidFill>
+                <a:effectLst/>
+                <a:latin typeface="Times, serif"/>
+              </a:rPr>
+              <a:t>Sanjiva</a:t>
+            </a:r>
+            <a:r>
+              <a:rPr lang="pt-BR" sz="900" b="0" i="0" dirty="0">
+                <a:solidFill>
+                  <a:srgbClr val="000000"/>
+                </a:solidFill>
+                <a:effectLst/>
+                <a:latin typeface="Times, serif"/>
+              </a:rPr>
+              <a:t> et al. Web Services </a:t>
+            </a:r>
+            <a:r>
+              <a:rPr lang="pt-BR" sz="900" b="0" i="0" dirty="0" err="1">
+                <a:solidFill>
+                  <a:srgbClr val="000000"/>
+                </a:solidFill>
+                <a:effectLst/>
+                <a:latin typeface="Times, serif"/>
+              </a:rPr>
+              <a:t>Description</a:t>
+            </a:r>
+            <a:r>
+              <a:rPr lang="pt-BR" sz="900" b="0" i="0" dirty="0">
+                <a:solidFill>
+                  <a:srgbClr val="000000"/>
+                </a:solidFill>
+                <a:effectLst/>
+                <a:latin typeface="Times, serif"/>
+              </a:rPr>
+              <a:t> </a:t>
+            </a:r>
+            <a:r>
+              <a:rPr lang="pt-BR" sz="900" b="0" i="0" dirty="0" err="1">
+                <a:solidFill>
+                  <a:srgbClr val="000000"/>
+                </a:solidFill>
+                <a:effectLst/>
+                <a:latin typeface="Times, serif"/>
+              </a:rPr>
+              <a:t>Language</a:t>
+            </a:r>
+            <a:r>
+              <a:rPr lang="pt-BR" sz="900" b="0" i="0" dirty="0">
+                <a:solidFill>
+                  <a:srgbClr val="000000"/>
+                </a:solidFill>
+                <a:effectLst/>
+                <a:latin typeface="Times, serif"/>
+              </a:rPr>
+              <a:t> (WSDL) </a:t>
+            </a:r>
+            <a:r>
+              <a:rPr lang="pt-BR" sz="900" b="0" i="0" dirty="0" err="1">
+                <a:solidFill>
+                  <a:srgbClr val="000000"/>
+                </a:solidFill>
+                <a:effectLst/>
+                <a:latin typeface="Times, serif"/>
+              </a:rPr>
+              <a:t>Version</a:t>
+            </a:r>
+            <a:r>
+              <a:rPr lang="pt-BR" sz="900" b="0" i="0" dirty="0">
+                <a:solidFill>
+                  <a:srgbClr val="000000"/>
+                </a:solidFill>
+                <a:effectLst/>
+                <a:latin typeface="Times, serif"/>
+              </a:rPr>
+              <a:t> 2.0 </a:t>
+            </a:r>
+            <a:r>
+              <a:rPr lang="pt-BR" sz="900" b="0" i="0" dirty="0" err="1">
+                <a:solidFill>
+                  <a:srgbClr val="000000"/>
+                </a:solidFill>
+                <a:effectLst/>
+                <a:latin typeface="Times, serif"/>
+              </a:rPr>
+              <a:t>Part</a:t>
+            </a:r>
+            <a:r>
+              <a:rPr lang="pt-BR" sz="900" b="0" i="0" dirty="0">
+                <a:solidFill>
+                  <a:srgbClr val="000000"/>
+                </a:solidFill>
+                <a:effectLst/>
+                <a:latin typeface="Times, serif"/>
+              </a:rPr>
+              <a:t> 2: </a:t>
+            </a:r>
+            <a:r>
+              <a:rPr lang="pt-BR" sz="900" b="0" i="0" dirty="0" err="1">
+                <a:solidFill>
+                  <a:srgbClr val="000000"/>
+                </a:solidFill>
+                <a:effectLst/>
+                <a:latin typeface="Times, serif"/>
+              </a:rPr>
+              <a:t>Adjuncts</a:t>
+            </a:r>
+            <a:r>
+              <a:rPr lang="pt-BR" sz="900" b="0" i="0" dirty="0">
+                <a:solidFill>
+                  <a:srgbClr val="000000"/>
+                </a:solidFill>
+                <a:effectLst/>
+                <a:latin typeface="Times, serif"/>
+              </a:rPr>
+              <a:t>, 2007, Publicação eletrônica em </a:t>
+            </a:r>
+            <a:r>
+              <a:rPr lang="pt-BR" sz="900" u="sng" dirty="0">
+                <a:solidFill>
+                  <a:srgbClr val="000000"/>
+                </a:solidFill>
+                <a:effectLst/>
+                <a:hlinkClick r:id="rId3"/>
+              </a:rPr>
+              <a:t>https://www.w3.org/TR/wsdl20-adjuncts/</a:t>
+            </a:r>
+            <a:endParaRPr lang="pt-BR" sz="900" dirty="0">
+              <a:solidFill>
+                <a:srgbClr val="000000"/>
+              </a:solidFill>
+              <a:effectLst/>
+            </a:endParaRPr>
+          </a:p>
+          <a:p>
+            <a:pPr rtl="0"/>
+            <a:r>
+              <a:rPr lang="pt-BR" sz="900" b="0" i="0" dirty="0">
+                <a:solidFill>
+                  <a:srgbClr val="000000"/>
+                </a:solidFill>
+                <a:effectLst/>
+                <a:latin typeface="Times, serif"/>
+              </a:rPr>
+              <a:t>MOZILLA, Documentação </a:t>
+            </a:r>
+            <a:r>
+              <a:rPr lang="pt-BR" sz="900" b="0" i="0" dirty="0" err="1">
+                <a:solidFill>
+                  <a:srgbClr val="000000"/>
+                </a:solidFill>
+                <a:effectLst/>
+                <a:latin typeface="Times, serif"/>
+              </a:rPr>
+              <a:t>JavaScript</a:t>
+            </a:r>
+            <a:r>
+              <a:rPr lang="pt-BR" sz="900" b="0" i="0" dirty="0">
+                <a:solidFill>
+                  <a:srgbClr val="000000"/>
+                </a:solidFill>
+                <a:effectLst/>
+                <a:latin typeface="Times, serif"/>
+              </a:rPr>
+              <a:t>. Publicação eletrônica em </a:t>
+            </a:r>
+            <a:r>
+              <a:rPr lang="pt-BR" sz="900" u="sng" dirty="0">
+                <a:solidFill>
+                  <a:srgbClr val="000000"/>
+                </a:solidFill>
+                <a:effectLst/>
+                <a:hlinkClick r:id="rId4"/>
+              </a:rPr>
+              <a:t>https://developer.mozilla.org/pt-BR/docs/Aprender/JavaScript</a:t>
+            </a:r>
+            <a:r>
+              <a:rPr lang="pt-BR" sz="900" b="0" i="0" dirty="0">
+                <a:solidFill>
+                  <a:srgbClr val="000000"/>
+                </a:solidFill>
+                <a:effectLst/>
+                <a:latin typeface="Times, serif"/>
+              </a:rPr>
+              <a:t>, acessado em 08/10/2019</a:t>
+            </a:r>
+            <a:endParaRPr lang="pt-BR" sz="900" dirty="0">
+              <a:solidFill>
+                <a:srgbClr val="000000"/>
+              </a:solidFill>
+              <a:effectLst/>
+            </a:endParaRPr>
+          </a:p>
+          <a:p>
+            <a:pPr rtl="0"/>
+            <a:r>
+              <a:rPr lang="pt-BR" sz="900" b="0" i="0" dirty="0">
+                <a:solidFill>
+                  <a:srgbClr val="000000"/>
+                </a:solidFill>
+                <a:effectLst/>
+                <a:latin typeface="Times, serif"/>
+              </a:rPr>
+              <a:t>LEE, </a:t>
+            </a:r>
+            <a:r>
+              <a:rPr lang="pt-BR" sz="900" b="0" i="0" dirty="0" err="1">
+                <a:solidFill>
+                  <a:srgbClr val="000000"/>
+                </a:solidFill>
+                <a:effectLst/>
+                <a:latin typeface="Times, serif"/>
+              </a:rPr>
+              <a:t>Hongki</a:t>
+            </a:r>
+            <a:r>
+              <a:rPr lang="pt-BR" sz="900" b="0" i="0" dirty="0">
+                <a:solidFill>
+                  <a:srgbClr val="000000"/>
+                </a:solidFill>
+                <a:effectLst/>
+                <a:latin typeface="Times, serif"/>
+              </a:rPr>
+              <a:t> et al. SAFE: Formal </a:t>
+            </a:r>
+            <a:r>
+              <a:rPr lang="pt-BR" sz="900" b="0" i="0" dirty="0" err="1">
+                <a:solidFill>
+                  <a:srgbClr val="000000"/>
+                </a:solidFill>
+                <a:effectLst/>
+                <a:latin typeface="Times, serif"/>
+              </a:rPr>
+              <a:t>specification</a:t>
+            </a:r>
+            <a:r>
+              <a:rPr lang="pt-BR" sz="900" b="0" i="0" dirty="0">
+                <a:solidFill>
+                  <a:srgbClr val="000000"/>
+                </a:solidFill>
+                <a:effectLst/>
+                <a:latin typeface="Times, serif"/>
+              </a:rPr>
+              <a:t> </a:t>
+            </a:r>
+            <a:r>
+              <a:rPr lang="pt-BR" sz="900" b="0" i="0" dirty="0" err="1">
+                <a:solidFill>
+                  <a:srgbClr val="000000"/>
+                </a:solidFill>
+                <a:effectLst/>
+                <a:latin typeface="Times, serif"/>
+              </a:rPr>
+              <a:t>and</a:t>
+            </a:r>
+            <a:r>
+              <a:rPr lang="pt-BR" sz="900" b="0" i="0" dirty="0">
+                <a:solidFill>
+                  <a:srgbClr val="000000"/>
+                </a:solidFill>
+                <a:effectLst/>
+                <a:latin typeface="Times, serif"/>
+              </a:rPr>
+              <a:t> </a:t>
+            </a:r>
+            <a:r>
+              <a:rPr lang="pt-BR" sz="900" b="0" i="0" dirty="0" err="1">
+                <a:solidFill>
+                  <a:srgbClr val="000000"/>
+                </a:solidFill>
+                <a:effectLst/>
+                <a:latin typeface="Times, serif"/>
+              </a:rPr>
+              <a:t>implementation</a:t>
+            </a:r>
+            <a:r>
+              <a:rPr lang="pt-BR" sz="900" b="0" i="0" dirty="0">
+                <a:solidFill>
+                  <a:srgbClr val="000000"/>
+                </a:solidFill>
+                <a:effectLst/>
+                <a:latin typeface="Times, serif"/>
+              </a:rPr>
+              <a:t> </a:t>
+            </a:r>
+            <a:r>
+              <a:rPr lang="pt-BR" sz="900" b="0" i="0" dirty="0" err="1">
+                <a:solidFill>
+                  <a:srgbClr val="000000"/>
+                </a:solidFill>
+                <a:effectLst/>
+                <a:latin typeface="Times, serif"/>
+              </a:rPr>
+              <a:t>of</a:t>
+            </a:r>
+            <a:r>
+              <a:rPr lang="pt-BR" sz="900" b="0" i="0" dirty="0">
+                <a:solidFill>
+                  <a:srgbClr val="000000"/>
+                </a:solidFill>
+                <a:effectLst/>
+                <a:latin typeface="Times, serif"/>
+              </a:rPr>
+              <a:t> a </a:t>
+            </a:r>
+            <a:r>
+              <a:rPr lang="pt-BR" sz="900" b="0" i="0" dirty="0" err="1">
+                <a:solidFill>
+                  <a:srgbClr val="000000"/>
+                </a:solidFill>
+                <a:effectLst/>
+                <a:latin typeface="Times, serif"/>
+              </a:rPr>
+              <a:t>scalable</a:t>
+            </a:r>
+            <a:r>
+              <a:rPr lang="pt-BR" sz="900" b="0" i="0" dirty="0">
+                <a:solidFill>
+                  <a:srgbClr val="000000"/>
+                </a:solidFill>
+                <a:effectLst/>
+                <a:latin typeface="Times, serif"/>
+              </a:rPr>
+              <a:t> </a:t>
+            </a:r>
+            <a:r>
+              <a:rPr lang="pt-BR" sz="900" b="0" i="0" dirty="0" err="1">
+                <a:solidFill>
+                  <a:srgbClr val="000000"/>
+                </a:solidFill>
+                <a:effectLst/>
+                <a:latin typeface="Times, serif"/>
+              </a:rPr>
+              <a:t>analysis</a:t>
+            </a:r>
+            <a:r>
+              <a:rPr lang="pt-BR" sz="900" b="0" i="0" dirty="0">
+                <a:solidFill>
+                  <a:srgbClr val="000000"/>
+                </a:solidFill>
+                <a:effectLst/>
+                <a:latin typeface="Times, serif"/>
+              </a:rPr>
+              <a:t> framework for </a:t>
+            </a:r>
+            <a:r>
+              <a:rPr lang="pt-BR" sz="900" b="0" i="0" dirty="0" err="1">
+                <a:solidFill>
+                  <a:srgbClr val="000000"/>
+                </a:solidFill>
+                <a:effectLst/>
+                <a:latin typeface="Times, serif"/>
+              </a:rPr>
+              <a:t>ECMAScript</a:t>
+            </a:r>
+            <a:r>
+              <a:rPr lang="pt-BR" sz="900" b="0" i="0" dirty="0">
+                <a:solidFill>
+                  <a:srgbClr val="000000"/>
+                </a:solidFill>
+                <a:effectLst/>
+                <a:latin typeface="Times, serif"/>
+              </a:rPr>
+              <a:t>. In: FOOL 2012: 19th </a:t>
+            </a:r>
+            <a:r>
+              <a:rPr lang="pt-BR" sz="900" b="0" i="0" dirty="0" err="1">
+                <a:solidFill>
+                  <a:srgbClr val="000000"/>
+                </a:solidFill>
+                <a:effectLst/>
+                <a:latin typeface="Times, serif"/>
+              </a:rPr>
+              <a:t>International</a:t>
+            </a:r>
+            <a:r>
+              <a:rPr lang="pt-BR" sz="900" b="0" i="0" dirty="0">
+                <a:solidFill>
+                  <a:srgbClr val="000000"/>
+                </a:solidFill>
+                <a:effectLst/>
+                <a:latin typeface="Times, serif"/>
+              </a:rPr>
+              <a:t> Workshop </a:t>
+            </a:r>
+            <a:r>
+              <a:rPr lang="pt-BR" sz="900" b="0" i="0" dirty="0" err="1">
+                <a:solidFill>
+                  <a:srgbClr val="000000"/>
+                </a:solidFill>
+                <a:effectLst/>
+                <a:latin typeface="Times, serif"/>
+              </a:rPr>
+              <a:t>on</a:t>
+            </a:r>
+            <a:r>
+              <a:rPr lang="pt-BR" sz="900" b="0" i="0" dirty="0">
+                <a:solidFill>
+                  <a:srgbClr val="000000"/>
+                </a:solidFill>
+                <a:effectLst/>
+                <a:latin typeface="Times, serif"/>
+              </a:rPr>
+              <a:t> </a:t>
+            </a:r>
+            <a:r>
+              <a:rPr lang="pt-BR" sz="900" b="0" i="0" dirty="0" err="1">
+                <a:solidFill>
+                  <a:srgbClr val="000000"/>
+                </a:solidFill>
+                <a:effectLst/>
+                <a:latin typeface="Times, serif"/>
+              </a:rPr>
+              <a:t>Foundations</a:t>
+            </a:r>
+            <a:r>
+              <a:rPr lang="pt-BR" sz="900" b="0" i="0" dirty="0">
+                <a:solidFill>
+                  <a:srgbClr val="000000"/>
+                </a:solidFill>
+                <a:effectLst/>
+                <a:latin typeface="Times, serif"/>
+              </a:rPr>
+              <a:t> </a:t>
+            </a:r>
+            <a:r>
+              <a:rPr lang="pt-BR" sz="900" b="0" i="0" dirty="0" err="1">
+                <a:solidFill>
+                  <a:srgbClr val="000000"/>
+                </a:solidFill>
+                <a:effectLst/>
+                <a:latin typeface="Times, serif"/>
+              </a:rPr>
+              <a:t>of</a:t>
+            </a:r>
+            <a:r>
+              <a:rPr lang="pt-BR" sz="900" b="0" i="0" dirty="0">
+                <a:solidFill>
+                  <a:srgbClr val="000000"/>
+                </a:solidFill>
+                <a:effectLst/>
+                <a:latin typeface="Times, serif"/>
+              </a:rPr>
+              <a:t> </a:t>
+            </a:r>
+            <a:r>
+              <a:rPr lang="pt-BR" sz="900" b="0" i="0" dirty="0" err="1">
+                <a:solidFill>
+                  <a:srgbClr val="000000"/>
+                </a:solidFill>
+                <a:effectLst/>
+                <a:latin typeface="Times, serif"/>
+              </a:rPr>
+              <a:t>Object-Oriented</a:t>
+            </a:r>
+            <a:r>
+              <a:rPr lang="pt-BR" sz="900" b="0" i="0" dirty="0">
+                <a:solidFill>
+                  <a:srgbClr val="000000"/>
+                </a:solidFill>
+                <a:effectLst/>
+                <a:latin typeface="Times, serif"/>
+              </a:rPr>
+              <a:t> </a:t>
+            </a:r>
+            <a:r>
+              <a:rPr lang="pt-BR" sz="900" b="0" i="0" dirty="0" err="1">
+                <a:solidFill>
+                  <a:srgbClr val="000000"/>
+                </a:solidFill>
+                <a:effectLst/>
+                <a:latin typeface="Times, serif"/>
+              </a:rPr>
+              <a:t>Languages</a:t>
+            </a:r>
+            <a:r>
+              <a:rPr lang="pt-BR" sz="900" b="0" i="0" dirty="0">
+                <a:solidFill>
+                  <a:srgbClr val="000000"/>
+                </a:solidFill>
+                <a:effectLst/>
+                <a:latin typeface="Times, serif"/>
+              </a:rPr>
+              <a:t>. p. 96. Publicação eletrônica em </a:t>
+            </a:r>
+            <a:r>
+              <a:rPr lang="pt-BR" sz="900" u="sng" dirty="0">
+                <a:solidFill>
+                  <a:srgbClr val="000000"/>
+                </a:solidFill>
+                <a:effectLst/>
+                <a:hlinkClick r:id="rId5"/>
+              </a:rPr>
+              <a:t>http://citeseerx.ist.psu.edu/viewdoc/download?doi=10.1.1.386.7692&amp;rep=rep1&amp;type=pdf#page=100</a:t>
+            </a:r>
+            <a:r>
+              <a:rPr lang="pt-BR" sz="900" b="0" i="0" dirty="0">
+                <a:solidFill>
+                  <a:srgbClr val="000000"/>
+                </a:solidFill>
+                <a:effectLst/>
+                <a:latin typeface="Times, serif"/>
+              </a:rPr>
+              <a:t>. 2012.</a:t>
+            </a:r>
+            <a:endParaRPr lang="pt-BR" sz="900" dirty="0">
+              <a:solidFill>
+                <a:srgbClr val="000000"/>
+              </a:solidFill>
+              <a:effectLst/>
+            </a:endParaRPr>
+          </a:p>
+          <a:p>
+            <a:pPr rtl="0"/>
+            <a:r>
+              <a:rPr lang="pt-BR" sz="900" b="0" i="0" dirty="0">
+                <a:solidFill>
+                  <a:srgbClr val="000000"/>
+                </a:solidFill>
+                <a:effectLst/>
+                <a:latin typeface="Times, serif"/>
+              </a:rPr>
+              <a:t>NODEJS, Documentação. acessado em 08/10/2019, Publicação eletrônica em </a:t>
+            </a:r>
+            <a:r>
+              <a:rPr lang="pt-BR" sz="900" b="0" i="0" u="sng" dirty="0">
+                <a:solidFill>
+                  <a:srgbClr val="000000"/>
+                </a:solidFill>
+                <a:effectLst/>
+                <a:latin typeface="Times, serif"/>
+                <a:hlinkClick r:id="rId6"/>
+              </a:rPr>
+              <a:t>https://nodejs.org/en/docs/</a:t>
+            </a:r>
+            <a:endParaRPr lang="pt-BR" sz="900" dirty="0">
+              <a:solidFill>
+                <a:srgbClr val="000000"/>
+              </a:solidFill>
+              <a:effectLst/>
+            </a:endParaRPr>
+          </a:p>
+          <a:p>
+            <a:pPr rtl="0"/>
+            <a:r>
+              <a:rPr lang="pt-BR" sz="900" b="0" i="0" dirty="0">
+                <a:solidFill>
+                  <a:srgbClr val="000000"/>
+                </a:solidFill>
+                <a:effectLst/>
+                <a:latin typeface="Times, serif"/>
+              </a:rPr>
+              <a:t>SOUZA, Thiago Oliveira de. Comunicação real-time com Node. </a:t>
+            </a:r>
+            <a:r>
+              <a:rPr lang="pt-BR" sz="900" b="0" i="0" dirty="0" err="1">
+                <a:solidFill>
+                  <a:srgbClr val="000000"/>
+                </a:solidFill>
+                <a:effectLst/>
+                <a:latin typeface="Times, serif"/>
+              </a:rPr>
+              <a:t>js</a:t>
+            </a:r>
+            <a:r>
+              <a:rPr lang="pt-BR" sz="900" b="0" i="0" dirty="0">
+                <a:solidFill>
+                  <a:srgbClr val="000000"/>
+                </a:solidFill>
+                <a:effectLst/>
+                <a:latin typeface="Times, serif"/>
+              </a:rPr>
+              <a:t> e </a:t>
+            </a:r>
+            <a:r>
+              <a:rPr lang="pt-BR" sz="900" b="0" i="0" dirty="0" err="1">
+                <a:solidFill>
+                  <a:srgbClr val="000000"/>
+                </a:solidFill>
+                <a:effectLst/>
+                <a:latin typeface="Times, serif"/>
+              </a:rPr>
+              <a:t>WebSockets</a:t>
+            </a:r>
+            <a:r>
+              <a:rPr lang="pt-BR" sz="900" b="0" i="0" dirty="0">
+                <a:solidFill>
+                  <a:srgbClr val="000000"/>
+                </a:solidFill>
+                <a:effectLst/>
+                <a:latin typeface="Times, serif"/>
+              </a:rPr>
+              <a:t>. Universidade Federal Fluminense, RJ, Publicação eletrônica em </a:t>
+            </a:r>
+            <a:r>
+              <a:rPr lang="pt-BR" sz="900" u="sng" dirty="0">
+                <a:solidFill>
+                  <a:srgbClr val="000000"/>
+                </a:solidFill>
+                <a:effectLst/>
+                <a:hlinkClick r:id="rId7"/>
+              </a:rPr>
+              <a:t>https://app.uff.br/riuff/handle/1/5267</a:t>
+            </a:r>
+            <a:r>
+              <a:rPr lang="pt-BR" sz="900" b="0" i="0" u="sng" dirty="0">
+                <a:solidFill>
+                  <a:srgbClr val="000000"/>
+                </a:solidFill>
+                <a:effectLst/>
+                <a:latin typeface="Times, serif"/>
+              </a:rPr>
+              <a:t>,</a:t>
+            </a:r>
+            <a:r>
+              <a:rPr lang="pt-BR" sz="900" b="0" i="0" dirty="0">
+                <a:solidFill>
+                  <a:srgbClr val="000000"/>
+                </a:solidFill>
+                <a:effectLst/>
+                <a:latin typeface="Times, serif"/>
+              </a:rPr>
+              <a:t> 2016.</a:t>
+            </a:r>
+            <a:endParaRPr lang="pt-BR" sz="900" dirty="0">
+              <a:solidFill>
+                <a:srgbClr val="000000"/>
+              </a:solidFill>
+              <a:effectLst/>
+            </a:endParaRPr>
+          </a:p>
+          <a:p>
+            <a:pPr rtl="0"/>
+            <a:r>
+              <a:rPr lang="pt-BR" sz="900" b="0" i="0" dirty="0">
+                <a:solidFill>
+                  <a:srgbClr val="000000"/>
+                </a:solidFill>
+                <a:effectLst/>
+                <a:latin typeface="Times, serif"/>
+              </a:rPr>
+              <a:t>ECMA-404 - The JSON Data </a:t>
+            </a:r>
+            <a:r>
+              <a:rPr lang="pt-BR" sz="900" b="0" i="0" dirty="0" err="1">
+                <a:solidFill>
+                  <a:srgbClr val="000000"/>
+                </a:solidFill>
+                <a:effectLst/>
+                <a:latin typeface="Times, serif"/>
+              </a:rPr>
+              <a:t>Interchange</a:t>
+            </a:r>
+            <a:r>
+              <a:rPr lang="pt-BR" sz="900" b="0" i="0" dirty="0">
+                <a:solidFill>
+                  <a:srgbClr val="000000"/>
+                </a:solidFill>
+                <a:effectLst/>
+                <a:latin typeface="Times, serif"/>
+              </a:rPr>
+              <a:t> </a:t>
+            </a:r>
+            <a:r>
+              <a:rPr lang="pt-BR" sz="900" b="0" i="0" dirty="0" err="1">
+                <a:solidFill>
+                  <a:srgbClr val="000000"/>
+                </a:solidFill>
+                <a:effectLst/>
+                <a:latin typeface="Times, serif"/>
+              </a:rPr>
+              <a:t>Syntax</a:t>
+            </a:r>
+            <a:r>
+              <a:rPr lang="pt-BR" sz="900" b="0" i="0" dirty="0">
+                <a:solidFill>
+                  <a:srgbClr val="000000"/>
+                </a:solidFill>
+                <a:effectLst/>
+                <a:latin typeface="Times, serif"/>
+              </a:rPr>
+              <a:t> </a:t>
+            </a:r>
+            <a:r>
+              <a:rPr lang="pt-BR" sz="900" u="sng" dirty="0">
+                <a:solidFill>
+                  <a:srgbClr val="000000"/>
+                </a:solidFill>
+                <a:effectLst/>
+                <a:hlinkClick r:id="rId8"/>
+              </a:rPr>
+              <a:t>http://www.ecma-international.org/publications/files/ECMA-ST/ECMA-404.pdf</a:t>
+            </a:r>
+            <a:r>
+              <a:rPr lang="pt-BR" sz="900" b="0" i="0" dirty="0">
+                <a:solidFill>
+                  <a:srgbClr val="000000"/>
+                </a:solidFill>
+                <a:effectLst/>
+                <a:latin typeface="Times, serif"/>
+              </a:rPr>
+              <a:t>. 2017.</a:t>
+            </a:r>
+            <a:endParaRPr lang="pt-BR" sz="900" dirty="0">
+              <a:solidFill>
+                <a:srgbClr val="000000"/>
+              </a:solidFill>
+              <a:effectLst/>
+            </a:endParaRPr>
+          </a:p>
+          <a:p>
+            <a:pPr rtl="0"/>
+            <a:r>
+              <a:rPr lang="pt-BR" sz="900" b="0" i="0" dirty="0">
+                <a:solidFill>
+                  <a:srgbClr val="000000"/>
+                </a:solidFill>
+                <a:effectLst/>
+                <a:latin typeface="Times, serif"/>
+              </a:rPr>
+              <a:t>NURSEITOV, </a:t>
+            </a:r>
+            <a:r>
+              <a:rPr lang="pt-BR" sz="900" b="0" i="0" dirty="0" err="1">
+                <a:solidFill>
+                  <a:srgbClr val="000000"/>
+                </a:solidFill>
+                <a:effectLst/>
+                <a:latin typeface="Times, serif"/>
+              </a:rPr>
+              <a:t>Nurzhan</a:t>
+            </a:r>
+            <a:r>
+              <a:rPr lang="pt-BR" sz="900" b="0" i="0" dirty="0">
+                <a:solidFill>
+                  <a:srgbClr val="000000"/>
+                </a:solidFill>
+                <a:effectLst/>
+                <a:latin typeface="Times, serif"/>
+              </a:rPr>
+              <a:t> et al. </a:t>
+            </a:r>
+            <a:r>
+              <a:rPr lang="pt-BR" sz="900" b="0" i="0" dirty="0" err="1">
+                <a:solidFill>
+                  <a:srgbClr val="000000"/>
+                </a:solidFill>
+                <a:effectLst/>
+                <a:latin typeface="Times, serif"/>
+              </a:rPr>
+              <a:t>Comparison</a:t>
+            </a:r>
+            <a:r>
+              <a:rPr lang="pt-BR" sz="900" b="0" i="0" dirty="0">
+                <a:solidFill>
+                  <a:srgbClr val="000000"/>
+                </a:solidFill>
+                <a:effectLst/>
+                <a:latin typeface="Times, serif"/>
+              </a:rPr>
+              <a:t> </a:t>
+            </a:r>
+            <a:r>
+              <a:rPr lang="pt-BR" sz="900" b="0" i="0" dirty="0" err="1">
+                <a:solidFill>
+                  <a:srgbClr val="000000"/>
+                </a:solidFill>
+                <a:effectLst/>
+                <a:latin typeface="Times, serif"/>
+              </a:rPr>
+              <a:t>of</a:t>
+            </a:r>
+            <a:r>
+              <a:rPr lang="pt-BR" sz="900" b="0" i="0" dirty="0">
+                <a:solidFill>
+                  <a:srgbClr val="000000"/>
+                </a:solidFill>
+                <a:effectLst/>
+                <a:latin typeface="Times, serif"/>
+              </a:rPr>
+              <a:t> JSON </a:t>
+            </a:r>
+            <a:r>
+              <a:rPr lang="pt-BR" sz="900" b="0" i="0" dirty="0" err="1">
+                <a:solidFill>
+                  <a:srgbClr val="000000"/>
+                </a:solidFill>
+                <a:effectLst/>
+                <a:latin typeface="Times, serif"/>
+              </a:rPr>
+              <a:t>and</a:t>
+            </a:r>
+            <a:r>
+              <a:rPr lang="pt-BR" sz="900" b="0" i="0" dirty="0">
+                <a:solidFill>
+                  <a:srgbClr val="000000"/>
+                </a:solidFill>
+                <a:effectLst/>
+                <a:latin typeface="Times, serif"/>
+              </a:rPr>
+              <a:t> XML data </a:t>
+            </a:r>
+            <a:r>
+              <a:rPr lang="pt-BR" sz="900" b="0" i="0" dirty="0" err="1">
+                <a:solidFill>
+                  <a:srgbClr val="000000"/>
+                </a:solidFill>
+                <a:effectLst/>
+                <a:latin typeface="Times, serif"/>
+              </a:rPr>
+              <a:t>interchange</a:t>
+            </a:r>
+            <a:r>
+              <a:rPr lang="pt-BR" sz="900" b="0" i="0" dirty="0">
+                <a:solidFill>
+                  <a:srgbClr val="000000"/>
+                </a:solidFill>
+                <a:effectLst/>
+                <a:latin typeface="Times, serif"/>
+              </a:rPr>
+              <a:t> </a:t>
+            </a:r>
+            <a:r>
+              <a:rPr lang="pt-BR" sz="900" b="0" i="0" dirty="0" err="1">
+                <a:solidFill>
+                  <a:srgbClr val="000000"/>
+                </a:solidFill>
+                <a:effectLst/>
+                <a:latin typeface="Times, serif"/>
+              </a:rPr>
+              <a:t>formats</a:t>
+            </a:r>
+            <a:r>
+              <a:rPr lang="pt-BR" sz="900" b="0" i="0" dirty="0">
+                <a:solidFill>
+                  <a:srgbClr val="000000"/>
+                </a:solidFill>
+                <a:effectLst/>
+                <a:latin typeface="Times, serif"/>
+              </a:rPr>
+              <a:t>: a case </a:t>
+            </a:r>
+            <a:r>
+              <a:rPr lang="pt-BR" sz="900" b="0" i="0" dirty="0" err="1">
+                <a:solidFill>
+                  <a:srgbClr val="000000"/>
+                </a:solidFill>
+                <a:effectLst/>
+                <a:latin typeface="Times, serif"/>
+              </a:rPr>
+              <a:t>study</a:t>
+            </a:r>
+            <a:r>
+              <a:rPr lang="pt-BR" sz="900" b="0" i="0" dirty="0">
+                <a:solidFill>
+                  <a:srgbClr val="000000"/>
+                </a:solidFill>
+                <a:effectLst/>
+                <a:latin typeface="Times, serif"/>
+              </a:rPr>
+              <a:t>. Caine, v. 9, p. 157-162, Publicação eletrônica em </a:t>
+            </a:r>
+            <a:r>
+              <a:rPr lang="pt-BR" sz="900" u="sng" dirty="0">
+                <a:solidFill>
+                  <a:srgbClr val="000000"/>
+                </a:solidFill>
+                <a:effectLst/>
+                <a:hlinkClick r:id="rId9"/>
+              </a:rPr>
+              <a:t>https://pdfs.semanticscholar.org/8432/1e662b24363e032d680901627aa1bfd6088f.pdf</a:t>
+            </a:r>
+            <a:r>
+              <a:rPr lang="pt-BR" sz="900" b="0" i="0" dirty="0">
+                <a:solidFill>
+                  <a:srgbClr val="000000"/>
+                </a:solidFill>
+                <a:effectLst/>
+                <a:latin typeface="Times, serif"/>
+              </a:rPr>
+              <a:t>, 2009.</a:t>
+            </a:r>
+            <a:endParaRPr lang="pt-BR" sz="900" dirty="0">
+              <a:solidFill>
+                <a:srgbClr val="000000"/>
+              </a:solidFill>
+              <a:effectLst/>
+            </a:endParaRPr>
+          </a:p>
+          <a:p>
+            <a:pPr rtl="0"/>
+            <a:r>
+              <a:rPr lang="pt-BR" sz="900" b="0" i="0" dirty="0">
+                <a:solidFill>
+                  <a:srgbClr val="000000"/>
+                </a:solidFill>
+                <a:effectLst/>
+                <a:latin typeface="Times, serif"/>
+              </a:rPr>
+              <a:t>LEI, Kai &amp; </a:t>
+            </a:r>
+            <a:r>
+              <a:rPr lang="pt-BR" sz="900" b="0" i="0" dirty="0" err="1">
+                <a:solidFill>
+                  <a:srgbClr val="000000"/>
+                </a:solidFill>
+                <a:effectLst/>
+                <a:latin typeface="Times, serif"/>
+              </a:rPr>
+              <a:t>Ma</a:t>
+            </a:r>
+            <a:r>
+              <a:rPr lang="pt-BR" sz="900" b="0" i="0" dirty="0">
+                <a:solidFill>
+                  <a:srgbClr val="000000"/>
+                </a:solidFill>
+                <a:effectLst/>
+                <a:latin typeface="Times, serif"/>
+              </a:rPr>
+              <a:t>, </a:t>
+            </a:r>
+            <a:r>
+              <a:rPr lang="pt-BR" sz="900" b="0" i="0" dirty="0" err="1">
+                <a:solidFill>
+                  <a:srgbClr val="000000"/>
+                </a:solidFill>
+                <a:effectLst/>
+                <a:latin typeface="Times, serif"/>
+              </a:rPr>
+              <a:t>Yining</a:t>
+            </a:r>
+            <a:r>
+              <a:rPr lang="pt-BR" sz="900" b="0" i="0" dirty="0">
+                <a:solidFill>
+                  <a:srgbClr val="000000"/>
+                </a:solidFill>
+                <a:effectLst/>
+                <a:latin typeface="Times, serif"/>
+              </a:rPr>
+              <a:t> &amp; </a:t>
+            </a:r>
+            <a:r>
+              <a:rPr lang="pt-BR" sz="900" b="0" i="0" dirty="0" err="1">
+                <a:solidFill>
+                  <a:srgbClr val="000000"/>
+                </a:solidFill>
+                <a:effectLst/>
+                <a:latin typeface="Times, serif"/>
+              </a:rPr>
+              <a:t>Tan</a:t>
+            </a:r>
+            <a:r>
+              <a:rPr lang="pt-BR" sz="900" b="0" i="0" dirty="0">
+                <a:solidFill>
+                  <a:srgbClr val="000000"/>
+                </a:solidFill>
+                <a:effectLst/>
+                <a:latin typeface="Times, serif"/>
+              </a:rPr>
+              <a:t>, </a:t>
+            </a:r>
+            <a:r>
+              <a:rPr lang="pt-BR" sz="900" b="0" i="0" dirty="0" err="1">
+                <a:solidFill>
+                  <a:srgbClr val="000000"/>
+                </a:solidFill>
+                <a:effectLst/>
+                <a:latin typeface="Times, serif"/>
+              </a:rPr>
+              <a:t>Zhi</a:t>
+            </a:r>
+            <a:r>
+              <a:rPr lang="pt-BR" sz="900" b="0" i="0" dirty="0">
+                <a:solidFill>
+                  <a:srgbClr val="000000"/>
+                </a:solidFill>
+                <a:effectLst/>
+                <a:latin typeface="Times, serif"/>
+              </a:rPr>
+              <a:t>. . Performance </a:t>
+            </a:r>
+            <a:r>
+              <a:rPr lang="pt-BR" sz="900" b="0" i="0" dirty="0" err="1">
+                <a:solidFill>
+                  <a:srgbClr val="000000"/>
+                </a:solidFill>
+                <a:effectLst/>
+                <a:latin typeface="Times, serif"/>
+              </a:rPr>
+              <a:t>Comparison</a:t>
+            </a:r>
+            <a:r>
+              <a:rPr lang="pt-BR" sz="900" b="0" i="0" dirty="0">
+                <a:solidFill>
+                  <a:srgbClr val="000000"/>
+                </a:solidFill>
+                <a:effectLst/>
+                <a:latin typeface="Times, serif"/>
+              </a:rPr>
+              <a:t> </a:t>
+            </a:r>
+            <a:r>
+              <a:rPr lang="pt-BR" sz="900" b="0" i="0" dirty="0" err="1">
+                <a:solidFill>
+                  <a:srgbClr val="000000"/>
+                </a:solidFill>
+                <a:effectLst/>
+                <a:latin typeface="Times, serif"/>
+              </a:rPr>
+              <a:t>and</a:t>
+            </a:r>
+            <a:r>
+              <a:rPr lang="pt-BR" sz="900" b="0" i="0" dirty="0">
+                <a:solidFill>
+                  <a:srgbClr val="000000"/>
+                </a:solidFill>
+                <a:effectLst/>
+                <a:latin typeface="Times, serif"/>
+              </a:rPr>
+              <a:t> </a:t>
+            </a:r>
+            <a:r>
+              <a:rPr lang="pt-BR" sz="900" b="0" i="0" dirty="0" err="1">
+                <a:solidFill>
+                  <a:srgbClr val="000000"/>
+                </a:solidFill>
+                <a:effectLst/>
+                <a:latin typeface="Times, serif"/>
+              </a:rPr>
+              <a:t>Evaluation</a:t>
+            </a:r>
+            <a:r>
+              <a:rPr lang="pt-BR" sz="900" b="0" i="0" dirty="0">
+                <a:solidFill>
+                  <a:srgbClr val="000000"/>
+                </a:solidFill>
+                <a:effectLst/>
+                <a:latin typeface="Times, serif"/>
+              </a:rPr>
+              <a:t> </a:t>
+            </a:r>
+            <a:r>
+              <a:rPr lang="pt-BR" sz="900" b="0" i="0" dirty="0" err="1">
+                <a:solidFill>
+                  <a:srgbClr val="000000"/>
+                </a:solidFill>
+                <a:effectLst/>
+                <a:latin typeface="Times, serif"/>
+              </a:rPr>
+              <a:t>of</a:t>
+            </a:r>
+            <a:r>
+              <a:rPr lang="pt-BR" sz="900" b="0" i="0" dirty="0">
+                <a:solidFill>
+                  <a:srgbClr val="000000"/>
+                </a:solidFill>
+                <a:effectLst/>
+                <a:latin typeface="Times, serif"/>
+              </a:rPr>
+              <a:t> Web </a:t>
+            </a:r>
+            <a:r>
+              <a:rPr lang="pt-BR" sz="900" b="0" i="0" dirty="0" err="1">
+                <a:solidFill>
+                  <a:srgbClr val="000000"/>
+                </a:solidFill>
+                <a:effectLst/>
+                <a:latin typeface="Times, serif"/>
+              </a:rPr>
+              <a:t>Development</a:t>
+            </a:r>
+            <a:r>
+              <a:rPr lang="pt-BR" sz="900" b="0" i="0" dirty="0">
+                <a:solidFill>
+                  <a:srgbClr val="000000"/>
+                </a:solidFill>
+                <a:effectLst/>
+                <a:latin typeface="Times, serif"/>
+              </a:rPr>
+              <a:t> Technologies in PHP, Python, </a:t>
+            </a:r>
+            <a:r>
+              <a:rPr lang="pt-BR" sz="900" b="0" i="0" dirty="0" err="1">
+                <a:solidFill>
+                  <a:srgbClr val="000000"/>
+                </a:solidFill>
+                <a:effectLst/>
+                <a:latin typeface="Times, serif"/>
+              </a:rPr>
+              <a:t>and</a:t>
+            </a:r>
+            <a:r>
+              <a:rPr lang="pt-BR" sz="900" b="0" i="0" dirty="0">
+                <a:solidFill>
+                  <a:srgbClr val="000000"/>
+                </a:solidFill>
+                <a:effectLst/>
+                <a:latin typeface="Times, serif"/>
+              </a:rPr>
+              <a:t> Node.js. 661-668. 10.1109/CSE.2014.142. Publicação disponível em </a:t>
+            </a:r>
+            <a:r>
+              <a:rPr lang="pt-BR" sz="900" u="sng" dirty="0">
+                <a:solidFill>
+                  <a:srgbClr val="000000"/>
+                </a:solidFill>
+                <a:effectLst/>
+                <a:hlinkClick r:id="rId10"/>
+              </a:rPr>
+              <a:t>https://www.researchgate.net/publication/286594024_Performance_Comparison_and_Evaluation_of_Web_Development_Technologies_in_PHP_Python_and_Nodejs</a:t>
+            </a:r>
+            <a:r>
+              <a:rPr lang="pt-BR" sz="900" b="0" i="0" dirty="0">
+                <a:solidFill>
+                  <a:srgbClr val="000000"/>
+                </a:solidFill>
+                <a:effectLst/>
+                <a:latin typeface="Times, serif"/>
+              </a:rPr>
+              <a:t>. 2014.</a:t>
+            </a:r>
+            <a:endParaRPr lang="pt-BR" sz="900" dirty="0">
+              <a:solidFill>
+                <a:srgbClr val="000000"/>
+              </a:solidFill>
+              <a:effectLst/>
+            </a:endParaRPr>
+          </a:p>
+          <a:p>
+            <a:pPr rtl="0"/>
+            <a:r>
+              <a:rPr lang="pt-BR" sz="900" b="0" i="0" dirty="0">
+                <a:solidFill>
+                  <a:srgbClr val="000000"/>
+                </a:solidFill>
+                <a:effectLst/>
+                <a:latin typeface="Times, serif"/>
+              </a:rPr>
+              <a:t>SAYÃO, Luís Fernando; MARCONDES, Carlos Henrique. O desafio da interoperabilidade e as novas perspectivas para as bibliotecas digitais. </a:t>
+            </a:r>
+            <a:r>
+              <a:rPr lang="pt-BR" sz="900" b="0" i="0" dirty="0" err="1">
+                <a:solidFill>
+                  <a:srgbClr val="000000"/>
+                </a:solidFill>
+                <a:effectLst/>
+                <a:latin typeface="Times, serif"/>
+              </a:rPr>
+              <a:t>Transinformação</a:t>
+            </a:r>
+            <a:r>
+              <a:rPr lang="pt-BR" sz="900" b="0" i="0" dirty="0">
+                <a:solidFill>
+                  <a:srgbClr val="000000"/>
+                </a:solidFill>
+                <a:effectLst/>
+                <a:latin typeface="Times, serif"/>
+              </a:rPr>
+              <a:t>, v. 20, n. 2, p. 133-148, Publicação Eletrônica em </a:t>
+            </a:r>
+            <a:r>
+              <a:rPr lang="pt-BR" sz="900" u="sng" dirty="0">
+                <a:solidFill>
+                  <a:srgbClr val="000000"/>
+                </a:solidFill>
+                <a:effectLst/>
+                <a:hlinkClick r:id="rId11"/>
+              </a:rPr>
+              <a:t>https://www.redalyc.org/pdf/3843/384334798002.pdf</a:t>
+            </a:r>
+            <a:r>
+              <a:rPr lang="pt-BR" sz="900" b="0" i="0" dirty="0">
+                <a:solidFill>
+                  <a:srgbClr val="000000"/>
+                </a:solidFill>
+                <a:effectLst/>
+                <a:latin typeface="Times, serif"/>
+              </a:rPr>
+              <a:t>, 2008.</a:t>
+            </a:r>
+            <a:endParaRPr lang="pt-BR" sz="900" dirty="0">
+              <a:solidFill>
+                <a:srgbClr val="000000"/>
+              </a:solidFill>
+              <a:effectLst/>
+            </a:endParaRPr>
+          </a:p>
+          <a:p>
+            <a:pPr rtl="0"/>
+            <a:r>
+              <a:rPr lang="pt-BR" sz="900" b="0" i="0" dirty="0">
+                <a:solidFill>
+                  <a:srgbClr val="000000"/>
+                </a:solidFill>
+                <a:effectLst/>
+                <a:latin typeface="Times, serif"/>
+              </a:rPr>
+              <a:t>ABILIO, Ramon et al. A Case </a:t>
+            </a:r>
+            <a:r>
+              <a:rPr lang="pt-BR" sz="900" b="0" i="0" dirty="0" err="1">
+                <a:solidFill>
+                  <a:srgbClr val="000000"/>
+                </a:solidFill>
+                <a:effectLst/>
+                <a:latin typeface="Times, serif"/>
+              </a:rPr>
+              <a:t>study</a:t>
+            </a:r>
+            <a:r>
+              <a:rPr lang="pt-BR" sz="900" b="0" i="0" dirty="0">
+                <a:solidFill>
+                  <a:srgbClr val="000000"/>
+                </a:solidFill>
+                <a:effectLst/>
+                <a:latin typeface="Times, serif"/>
+              </a:rPr>
+              <a:t> </a:t>
+            </a:r>
+            <a:r>
+              <a:rPr lang="pt-BR" sz="900" b="0" i="0" dirty="0" err="1">
+                <a:solidFill>
+                  <a:srgbClr val="000000"/>
+                </a:solidFill>
+                <a:effectLst/>
+                <a:latin typeface="Times, serif"/>
+              </a:rPr>
+              <a:t>on</a:t>
+            </a:r>
+            <a:r>
+              <a:rPr lang="pt-BR" sz="900" b="0" i="0" dirty="0">
+                <a:solidFill>
+                  <a:srgbClr val="000000"/>
+                </a:solidFill>
+                <a:effectLst/>
+                <a:latin typeface="Times, serif"/>
+              </a:rPr>
+              <a:t> a </a:t>
+            </a:r>
+            <a:r>
+              <a:rPr lang="pt-BR" sz="900" b="0" i="0" dirty="0" err="1">
+                <a:solidFill>
+                  <a:srgbClr val="000000"/>
+                </a:solidFill>
+                <a:effectLst/>
+                <a:latin typeface="Times, serif"/>
+              </a:rPr>
+              <a:t>service-based</a:t>
+            </a:r>
+            <a:r>
+              <a:rPr lang="pt-BR" sz="900" b="0" i="0" dirty="0">
+                <a:solidFill>
+                  <a:srgbClr val="000000"/>
+                </a:solidFill>
+                <a:effectLst/>
+                <a:latin typeface="Times, serif"/>
+              </a:rPr>
+              <a:t> </a:t>
+            </a:r>
+            <a:r>
+              <a:rPr lang="pt-BR" sz="900" b="0" i="0" dirty="0" err="1">
+                <a:solidFill>
+                  <a:srgbClr val="000000"/>
+                </a:solidFill>
+                <a:effectLst/>
+                <a:latin typeface="Times, serif"/>
+              </a:rPr>
+              <a:t>information</a:t>
+            </a:r>
+            <a:r>
+              <a:rPr lang="pt-BR" sz="900" b="0" i="0" dirty="0">
+                <a:solidFill>
+                  <a:srgbClr val="000000"/>
+                </a:solidFill>
+                <a:effectLst/>
+                <a:latin typeface="Times, serif"/>
+              </a:rPr>
+              <a:t> systems </a:t>
+            </a:r>
+            <a:r>
+              <a:rPr lang="pt-BR" sz="900" b="0" i="0" dirty="0" err="1">
+                <a:solidFill>
+                  <a:srgbClr val="000000"/>
+                </a:solidFill>
+                <a:effectLst/>
+                <a:latin typeface="Times, serif"/>
+              </a:rPr>
+              <a:t>integration</a:t>
+            </a:r>
+            <a:r>
+              <a:rPr lang="pt-BR" sz="900" b="0" i="0" dirty="0">
+                <a:solidFill>
+                  <a:srgbClr val="000000"/>
+                </a:solidFill>
+                <a:effectLst/>
+                <a:latin typeface="Times, serif"/>
+              </a:rPr>
+              <a:t> in </a:t>
+            </a:r>
+            <a:r>
+              <a:rPr lang="pt-BR" sz="900" b="0" i="0" dirty="0" err="1">
+                <a:solidFill>
+                  <a:srgbClr val="000000"/>
+                </a:solidFill>
+                <a:effectLst/>
+                <a:latin typeface="Times, serif"/>
+              </a:rPr>
+              <a:t>academic</a:t>
+            </a:r>
+            <a:r>
+              <a:rPr lang="pt-BR" sz="900" b="0" i="0" dirty="0">
+                <a:solidFill>
+                  <a:srgbClr val="000000"/>
+                </a:solidFill>
+                <a:effectLst/>
+                <a:latin typeface="Times, serif"/>
+              </a:rPr>
+              <a:t> </a:t>
+            </a:r>
+            <a:r>
+              <a:rPr lang="pt-BR" sz="900" b="0" i="0" dirty="0" err="1">
+                <a:solidFill>
+                  <a:srgbClr val="000000"/>
+                </a:solidFill>
+                <a:effectLst/>
+                <a:latin typeface="Times, serif"/>
+              </a:rPr>
+              <a:t>environment</a:t>
+            </a:r>
+            <a:r>
+              <a:rPr lang="pt-BR" sz="900" b="0" i="0" dirty="0">
+                <a:solidFill>
+                  <a:srgbClr val="000000"/>
+                </a:solidFill>
+                <a:effectLst/>
+                <a:latin typeface="Times, serif"/>
+              </a:rPr>
+              <a:t>. Revista Brasileira de Computação Aplicada, v. 11, n. 1, p. 2-13, Publicação disponível em </a:t>
+            </a:r>
+            <a:r>
+              <a:rPr lang="pt-BR" sz="900" u="sng" dirty="0">
+                <a:solidFill>
+                  <a:srgbClr val="000000"/>
+                </a:solidFill>
+                <a:effectLst/>
+                <a:hlinkClick r:id="rId12"/>
+              </a:rPr>
+              <a:t>http://seer.upf.br/index.php/rbca/article/view/8051</a:t>
+            </a:r>
+            <a:r>
+              <a:rPr lang="pt-BR" sz="900" b="0" i="0" dirty="0">
+                <a:solidFill>
+                  <a:srgbClr val="000000"/>
+                </a:solidFill>
+                <a:effectLst/>
+                <a:latin typeface="Times, serif"/>
+              </a:rPr>
+              <a:t>. 2019.</a:t>
+            </a:r>
+            <a:endParaRPr lang="pt-BR" sz="900" dirty="0">
+              <a:solidFill>
+                <a:srgbClr val="000000"/>
+              </a:solidFill>
+              <a:effectLst/>
+            </a:endParaRPr>
+          </a:p>
+          <a:p>
+            <a:pPr rtl="0"/>
+            <a:r>
+              <a:rPr lang="pt-BR" sz="900" b="0" i="0" dirty="0">
+                <a:solidFill>
+                  <a:srgbClr val="000000"/>
+                </a:solidFill>
+                <a:effectLst/>
+                <a:latin typeface="Times, serif"/>
+              </a:rPr>
+              <a:t>SIQUEIRA, Otávio Manoel Pereira; DE OLIVEIRA, Robert Anderson Nogueira; DE OLIVEIRA, </a:t>
+            </a:r>
+            <a:r>
+              <a:rPr lang="pt-BR" sz="900" b="0" i="0" dirty="0" err="1">
+                <a:solidFill>
+                  <a:srgbClr val="000000"/>
+                </a:solidFill>
+                <a:effectLst/>
+                <a:latin typeface="Times, serif"/>
+              </a:rPr>
+              <a:t>Adicinéia</a:t>
+            </a:r>
+            <a:r>
+              <a:rPr lang="pt-BR" sz="900" b="0" i="0" dirty="0">
+                <a:solidFill>
+                  <a:srgbClr val="000000"/>
+                </a:solidFill>
+                <a:effectLst/>
+                <a:latin typeface="Times, serif"/>
+              </a:rPr>
+              <a:t> Aparecida. Integração de sistemas de informação em saúde com a utilização de Service </a:t>
+            </a:r>
+            <a:r>
+              <a:rPr lang="pt-BR" sz="900" b="0" i="0" dirty="0" err="1">
+                <a:solidFill>
+                  <a:srgbClr val="000000"/>
+                </a:solidFill>
+                <a:effectLst/>
+                <a:latin typeface="Times, serif"/>
+              </a:rPr>
+              <a:t>Oriented</a:t>
+            </a:r>
+            <a:r>
+              <a:rPr lang="pt-BR" sz="900" b="0" i="0" dirty="0">
+                <a:solidFill>
+                  <a:srgbClr val="000000"/>
+                </a:solidFill>
+                <a:effectLst/>
+                <a:latin typeface="Times, serif"/>
+              </a:rPr>
+              <a:t> </a:t>
+            </a:r>
+            <a:r>
+              <a:rPr lang="pt-BR" sz="900" b="0" i="0" dirty="0" err="1">
+                <a:solidFill>
+                  <a:srgbClr val="000000"/>
+                </a:solidFill>
+                <a:effectLst/>
+                <a:latin typeface="Times, serif"/>
+              </a:rPr>
+              <a:t>Architecture</a:t>
+            </a:r>
+            <a:r>
+              <a:rPr lang="pt-BR" sz="900" b="0" i="0" dirty="0">
+                <a:solidFill>
+                  <a:srgbClr val="000000"/>
+                </a:solidFill>
+                <a:effectLst/>
+                <a:latin typeface="Times, serif"/>
+              </a:rPr>
+              <a:t> (SOA). JISTEM: </a:t>
+            </a:r>
+            <a:r>
+              <a:rPr lang="pt-BR" sz="900" b="0" i="0" dirty="0" err="1">
+                <a:solidFill>
+                  <a:srgbClr val="000000"/>
+                </a:solidFill>
+                <a:effectLst/>
+                <a:latin typeface="Times, serif"/>
+              </a:rPr>
+              <a:t>Journal</a:t>
+            </a:r>
+            <a:r>
+              <a:rPr lang="pt-BR" sz="900" b="0" i="0" dirty="0">
+                <a:solidFill>
+                  <a:srgbClr val="000000"/>
+                </a:solidFill>
+                <a:effectLst/>
+                <a:latin typeface="Times, serif"/>
+              </a:rPr>
+              <a:t> </a:t>
+            </a:r>
+            <a:r>
+              <a:rPr lang="pt-BR" sz="900" b="0" i="0" dirty="0" err="1">
+                <a:solidFill>
+                  <a:srgbClr val="000000"/>
+                </a:solidFill>
+                <a:effectLst/>
+                <a:latin typeface="Times, serif"/>
+              </a:rPr>
+              <a:t>of</a:t>
+            </a:r>
+            <a:r>
+              <a:rPr lang="pt-BR" sz="900" b="0" i="0" dirty="0">
+                <a:solidFill>
+                  <a:srgbClr val="000000"/>
+                </a:solidFill>
+                <a:effectLst/>
+                <a:latin typeface="Times, serif"/>
+              </a:rPr>
+              <a:t> </a:t>
+            </a:r>
+            <a:r>
+              <a:rPr lang="pt-BR" sz="900" b="0" i="0" dirty="0" err="1">
+                <a:solidFill>
+                  <a:srgbClr val="000000"/>
+                </a:solidFill>
+                <a:effectLst/>
+                <a:latin typeface="Times, serif"/>
+              </a:rPr>
+              <a:t>Information</a:t>
+            </a:r>
+            <a:r>
+              <a:rPr lang="pt-BR" sz="900" b="0" i="0" dirty="0">
+                <a:solidFill>
+                  <a:srgbClr val="000000"/>
+                </a:solidFill>
+                <a:effectLst/>
+                <a:latin typeface="Times, serif"/>
+              </a:rPr>
+              <a:t> Systems </a:t>
+            </a:r>
+            <a:r>
+              <a:rPr lang="pt-BR" sz="900" b="0" i="0" dirty="0" err="1">
+                <a:solidFill>
+                  <a:srgbClr val="000000"/>
+                </a:solidFill>
+                <a:effectLst/>
+                <a:latin typeface="Times, serif"/>
+              </a:rPr>
+              <a:t>and</a:t>
+            </a:r>
+            <a:r>
+              <a:rPr lang="pt-BR" sz="900" b="0" i="0" dirty="0">
+                <a:solidFill>
+                  <a:srgbClr val="000000"/>
+                </a:solidFill>
+                <a:effectLst/>
+                <a:latin typeface="Times, serif"/>
+              </a:rPr>
+              <a:t> Technology Management, v. 13, n. 2, p. 255-274, Publicação disponível em </a:t>
+            </a:r>
+            <a:r>
+              <a:rPr lang="pt-BR" sz="900" u="sng" dirty="0">
+                <a:solidFill>
+                  <a:srgbClr val="000000"/>
+                </a:solidFill>
+                <a:effectLst/>
+                <a:hlinkClick r:id="rId13"/>
+              </a:rPr>
+              <a:t>https://www.redalyc.org/pdf/2032/203247790006.pdf</a:t>
+            </a:r>
+            <a:r>
+              <a:rPr lang="pt-BR" sz="900" b="0" i="0" dirty="0">
+                <a:solidFill>
+                  <a:srgbClr val="000000"/>
+                </a:solidFill>
+                <a:effectLst/>
+                <a:latin typeface="Times, serif"/>
+              </a:rPr>
+              <a:t> . 2016.</a:t>
+            </a:r>
+            <a:endParaRPr lang="pt-BR" sz="900" dirty="0">
+              <a:solidFill>
+                <a:srgbClr val="000000"/>
+              </a:solidFill>
+              <a:effectLst/>
+            </a:endParaRPr>
+          </a:p>
+          <a:p>
+            <a:pPr rtl="0"/>
+            <a:r>
+              <a:rPr lang="pt-BR" sz="900" b="0" i="0" dirty="0">
+                <a:solidFill>
+                  <a:srgbClr val="000000"/>
+                </a:solidFill>
+                <a:effectLst/>
+                <a:latin typeface="Times, serif"/>
+              </a:rPr>
+              <a:t>TEIXEIRA, Milene Santos et al. Sistema web para gerenciamento e acompanhamento de uso de medicação em ambientes de vivência assistida. In: Anais do XII Simpósio Brasileiro de Sistemas de Informação. SBC, p. 278-284. Publicação Disponível em </a:t>
+            </a:r>
+            <a:r>
+              <a:rPr lang="pt-BR" sz="900" u="sng" dirty="0">
+                <a:solidFill>
+                  <a:srgbClr val="000000"/>
+                </a:solidFill>
+                <a:effectLst/>
+                <a:hlinkClick r:id="rId14"/>
+              </a:rPr>
+              <a:t>https://sol.sbc.org.br/index.php/sbsi/article/view/5973</a:t>
+            </a:r>
+            <a:r>
+              <a:rPr lang="pt-BR" sz="900" b="0" i="0" dirty="0">
+                <a:solidFill>
+                  <a:srgbClr val="000000"/>
+                </a:solidFill>
+                <a:effectLst/>
+                <a:latin typeface="Times, serif"/>
+              </a:rPr>
+              <a:t>. 2016.</a:t>
+            </a:r>
+            <a:endParaRPr lang="pt-BR" sz="900" dirty="0">
+              <a:solidFill>
+                <a:srgbClr val="000000"/>
+              </a:solidFill>
+              <a:effectLst/>
+            </a:endParaRPr>
+          </a:p>
+          <a:p>
+            <a:pPr rtl="0"/>
+            <a:r>
+              <a:rPr lang="pt-BR" sz="900" b="0" i="0" dirty="0">
+                <a:solidFill>
+                  <a:srgbClr val="000000"/>
+                </a:solidFill>
+                <a:effectLst/>
+                <a:latin typeface="Times, serif"/>
+              </a:rPr>
+              <a:t>COMBE, Theo. Martin, Antony &amp; Pietro, Roberto. </a:t>
+            </a:r>
+            <a:r>
+              <a:rPr lang="pt-BR" sz="900" b="0" i="0" dirty="0" err="1">
+                <a:solidFill>
+                  <a:srgbClr val="000000"/>
+                </a:solidFill>
+                <a:effectLst/>
+                <a:latin typeface="Times, serif"/>
+              </a:rPr>
+              <a:t>To</a:t>
+            </a:r>
+            <a:r>
+              <a:rPr lang="pt-BR" sz="900" b="0" i="0" dirty="0">
+                <a:solidFill>
+                  <a:srgbClr val="000000"/>
+                </a:solidFill>
+                <a:effectLst/>
+                <a:latin typeface="Times, serif"/>
+              </a:rPr>
+              <a:t> </a:t>
+            </a:r>
+            <a:r>
+              <a:rPr lang="pt-BR" sz="900" b="0" i="0" dirty="0" err="1">
+                <a:solidFill>
+                  <a:srgbClr val="000000"/>
+                </a:solidFill>
+                <a:effectLst/>
+                <a:latin typeface="Times, serif"/>
+              </a:rPr>
+              <a:t>Docker</a:t>
+            </a:r>
+            <a:r>
+              <a:rPr lang="pt-BR" sz="900" b="0" i="0" dirty="0">
+                <a:solidFill>
+                  <a:srgbClr val="000000"/>
+                </a:solidFill>
+                <a:effectLst/>
+                <a:latin typeface="Times, serif"/>
+              </a:rPr>
+              <a:t> </a:t>
+            </a:r>
+            <a:r>
+              <a:rPr lang="pt-BR" sz="900" b="0" i="0" dirty="0" err="1">
+                <a:solidFill>
+                  <a:srgbClr val="000000"/>
+                </a:solidFill>
+                <a:effectLst/>
+                <a:latin typeface="Times, serif"/>
+              </a:rPr>
+              <a:t>or</a:t>
+            </a:r>
+            <a:r>
+              <a:rPr lang="pt-BR" sz="900" b="0" i="0" dirty="0">
+                <a:solidFill>
+                  <a:srgbClr val="000000"/>
+                </a:solidFill>
+                <a:effectLst/>
+                <a:latin typeface="Times, serif"/>
+              </a:rPr>
+              <a:t> </a:t>
+            </a:r>
+            <a:r>
+              <a:rPr lang="pt-BR" sz="900" b="0" i="0" dirty="0" err="1">
+                <a:solidFill>
+                  <a:srgbClr val="000000"/>
+                </a:solidFill>
+                <a:effectLst/>
+                <a:latin typeface="Times, serif"/>
+              </a:rPr>
+              <a:t>Not</a:t>
+            </a:r>
+            <a:r>
+              <a:rPr lang="pt-BR" sz="900" b="0" i="0" dirty="0">
+                <a:solidFill>
+                  <a:srgbClr val="000000"/>
+                </a:solidFill>
+                <a:effectLst/>
+                <a:latin typeface="Times, serif"/>
+              </a:rPr>
+              <a:t> </a:t>
+            </a:r>
+            <a:r>
+              <a:rPr lang="pt-BR" sz="900" b="0" i="0" dirty="0" err="1">
+                <a:solidFill>
+                  <a:srgbClr val="000000"/>
+                </a:solidFill>
+                <a:effectLst/>
+                <a:latin typeface="Times, serif"/>
+              </a:rPr>
+              <a:t>to</a:t>
+            </a:r>
+            <a:r>
+              <a:rPr lang="pt-BR" sz="900" b="0" i="0" dirty="0">
+                <a:solidFill>
+                  <a:srgbClr val="000000"/>
+                </a:solidFill>
+                <a:effectLst/>
+                <a:latin typeface="Times, serif"/>
+              </a:rPr>
+              <a:t> </a:t>
+            </a:r>
+            <a:r>
+              <a:rPr lang="pt-BR" sz="900" b="0" i="0" dirty="0" err="1">
+                <a:solidFill>
+                  <a:srgbClr val="000000"/>
+                </a:solidFill>
+                <a:effectLst/>
+                <a:latin typeface="Times, serif"/>
+              </a:rPr>
+              <a:t>Docker</a:t>
+            </a:r>
+            <a:r>
+              <a:rPr lang="pt-BR" sz="900" b="0" i="0" dirty="0">
+                <a:solidFill>
+                  <a:srgbClr val="000000"/>
+                </a:solidFill>
+                <a:effectLst/>
+                <a:latin typeface="Times, serif"/>
+              </a:rPr>
+              <a:t>: A Security Perspective. IEEE </a:t>
+            </a:r>
+            <a:r>
+              <a:rPr lang="pt-BR" sz="900" b="0" i="0" dirty="0" err="1">
+                <a:solidFill>
+                  <a:srgbClr val="000000"/>
+                </a:solidFill>
+                <a:effectLst/>
+                <a:latin typeface="Times, serif"/>
+              </a:rPr>
+              <a:t>Cloud</a:t>
+            </a:r>
+            <a:r>
+              <a:rPr lang="pt-BR" sz="900" b="0" i="0" dirty="0">
+                <a:solidFill>
+                  <a:srgbClr val="000000"/>
+                </a:solidFill>
+                <a:effectLst/>
+                <a:latin typeface="Times, serif"/>
+              </a:rPr>
+              <a:t> </a:t>
+            </a:r>
+            <a:r>
+              <a:rPr lang="pt-BR" sz="900" b="0" i="0" dirty="0" err="1">
+                <a:solidFill>
+                  <a:srgbClr val="000000"/>
+                </a:solidFill>
+                <a:effectLst/>
+                <a:latin typeface="Times, serif"/>
+              </a:rPr>
+              <a:t>Computing</a:t>
+            </a:r>
+            <a:r>
+              <a:rPr lang="pt-BR" sz="900" b="0" i="0" dirty="0">
+                <a:solidFill>
+                  <a:srgbClr val="000000"/>
+                </a:solidFill>
+                <a:effectLst/>
+                <a:latin typeface="Times, serif"/>
+              </a:rPr>
+              <a:t>. 3. 54-62pg. Publicação disponível em </a:t>
+            </a:r>
+            <a:r>
+              <a:rPr lang="pt-BR" sz="900" u="sng" dirty="0">
+                <a:solidFill>
+                  <a:srgbClr val="000000"/>
+                </a:solidFill>
+                <a:effectLst/>
+                <a:hlinkClick r:id="rId15"/>
+              </a:rPr>
+              <a:t>https://www.researchgate.net/publication/309965523_To_Docker_or_Not_to_Docker_A_Security_Perspective</a:t>
+            </a:r>
+            <a:r>
+              <a:rPr lang="pt-BR" sz="900" b="0" i="0" dirty="0">
+                <a:solidFill>
+                  <a:srgbClr val="000000"/>
+                </a:solidFill>
+                <a:effectLst/>
+                <a:latin typeface="Times, serif"/>
+              </a:rPr>
+              <a:t>. 2016.</a:t>
+            </a:r>
+            <a:endParaRPr lang="pt-BR" sz="900" dirty="0">
+              <a:solidFill>
+                <a:srgbClr val="000000"/>
+              </a:solidFill>
+              <a:effectLst/>
+            </a:endParaRPr>
+          </a:p>
+          <a:p>
+            <a:pPr rtl="0"/>
+            <a:r>
+              <a:rPr lang="pt-BR" sz="900" b="0" i="0" dirty="0">
+                <a:solidFill>
+                  <a:srgbClr val="000000"/>
+                </a:solidFill>
+                <a:effectLst/>
+                <a:latin typeface="Times, serif"/>
+              </a:rPr>
+              <a:t>NAIK, </a:t>
+            </a:r>
+            <a:r>
+              <a:rPr lang="pt-BR" sz="900" b="0" i="0" dirty="0" err="1">
+                <a:solidFill>
+                  <a:srgbClr val="000000"/>
+                </a:solidFill>
+                <a:effectLst/>
+                <a:latin typeface="Times, serif"/>
+              </a:rPr>
+              <a:t>Poornima</a:t>
+            </a:r>
+            <a:r>
+              <a:rPr lang="pt-BR" sz="900" b="0" i="0" dirty="0">
+                <a:solidFill>
+                  <a:srgbClr val="000000"/>
+                </a:solidFill>
+                <a:effectLst/>
+                <a:latin typeface="Times, serif"/>
+              </a:rPr>
+              <a:t> &amp; </a:t>
+            </a:r>
+            <a:r>
+              <a:rPr lang="pt-BR" sz="900" b="0" i="0" dirty="0" err="1">
+                <a:solidFill>
+                  <a:srgbClr val="000000"/>
+                </a:solidFill>
+                <a:effectLst/>
+                <a:latin typeface="Times, serif"/>
+              </a:rPr>
+              <a:t>Naik</a:t>
+            </a:r>
+            <a:r>
+              <a:rPr lang="pt-BR" sz="900" b="0" i="0" dirty="0">
+                <a:solidFill>
+                  <a:srgbClr val="000000"/>
+                </a:solidFill>
+                <a:effectLst/>
+                <a:latin typeface="Times, serif"/>
+              </a:rPr>
+              <a:t>, </a:t>
+            </a:r>
+            <a:r>
+              <a:rPr lang="pt-BR" sz="900" b="0" i="0" dirty="0" err="1">
+                <a:solidFill>
+                  <a:srgbClr val="000000"/>
+                </a:solidFill>
+                <a:effectLst/>
+                <a:latin typeface="Times, serif"/>
+              </a:rPr>
+              <a:t>Girish</a:t>
+            </a:r>
+            <a:r>
+              <a:rPr lang="pt-BR" sz="900" b="0" i="0" dirty="0">
+                <a:solidFill>
+                  <a:srgbClr val="000000"/>
+                </a:solidFill>
+                <a:effectLst/>
+                <a:latin typeface="Times, serif"/>
+              </a:rPr>
+              <a:t>. </a:t>
+            </a:r>
+            <a:r>
+              <a:rPr lang="pt-BR" sz="900" b="0" i="0" dirty="0" err="1">
+                <a:solidFill>
+                  <a:srgbClr val="000000"/>
+                </a:solidFill>
+                <a:effectLst/>
+                <a:latin typeface="Times, serif"/>
+              </a:rPr>
+              <a:t>Working</a:t>
+            </a:r>
+            <a:r>
+              <a:rPr lang="pt-BR" sz="900" b="0" i="0" dirty="0">
+                <a:solidFill>
+                  <a:srgbClr val="000000"/>
+                </a:solidFill>
+                <a:effectLst/>
+                <a:latin typeface="Times, serif"/>
+              </a:rPr>
+              <a:t> in </a:t>
+            </a:r>
+            <a:r>
+              <a:rPr lang="pt-BR" sz="900" b="0" i="0" dirty="0" err="1">
+                <a:solidFill>
+                  <a:srgbClr val="000000"/>
+                </a:solidFill>
+                <a:effectLst/>
+                <a:latin typeface="Times, serif"/>
+              </a:rPr>
+              <a:t>Collaboration</a:t>
+            </a:r>
+            <a:r>
+              <a:rPr lang="pt-BR" sz="900" b="0" i="0" dirty="0">
+                <a:solidFill>
+                  <a:srgbClr val="000000"/>
+                </a:solidFill>
+                <a:effectLst/>
+                <a:latin typeface="Times, serif"/>
+              </a:rPr>
+              <a:t> </a:t>
+            </a:r>
+            <a:r>
+              <a:rPr lang="pt-BR" sz="900" b="0" i="0" dirty="0" err="1">
+                <a:solidFill>
+                  <a:srgbClr val="000000"/>
+                </a:solidFill>
+                <a:effectLst/>
+                <a:latin typeface="Times, serif"/>
+              </a:rPr>
+              <a:t>with</a:t>
+            </a:r>
+            <a:r>
+              <a:rPr lang="pt-BR" sz="900" b="0" i="0" dirty="0">
+                <a:solidFill>
+                  <a:srgbClr val="000000"/>
+                </a:solidFill>
+                <a:effectLst/>
+                <a:latin typeface="Times, serif"/>
+              </a:rPr>
+              <a:t> </a:t>
+            </a:r>
+            <a:r>
+              <a:rPr lang="pt-BR" sz="900" b="0" i="0" dirty="0" err="1">
+                <a:solidFill>
+                  <a:srgbClr val="000000"/>
+                </a:solidFill>
+                <a:effectLst/>
+                <a:latin typeface="Times, serif"/>
+              </a:rPr>
+              <a:t>Git</a:t>
+            </a:r>
+            <a:r>
+              <a:rPr lang="pt-BR" sz="900" b="0" i="0" dirty="0">
+                <a:solidFill>
+                  <a:srgbClr val="000000"/>
+                </a:solidFill>
+                <a:effectLst/>
+                <a:latin typeface="Times, serif"/>
+              </a:rPr>
+              <a:t> - A </a:t>
+            </a:r>
+            <a:r>
+              <a:rPr lang="pt-BR" sz="900" b="0" i="0" dirty="0" err="1">
+                <a:solidFill>
+                  <a:srgbClr val="000000"/>
+                </a:solidFill>
+                <a:effectLst/>
+                <a:latin typeface="Times, serif"/>
+              </a:rPr>
+              <a:t>Practical</a:t>
+            </a:r>
+            <a:r>
+              <a:rPr lang="pt-BR" sz="900" b="0" i="0" dirty="0">
+                <a:solidFill>
+                  <a:srgbClr val="000000"/>
+                </a:solidFill>
+                <a:effectLst/>
+                <a:latin typeface="Times, serif"/>
+              </a:rPr>
+              <a:t> Approach. Publicação disponível em </a:t>
+            </a:r>
+            <a:r>
+              <a:rPr lang="pt-BR" sz="900" u="sng" dirty="0">
+                <a:solidFill>
+                  <a:srgbClr val="000000"/>
+                </a:solidFill>
+                <a:effectLst/>
+                <a:hlinkClick r:id="rId16"/>
+              </a:rPr>
+              <a:t>http://researchgate.net/publication/335034528_Working_in_Collaboration_with_Git_-_A_Practical_Approach</a:t>
+            </a:r>
+            <a:r>
+              <a:rPr lang="pt-BR" sz="900" b="0" i="0" dirty="0">
+                <a:solidFill>
+                  <a:srgbClr val="000000"/>
+                </a:solidFill>
+                <a:effectLst/>
+                <a:latin typeface="Times, serif"/>
+              </a:rPr>
+              <a:t>. 2019</a:t>
+            </a:r>
+            <a:endParaRPr lang="pt-BR" sz="900" dirty="0">
+              <a:solidFill>
+                <a:srgbClr val="000000"/>
+              </a:solidFill>
+              <a:effectLst/>
+            </a:endParaRPr>
+          </a:p>
+          <a:p>
+            <a:pPr rtl="0"/>
+            <a:r>
+              <a:rPr lang="pt-BR" sz="900" b="0" i="0" dirty="0">
+                <a:solidFill>
+                  <a:srgbClr val="000000"/>
+                </a:solidFill>
+                <a:effectLst/>
+                <a:latin typeface="Times, serif"/>
+              </a:rPr>
+              <a:t>TRUICA, </a:t>
+            </a:r>
+            <a:r>
+              <a:rPr lang="pt-BR" sz="900" b="0" i="0" dirty="0" err="1">
+                <a:solidFill>
+                  <a:srgbClr val="000000"/>
+                </a:solidFill>
+                <a:effectLst/>
+                <a:latin typeface="Times, serif"/>
+              </a:rPr>
+              <a:t>Ciprian-Octavian</a:t>
+            </a:r>
+            <a:r>
+              <a:rPr lang="pt-BR" sz="900" b="0" i="0" dirty="0">
+                <a:solidFill>
+                  <a:srgbClr val="000000"/>
+                </a:solidFill>
+                <a:effectLst/>
+                <a:latin typeface="Times, serif"/>
+              </a:rPr>
+              <a:t>; BOICEA, </a:t>
+            </a:r>
+            <a:r>
+              <a:rPr lang="pt-BR" sz="900" b="0" i="0" dirty="0" err="1">
+                <a:solidFill>
+                  <a:srgbClr val="000000"/>
+                </a:solidFill>
+                <a:effectLst/>
+                <a:latin typeface="Times, serif"/>
+              </a:rPr>
+              <a:t>Alexandru</a:t>
+            </a:r>
+            <a:r>
+              <a:rPr lang="pt-BR" sz="900" b="0" i="0" dirty="0">
+                <a:solidFill>
+                  <a:srgbClr val="000000"/>
+                </a:solidFill>
+                <a:effectLst/>
+                <a:latin typeface="Times, serif"/>
+              </a:rPr>
+              <a:t>; TRIFAN, </a:t>
+            </a:r>
+            <a:r>
+              <a:rPr lang="pt-BR" sz="900" b="0" i="0" dirty="0" err="1">
+                <a:solidFill>
+                  <a:srgbClr val="000000"/>
+                </a:solidFill>
+                <a:effectLst/>
+                <a:latin typeface="Times, serif"/>
+              </a:rPr>
+              <a:t>Ionut</a:t>
+            </a:r>
+            <a:r>
+              <a:rPr lang="pt-BR" sz="900" b="0" i="0" dirty="0">
+                <a:solidFill>
+                  <a:srgbClr val="000000"/>
+                </a:solidFill>
+                <a:effectLst/>
+                <a:latin typeface="Times, serif"/>
+              </a:rPr>
+              <a:t>. CRUD </a:t>
+            </a:r>
+            <a:r>
+              <a:rPr lang="pt-BR" sz="900" b="0" i="0" dirty="0" err="1">
+                <a:solidFill>
+                  <a:srgbClr val="000000"/>
+                </a:solidFill>
+                <a:effectLst/>
+                <a:latin typeface="Times, serif"/>
+              </a:rPr>
+              <a:t>operations</a:t>
+            </a:r>
+            <a:r>
+              <a:rPr lang="pt-BR" sz="900" b="0" i="0" dirty="0">
+                <a:solidFill>
+                  <a:srgbClr val="000000"/>
+                </a:solidFill>
+                <a:effectLst/>
+                <a:latin typeface="Times, serif"/>
+              </a:rPr>
+              <a:t> in </a:t>
+            </a:r>
+            <a:r>
+              <a:rPr lang="pt-BR" sz="900" b="0" i="0" dirty="0" err="1">
+                <a:solidFill>
+                  <a:srgbClr val="000000"/>
+                </a:solidFill>
+                <a:effectLst/>
+                <a:latin typeface="Times, serif"/>
+              </a:rPr>
+              <a:t>MongoDB</a:t>
+            </a:r>
+            <a:r>
+              <a:rPr lang="pt-BR" sz="900" b="0" i="0" dirty="0">
+                <a:solidFill>
+                  <a:srgbClr val="000000"/>
+                </a:solidFill>
+                <a:effectLst/>
+                <a:latin typeface="Times, serif"/>
+              </a:rPr>
+              <a:t>. In: 2013 </a:t>
+            </a:r>
+            <a:r>
+              <a:rPr lang="pt-BR" sz="900" b="0" i="0" dirty="0" err="1">
+                <a:solidFill>
+                  <a:srgbClr val="000000"/>
+                </a:solidFill>
+                <a:effectLst/>
+                <a:latin typeface="Times, serif"/>
+              </a:rPr>
+              <a:t>International</a:t>
+            </a:r>
+            <a:r>
+              <a:rPr lang="pt-BR" sz="900" b="0" i="0" dirty="0">
+                <a:solidFill>
+                  <a:srgbClr val="000000"/>
+                </a:solidFill>
+                <a:effectLst/>
+                <a:latin typeface="Times, serif"/>
+              </a:rPr>
+              <a:t> </a:t>
+            </a:r>
+            <a:r>
+              <a:rPr lang="pt-BR" sz="900" b="0" i="0" dirty="0" err="1">
+                <a:solidFill>
+                  <a:srgbClr val="000000"/>
+                </a:solidFill>
+                <a:effectLst/>
+                <a:latin typeface="Times, serif"/>
+              </a:rPr>
+              <a:t>Conference</a:t>
+            </a:r>
+            <a:r>
+              <a:rPr lang="pt-BR" sz="900" b="0" i="0" dirty="0">
+                <a:solidFill>
+                  <a:srgbClr val="000000"/>
+                </a:solidFill>
+                <a:effectLst/>
+                <a:latin typeface="Times, serif"/>
+              </a:rPr>
+              <a:t> </a:t>
+            </a:r>
+            <a:r>
+              <a:rPr lang="pt-BR" sz="900" b="0" i="0" dirty="0" err="1">
+                <a:solidFill>
+                  <a:srgbClr val="000000"/>
+                </a:solidFill>
+                <a:effectLst/>
+                <a:latin typeface="Times, serif"/>
+              </a:rPr>
+              <a:t>on</a:t>
+            </a:r>
+            <a:r>
+              <a:rPr lang="pt-BR" sz="900" b="0" i="0" dirty="0">
+                <a:solidFill>
+                  <a:srgbClr val="000000"/>
+                </a:solidFill>
+                <a:effectLst/>
+                <a:latin typeface="Times, serif"/>
+              </a:rPr>
+              <a:t> </a:t>
+            </a:r>
+            <a:r>
+              <a:rPr lang="pt-BR" sz="900" b="0" i="0" dirty="0" err="1">
+                <a:solidFill>
+                  <a:srgbClr val="000000"/>
+                </a:solidFill>
+                <a:effectLst/>
+                <a:latin typeface="Times, serif"/>
+              </a:rPr>
+              <a:t>Advanced</a:t>
+            </a:r>
+            <a:r>
+              <a:rPr lang="pt-BR" sz="900" b="0" i="0" dirty="0">
+                <a:solidFill>
+                  <a:srgbClr val="000000"/>
+                </a:solidFill>
+                <a:effectLst/>
+                <a:latin typeface="Times, serif"/>
+              </a:rPr>
+              <a:t> Computer Science </a:t>
+            </a:r>
+            <a:r>
+              <a:rPr lang="pt-BR" sz="900" b="0" i="0" dirty="0" err="1">
+                <a:solidFill>
+                  <a:srgbClr val="000000"/>
+                </a:solidFill>
+                <a:effectLst/>
+                <a:latin typeface="Times, serif"/>
+              </a:rPr>
+              <a:t>and</a:t>
+            </a:r>
+            <a:r>
+              <a:rPr lang="pt-BR" sz="900" b="0" i="0" dirty="0">
+                <a:solidFill>
+                  <a:srgbClr val="000000"/>
+                </a:solidFill>
+                <a:effectLst/>
+                <a:latin typeface="Times, serif"/>
+              </a:rPr>
+              <a:t> </a:t>
+            </a:r>
+            <a:r>
+              <a:rPr lang="pt-BR" sz="900" b="0" i="0" dirty="0" err="1">
+                <a:solidFill>
+                  <a:srgbClr val="000000"/>
+                </a:solidFill>
+                <a:effectLst/>
+                <a:latin typeface="Times, serif"/>
+              </a:rPr>
+              <a:t>Electronics</a:t>
+            </a:r>
+            <a:r>
+              <a:rPr lang="pt-BR" sz="900" b="0" i="0" dirty="0">
+                <a:solidFill>
+                  <a:srgbClr val="000000"/>
+                </a:solidFill>
+                <a:effectLst/>
+                <a:latin typeface="Times, serif"/>
+              </a:rPr>
+              <a:t> </a:t>
+            </a:r>
+            <a:r>
+              <a:rPr lang="pt-BR" sz="900" b="0" i="0" dirty="0" err="1">
+                <a:solidFill>
+                  <a:srgbClr val="000000"/>
+                </a:solidFill>
+                <a:effectLst/>
+                <a:latin typeface="Times, serif"/>
+              </a:rPr>
+              <a:t>Information</a:t>
+            </a:r>
+            <a:r>
+              <a:rPr lang="pt-BR" sz="900" b="0" i="0" dirty="0">
+                <a:solidFill>
+                  <a:srgbClr val="000000"/>
+                </a:solidFill>
+                <a:effectLst/>
+                <a:latin typeface="Times, serif"/>
+              </a:rPr>
+              <a:t> (ICACSEI 2013). Atlantis </a:t>
+            </a:r>
+            <a:r>
+              <a:rPr lang="pt-BR" sz="900" b="0" i="0" dirty="0" err="1">
+                <a:solidFill>
+                  <a:srgbClr val="000000"/>
+                </a:solidFill>
+                <a:effectLst/>
+                <a:latin typeface="Times, serif"/>
+              </a:rPr>
+              <a:t>Press,Publicação</a:t>
+            </a:r>
+            <a:r>
+              <a:rPr lang="pt-BR" sz="900" b="0" i="0" dirty="0">
+                <a:solidFill>
+                  <a:srgbClr val="000000"/>
+                </a:solidFill>
+                <a:effectLst/>
+                <a:latin typeface="Times, serif"/>
+              </a:rPr>
+              <a:t> disponível em </a:t>
+            </a:r>
+            <a:r>
+              <a:rPr lang="pt-BR" sz="900" b="0" i="0" u="sng" dirty="0">
+                <a:solidFill>
+                  <a:srgbClr val="000000"/>
+                </a:solidFill>
+                <a:effectLst/>
+                <a:latin typeface="Times, serif"/>
+                <a:hlinkClick r:id="rId17"/>
+              </a:rPr>
+              <a:t>https://www.atlantis-press.com/proceedings/icacsei-13/7568</a:t>
+            </a:r>
+            <a:r>
+              <a:rPr lang="pt-BR" sz="900" b="0" i="0" dirty="0">
+                <a:solidFill>
+                  <a:srgbClr val="000000"/>
+                </a:solidFill>
+                <a:effectLst/>
+                <a:latin typeface="Times, serif"/>
+              </a:rPr>
+              <a:t> , 2013.</a:t>
+            </a:r>
+            <a:endParaRPr lang="pt-BR" sz="900" dirty="0">
+              <a:solidFill>
+                <a:srgbClr val="000000"/>
+              </a:solidFill>
+              <a:effectLst/>
+            </a:endParaRPr>
+          </a:p>
+        </p:txBody>
+      </p:sp>
+      <p:sp>
+        <p:nvSpPr>
+          <p:cNvPr id="2" name="Título 1"/>
+          <p:cNvSpPr>
+            <a:spLocks noGrp="1"/>
+          </p:cNvSpPr>
+          <p:nvPr>
+            <p:ph type="title"/>
+          </p:nvPr>
+        </p:nvSpPr>
+        <p:spPr>
+          <a:xfrm>
+            <a:off x="609600" y="274638"/>
+            <a:ext cx="10972800" cy="1143000"/>
+          </a:xfrm>
+        </p:spPr>
+        <p:txBody>
+          <a:bodyPr/>
+          <a:lstStyle/>
+          <a:p>
+            <a:r>
+              <a:rPr lang="pt-BR" altLang="en-US"/>
+              <a:t>Referencias Bibliograficas</a:t>
+            </a:r>
+          </a:p>
+        </p:txBody>
+      </p:sp>
+    </p:spTree>
+    <p:extLst>
+      <p:ext uri="{BB962C8B-B14F-4D97-AF65-F5344CB8AC3E}">
+        <p14:creationId xmlns:p14="http://schemas.microsoft.com/office/powerpoint/2010/main" val="1840089324"/>
+      </p:ext>
+    </p:extLst>
+  </p:cSld>
+  <p:clrMapOvr>
+    <a:masterClrMapping/>
+  </p:clrMapOvr>
+</p:sld>
+</file>
+
+<file path=ppt/slides/slide13.xml><?xml version="1.0" encoding="utf-8"?>
+<p:sld xmlns:a="http://schemas.openxmlformats.org/drawingml/2006/main" xmlns:r="http://schemas.openxmlformats.org/officeDocument/2006/relationships" xmlns:p="http://schemas.openxmlformats.org/presentationml/2006/main">
+  <p:cSld>
+    <p:spTree>
+      <p:nvGrpSpPr>
+        <p:cNvPr id="1" name=""/>
+        <p:cNvGrpSpPr/>
+        <p:nvPr/>
+      </p:nvGrpSpPr>
+      <p:grpSpPr>
+        <a:xfrm>
+          <a:off x="0" y="0"/>
+          <a:ext cx="0" cy="0"/>
+          <a:chOff x="0" y="0"/>
+          <a:chExt cx="0" cy="0"/>
+        </a:xfrm>
+      </p:grpSpPr>
+      <p:sp>
+        <p:nvSpPr>
+          <p:cNvPr id="2" name="Title 1"/>
+          <p:cNvSpPr>
+            <a:spLocks noGrp="1"/>
+          </p:cNvSpPr>
+          <p:nvPr>
+            <p:ph type="ctrTitle"/>
+          </p:nvPr>
+        </p:nvSpPr>
+        <p:spPr/>
+        <p:txBody>
+          <a:bodyPr>
+            <a:normAutofit/>
+          </a:bodyPr>
+          <a:lstStyle/>
+          <a:p>
+            <a:r>
+              <a:rPr lang="pt-BR" dirty="0">
+                <a:effectLst/>
+              </a:rPr>
+              <a:t>SUÍTE DE INTEGRAÇÃO DE SISTEMAS WEB </a:t>
+            </a:r>
+            <a:endParaRPr lang="en-US" dirty="0"/>
+          </a:p>
+        </p:txBody>
+      </p:sp>
+      <p:sp>
+        <p:nvSpPr>
+          <p:cNvPr id="4" name="Subtitle 2"/>
+          <p:cNvSpPr>
+            <a:spLocks noGrp="1"/>
+          </p:cNvSpPr>
+          <p:nvPr/>
+        </p:nvSpPr>
+        <p:spPr>
+          <a:xfrm>
+            <a:off x="2153438" y="3915374"/>
+            <a:ext cx="9144000" cy="1133145"/>
+          </a:xfrm>
+          <a:prstGeom prst="rect">
+            <a:avLst/>
+          </a:prstGeom>
+        </p:spPr>
+        <p:txBody>
+          <a:bodyPr vert="horz" lIns="91440" tIns="45720" rIns="91440" bIns="45720" rtlCol="0">
+            <a:normAutofit fontScale="92500" lnSpcReduction="20000"/>
+          </a:bodyPr>
+          <a:lstStyle>
+            <a:lvl1pPr marL="0" indent="0" algn="ctr" defTabSz="914400" rtl="0" eaLnBrk="1" latinLnBrk="0" hangingPunct="1">
+              <a:lnSpc>
+                <a:spcPct val="90000"/>
+              </a:lnSpc>
+              <a:spcBef>
+                <a:spcPts val="1000"/>
+              </a:spcBef>
+              <a:buFont typeface="Arial" panose="020B0604020202020204" pitchFamily="34" charset="0"/>
+              <a:buNone/>
+              <a:defRPr sz="2400" kern="1200">
+                <a:solidFill>
+                  <a:schemeClr val="tx1"/>
+                </a:solidFill>
+                <a:latin typeface="+mn-lt"/>
+                <a:ea typeface="+mn-ea"/>
+                <a:cs typeface="+mn-cs"/>
+              </a:defRPr>
+            </a:lvl1pPr>
+            <a:lvl2pPr marL="457200" indent="0" algn="ctr" defTabSz="914400" rtl="0" eaLnBrk="1" latinLnBrk="0" hangingPunct="1">
+              <a:lnSpc>
+                <a:spcPct val="90000"/>
+              </a:lnSpc>
+              <a:spcBef>
+                <a:spcPts val="500"/>
+              </a:spcBef>
+              <a:buFont typeface="Arial" panose="020B0604020202020204" pitchFamily="34" charset="0"/>
+              <a:buNone/>
+              <a:defRPr sz="2000" kern="1200">
+                <a:solidFill>
+                  <a:schemeClr val="tx1"/>
+                </a:solidFill>
+                <a:latin typeface="+mn-lt"/>
+                <a:ea typeface="+mn-ea"/>
+                <a:cs typeface="+mn-cs"/>
+              </a:defRPr>
+            </a:lvl2pPr>
+            <a:lvl3pPr marL="914400" indent="0" algn="ctr" defTabSz="914400" rtl="0" eaLnBrk="1" latinLnBrk="0" hangingPunct="1">
+              <a:lnSpc>
+                <a:spcPct val="90000"/>
+              </a:lnSpc>
+              <a:spcBef>
+                <a:spcPts val="500"/>
+              </a:spcBef>
+              <a:buFont typeface="Arial" panose="020B0604020202020204" pitchFamily="34" charset="0"/>
+              <a:buNone/>
+              <a:defRPr sz="1800" kern="1200">
+                <a:solidFill>
+                  <a:schemeClr val="tx1"/>
+                </a:solidFill>
+                <a:latin typeface="+mn-lt"/>
+                <a:ea typeface="+mn-ea"/>
+                <a:cs typeface="+mn-cs"/>
+              </a:defRPr>
+            </a:lvl3pPr>
+            <a:lvl4pPr marL="1371600" indent="0" algn="ctr" defTabSz="914400" rtl="0" eaLnBrk="1" latinLnBrk="0" hangingPunct="1">
+              <a:lnSpc>
+                <a:spcPct val="90000"/>
+              </a:lnSpc>
+              <a:spcBef>
+                <a:spcPts val="500"/>
+              </a:spcBef>
+              <a:buFont typeface="Arial" panose="020B0604020202020204" pitchFamily="34" charset="0"/>
+              <a:buNone/>
+              <a:defRPr sz="1600" kern="1200">
+                <a:solidFill>
+                  <a:schemeClr val="tx1"/>
+                </a:solidFill>
+                <a:latin typeface="+mn-lt"/>
+                <a:ea typeface="+mn-ea"/>
+                <a:cs typeface="+mn-cs"/>
+              </a:defRPr>
+            </a:lvl4pPr>
+            <a:lvl5pPr marL="1828800" indent="0" algn="ctr" defTabSz="914400" rtl="0" eaLnBrk="1" latinLnBrk="0" hangingPunct="1">
+              <a:lnSpc>
+                <a:spcPct val="90000"/>
+              </a:lnSpc>
+              <a:spcBef>
+                <a:spcPts val="500"/>
+              </a:spcBef>
+              <a:buFont typeface="Arial" panose="020B0604020202020204" pitchFamily="34" charset="0"/>
+              <a:buNone/>
+              <a:defRPr sz="1600" kern="1200">
+                <a:solidFill>
+                  <a:schemeClr val="tx1"/>
+                </a:solidFill>
+                <a:latin typeface="+mn-lt"/>
+                <a:ea typeface="+mn-ea"/>
+                <a:cs typeface="+mn-cs"/>
+              </a:defRPr>
+            </a:lvl5pPr>
+            <a:lvl6pPr marL="2286000" indent="0" algn="ctr" defTabSz="914400" rtl="0" eaLnBrk="1" latinLnBrk="0" hangingPunct="1">
+              <a:lnSpc>
+                <a:spcPct val="90000"/>
+              </a:lnSpc>
+              <a:spcBef>
+                <a:spcPts val="500"/>
+              </a:spcBef>
+              <a:buFont typeface="Arial" panose="020B0604020202020204" pitchFamily="34" charset="0"/>
+              <a:buNone/>
+              <a:defRPr sz="1600" kern="1200">
+                <a:solidFill>
+                  <a:schemeClr val="tx1"/>
+                </a:solidFill>
+                <a:latin typeface="+mn-lt"/>
+                <a:ea typeface="+mn-ea"/>
+                <a:cs typeface="+mn-cs"/>
+              </a:defRPr>
+            </a:lvl6pPr>
+            <a:lvl7pPr marL="2743200" indent="0" algn="ctr" defTabSz="914400" rtl="0" eaLnBrk="1" latinLnBrk="0" hangingPunct="1">
+              <a:lnSpc>
+                <a:spcPct val="90000"/>
+              </a:lnSpc>
+              <a:spcBef>
+                <a:spcPts val="500"/>
+              </a:spcBef>
+              <a:buFont typeface="Arial" panose="020B0604020202020204" pitchFamily="34" charset="0"/>
+              <a:buNone/>
+              <a:defRPr sz="1600" kern="1200">
+                <a:solidFill>
+                  <a:schemeClr val="tx1"/>
+                </a:solidFill>
+                <a:latin typeface="+mn-lt"/>
+                <a:ea typeface="+mn-ea"/>
+                <a:cs typeface="+mn-cs"/>
+              </a:defRPr>
+            </a:lvl7pPr>
+            <a:lvl8pPr marL="3200400" indent="0" algn="ctr" defTabSz="914400" rtl="0" eaLnBrk="1" latinLnBrk="0" hangingPunct="1">
+              <a:lnSpc>
+                <a:spcPct val="90000"/>
+              </a:lnSpc>
+              <a:spcBef>
+                <a:spcPts val="500"/>
+              </a:spcBef>
+              <a:buFont typeface="Arial" panose="020B0604020202020204" pitchFamily="34" charset="0"/>
+              <a:buNone/>
+              <a:defRPr sz="1600" kern="1200">
+                <a:solidFill>
+                  <a:schemeClr val="tx1"/>
+                </a:solidFill>
+                <a:latin typeface="+mn-lt"/>
+                <a:ea typeface="+mn-ea"/>
+                <a:cs typeface="+mn-cs"/>
+              </a:defRPr>
+            </a:lvl8pPr>
+            <a:lvl9pPr marL="3657600" indent="0" algn="ctr" defTabSz="914400" rtl="0" eaLnBrk="1" latinLnBrk="0" hangingPunct="1">
+              <a:lnSpc>
+                <a:spcPct val="90000"/>
+              </a:lnSpc>
+              <a:spcBef>
+                <a:spcPts val="500"/>
+              </a:spcBef>
+              <a:buFont typeface="Arial" panose="020B0604020202020204" pitchFamily="34" charset="0"/>
+              <a:buNone/>
+              <a:defRPr sz="1600" kern="1200">
+                <a:solidFill>
+                  <a:schemeClr val="tx1"/>
+                </a:solidFill>
+                <a:latin typeface="+mn-lt"/>
+                <a:ea typeface="+mn-ea"/>
+                <a:cs typeface="+mn-cs"/>
+              </a:defRPr>
+            </a:lvl9pPr>
+          </a:lstStyle>
+          <a:p>
+            <a:pPr algn="r"/>
+            <a:r>
+              <a:rPr lang="pt-BR" altLang="en-US" sz="1600" dirty="0"/>
+              <a:t>Universidade Federal do Rio Grande</a:t>
+            </a:r>
+          </a:p>
+          <a:p>
+            <a:pPr algn="r"/>
+            <a:r>
+              <a:rPr lang="pt-BR" altLang="en-US" sz="1600" dirty="0"/>
+              <a:t>PPG Aplicações para Web - </a:t>
+            </a:r>
+            <a:r>
+              <a:rPr lang="pt-BR" altLang="en-US" sz="1600" dirty="0">
+                <a:sym typeface="+mn-ea"/>
+              </a:rPr>
+              <a:t>Polo SJN</a:t>
+            </a:r>
+          </a:p>
+          <a:p>
+            <a:pPr algn="r"/>
+            <a:r>
+              <a:rPr lang="pt-BR" altLang="en-US" sz="1600" dirty="0">
+                <a:sym typeface="+mn-ea"/>
+              </a:rPr>
+              <a:t>Prof. Dr. Vinicius Menezes de Oliveira</a:t>
+            </a:r>
+            <a:br>
+              <a:rPr lang="pt-BR" altLang="en-US" sz="1600" dirty="0">
+                <a:sym typeface="+mn-ea"/>
+              </a:rPr>
+            </a:br>
+            <a:r>
+              <a:rPr lang="pt-BR" altLang="en-US" sz="1600" dirty="0">
+                <a:sym typeface="+mn-ea"/>
+              </a:rPr>
+              <a:t>Rodrigo de Matos Alves - 129095</a:t>
+            </a:r>
+            <a:r>
+              <a:rPr lang="pt-BR" altLang="en-US" dirty="0">
+                <a:sym typeface="+mn-ea"/>
+              </a:rPr>
+              <a:t> </a:t>
+            </a:r>
+            <a:endParaRPr lang="pt-BR" altLang="en-US" dirty="0"/>
+          </a:p>
+          <a:p>
+            <a:pPr algn="r"/>
+            <a:endParaRPr lang="en-US" dirty="0"/>
+          </a:p>
+        </p:txBody>
+      </p:sp>
+    </p:spTree>
+    <p:extLst>
+      <p:ext uri="{BB962C8B-B14F-4D97-AF65-F5344CB8AC3E}">
+        <p14:creationId xmlns:p14="http://schemas.microsoft.com/office/powerpoint/2010/main" val="1408342794"/>
+      </p:ext>
+    </p:extLst>
+  </p:cSld>
+  <p:clrMapOvr>
+    <a:masterClrMapping/>
+  </p:clrMapOvr>
 </p:sld>
 </file>
 
@@ -4932,33 +10251,18 @@
               <a:rPr lang="pt-BR" dirty="0"/>
               <a:t>Com a web se estabeleceu um cenário fértil para a criação de soluções para as mais variadas áreas que a usam como plataforma. </a:t>
             </a:r>
-            <a:endParaRPr lang="pt-BR" dirty="0" smtClean="0"/>
-          </a:p>
-          <a:p>
-            <a:r>
-              <a:rPr lang="pt-BR" dirty="0" smtClean="0"/>
-              <a:t>Devido </a:t>
-            </a:r>
+          </a:p>
+          <a:p>
             <a:r>
               <a:rPr lang="pt-BR" dirty="0"/>
-              <a:t>ao aumento de ferramentas disponíveis e necessidade de disponibilizar dados em mais de um sistema, se torna necessário existir uma integração para facilitar processos que envolvam escopos diferentes. </a:t>
-            </a:r>
-            <a:endParaRPr lang="pt-BR" dirty="0" smtClean="0"/>
-          </a:p>
-          <a:p>
-            <a:r>
-              <a:rPr lang="pt-BR" dirty="0" smtClean="0"/>
-              <a:t>Este </a:t>
-            </a:r>
+              <a:t>Devido ao aumento de ferramentas disponíveis e necessidade de disponibilizar dados em mais de um sistema, se torna necessário existir uma integração para facilitar processos que envolvam escopos diferentes. </a:t>
+            </a:r>
+          </a:p>
+          <a:p>
             <a:r>
               <a:rPr lang="pt-BR" dirty="0"/>
-              <a:t>artigo abordará uma proposta de solução de integração genérica entre sistemas, simulando uma lógica de negócio interdependente</a:t>
-            </a:r>
-            <a:r>
-              <a:rPr lang="pt-BR" dirty="0" smtClean="0"/>
-              <a:t>.</a:t>
-            </a:r>
-            <a:endParaRPr lang="pt-BR" dirty="0"/>
+              <a:t>Este artigo abordará uma proposta de solução de integração genérica entre sistemas, simulando uma lógica de negócio interdependente.</a:t>
+            </a:r>
           </a:p>
         </p:txBody>
       </p:sp>
@@ -4989,13 +10293,6 @@
   <p:clrMapOvr>
     <a:masterClrMapping/>
   </p:clrMapOvr>
-  <p:timing>
-    <p:tnLst>
-      <p:par>
-        <p:cTn id="1" dur="indefinite" restart="never" nodeType="tmRoot"/>
-      </p:par>
-    </p:tnLst>
-  </p:timing>
 </p:sld>
 </file>
 
@@ -5043,119 +10340,53 @@
             </a:pPr>
             <a:r>
               <a:rPr lang="pt-BR" dirty="0"/>
-              <a:t>Com o decorrer, surgiram ferramentas integradas que sanam um escopo maior de um problema</a:t>
-            </a:r>
-            <a:r>
-              <a:rPr lang="pt-BR" dirty="0" smtClean="0"/>
-              <a:t>,</a:t>
-            </a:r>
+              <a:t>Com o decorrer, surgiram ferramentas integradas que sanam um escopo maior de um problema, porem os seguintes motivos podem impedir uma troca:</a:t>
+            </a:r>
+          </a:p>
+          <a:p>
+            <a:pPr lvl="1"/>
             <a:r>
               <a:rPr lang="pt-BR" dirty="0"/>
-              <a:t> </a:t>
-            </a:r>
-            <a:r>
-              <a:rPr lang="pt-BR" dirty="0" smtClean="0"/>
-              <a:t>porem os seguintes motivos podem </a:t>
-            </a:r>
+              <a:t>a dificuldade de migração de ferramenta para outra, </a:t>
+            </a:r>
+          </a:p>
+          <a:p>
+            <a:pPr lvl="1"/>
             <a:r>
               <a:rPr lang="pt-BR" dirty="0"/>
-              <a:t>impedir uma </a:t>
-            </a:r>
-            <a:r>
-              <a:rPr lang="pt-BR" dirty="0" smtClean="0"/>
-              <a:t>troca:</a:t>
+              <a:t>a possibilidade de importação de dados e,</a:t>
             </a:r>
           </a:p>
           <a:p>
             <a:pPr lvl="1"/>
             <a:r>
-              <a:rPr lang="pt-BR" dirty="0" smtClean="0"/>
-              <a:t>a </a:t>
-            </a:r>
-            <a:r>
               <a:rPr lang="pt-BR" dirty="0"/>
-              <a:t>dificuldade de migração de ferramenta para outra, </a:t>
-            </a:r>
-            <a:endParaRPr lang="pt-BR" dirty="0" smtClean="0"/>
+              <a:t>até uma resistência cultural </a:t>
+            </a:r>
+          </a:p>
+          <a:p>
+            <a:r>
+              <a:rPr lang="pt-BR" sz="2300" dirty="0"/>
+              <a:t>Porém o cenário mais comum é:</a:t>
+            </a:r>
           </a:p>
           <a:p>
             <a:pPr lvl="1"/>
             <a:r>
-              <a:rPr lang="pt-BR" dirty="0" smtClean="0"/>
-              <a:t>a </a:t>
-            </a:r>
-            <a:r>
               <a:rPr lang="pt-BR" dirty="0"/>
-              <a:t>possibilidade de importação de dados </a:t>
-            </a:r>
-            <a:r>
-              <a:rPr lang="pt-BR" dirty="0" smtClean="0"/>
-              <a:t>e,</a:t>
-            </a:r>
-          </a:p>
-          <a:p>
-            <a:pPr lvl="1"/>
-            <a:r>
-              <a:rPr lang="pt-BR" dirty="0" smtClean="0"/>
-              <a:t>até </a:t>
-            </a:r>
-            <a:r>
-              <a:rPr lang="pt-BR" dirty="0"/>
-              <a:t>uma resistência cultural </a:t>
-            </a:r>
-            <a:endParaRPr lang="pt-BR" dirty="0" smtClean="0"/>
-          </a:p>
-          <a:p>
-            <a:r>
-              <a:rPr lang="pt-BR" sz="2300" dirty="0" smtClean="0"/>
-              <a:t>Porém </a:t>
-            </a:r>
+              <a:t>necessidade de integração de dados entre 2 empresas</a:t>
+            </a:r>
+          </a:p>
+          <a:p>
             <a:r>
               <a:rPr lang="pt-BR" sz="2300" dirty="0"/>
-              <a:t>o cenário mais comum </a:t>
-            </a:r>
-            <a:r>
-              <a:rPr lang="pt-BR" sz="2300" dirty="0" smtClean="0"/>
-              <a:t>é:</a:t>
-            </a:r>
-          </a:p>
-          <a:p>
-            <a:pPr lvl="1"/>
-            <a:r>
-              <a:rPr lang="pt-BR" dirty="0" smtClean="0"/>
-              <a:t>necessidade </a:t>
-            </a:r>
-            <a:r>
-              <a:rPr lang="pt-BR" dirty="0"/>
-              <a:t>de integração de dados entre 2 </a:t>
-            </a:r>
-            <a:r>
-              <a:rPr lang="pt-BR" dirty="0" smtClean="0"/>
-              <a:t>empresas</a:t>
-            </a:r>
-          </a:p>
-          <a:p>
-            <a:r>
-              <a:rPr lang="pt-BR" sz="2300" dirty="0" smtClean="0"/>
-              <a:t>Sistemas </a:t>
-            </a:r>
+              <a:t>Sistemas diferentes que não existe necessidade de alteração do sistema inteiro de uma das partes.</a:t>
+            </a:r>
+          </a:p>
+          <a:p>
             <a:r>
               <a:rPr lang="pt-BR" sz="2300" dirty="0"/>
-              <a:t>diferentes que não existe necessidade de alteração do sistema inteiro de uma das partes</a:t>
-            </a:r>
-            <a:r>
-              <a:rPr lang="pt-BR" sz="2300" dirty="0" smtClean="0"/>
-              <a:t>.</a:t>
-            </a:r>
-          </a:p>
-          <a:p>
-            <a:r>
-              <a:rPr lang="pt-BR" sz="2300" dirty="0" smtClean="0"/>
-              <a:t>Nesses </a:t>
-            </a:r>
-            <a:r>
-              <a:rPr lang="pt-BR" sz="2300" dirty="0"/>
-              <a:t>casos se busca a possibilidade de integração entre esses sistemas.</a:t>
+              <a:t>Nesses casos se busca a possibilidade de integração entre esses sistemas.</a:t>
             </a:r>
           </a:p>
           <a:p>
@@ -5196,13 +10427,6 @@
   <p:clrMapOvr>
     <a:masterClrMapping/>
   </p:clrMapOvr>
-  <p:timing>
-    <p:tnLst>
-      <p:par>
-        <p:cTn id="1" dur="indefinite" restart="never" nodeType="tmRoot"/>
-      </p:par>
-    </p:tnLst>
-  </p:timing>
 </p:sld>
 </file>
 
@@ -5245,18 +10469,9 @@
           </a:p>
           <a:p>
             <a:r>
-              <a:rPr lang="pt-BR" altLang="en-US" dirty="0" smtClean="0"/>
-              <a:t>Analise </a:t>
-            </a:r>
-            <a:r>
               <a:rPr lang="pt-BR" altLang="en-US" dirty="0"/>
-              <a:t>critica de funcionalidades, tecnologia utilizada e </a:t>
-            </a:r>
-            <a:r>
-              <a:rPr lang="pt-BR" altLang="en-US" dirty="0" smtClean="0"/>
-              <a:t>aplicabilidade.</a:t>
-            </a:r>
-            <a:endParaRPr lang="pt-BR" altLang="en-US" dirty="0"/>
+              <a:t>Analise critica de funcionalidades, tecnologia utilizada e aplicabilidade.</a:t>
+            </a:r>
           </a:p>
         </p:txBody>
       </p:sp>
@@ -5287,17 +10502,492 @@
   <p:clrMapOvr>
     <a:masterClrMapping/>
   </p:clrMapOvr>
-  <p:timing>
-    <p:tnLst>
-      <p:par>
-        <p:cTn id="1" dur="indefinite" restart="never" nodeType="tmRoot"/>
-      </p:par>
-    </p:tnLst>
-  </p:timing>
 </p:sld>
 </file>
 
 <file path=ppt/slides/slide5.xml><?xml version="1.0" encoding="utf-8"?>
+<p:sld xmlns:a="http://schemas.openxmlformats.org/drawingml/2006/main" xmlns:r="http://schemas.openxmlformats.org/officeDocument/2006/relationships" xmlns:p="http://schemas.openxmlformats.org/presentationml/2006/main">
+  <p:cSld>
+    <p:spTree>
+      <p:nvGrpSpPr>
+        <p:cNvPr id="1" name=""/>
+        <p:cNvGrpSpPr/>
+        <p:nvPr/>
+      </p:nvGrpSpPr>
+      <p:grpSpPr>
+        <a:xfrm>
+          <a:off x="0" y="0"/>
+          <a:ext cx="0" cy="0"/>
+          <a:chOff x="0" y="0"/>
+          <a:chExt cx="0" cy="0"/>
+        </a:xfrm>
+      </p:grpSpPr>
+      <p:sp>
+        <p:nvSpPr>
+          <p:cNvPr id="3" name="Espaço Reservado para Conteúdo 2"/>
+          <p:cNvSpPr>
+            <a:spLocks noGrp="1"/>
+          </p:cNvSpPr>
+          <p:nvPr>
+            <p:ph idx="1"/>
+          </p:nvPr>
+        </p:nvSpPr>
+        <p:spPr/>
+        <p:txBody>
+          <a:bodyPr>
+            <a:normAutofit/>
+          </a:bodyPr>
+          <a:lstStyle/>
+          <a:p>
+            <a:pPr marL="342900" indent="-342900">
+              <a:buFont typeface="Arial" panose="020B0604020202020204" pitchFamily="34" charset="0"/>
+              <a:buAutoNum type="arabicPeriod"/>
+            </a:pPr>
+            <a:r>
+              <a:rPr lang="pt-BR" altLang="en-US" sz="2800" dirty="0">
+                <a:solidFill>
+                  <a:srgbClr val="000000"/>
+                </a:solidFill>
+                <a:latin typeface="Calibri" panose="020F0502020204030204" charset="0"/>
+                <a:sym typeface="+mn-ea"/>
+              </a:rPr>
+              <a:t>Estudo de bibliografia</a:t>
+            </a:r>
+            <a:endParaRPr lang="pt-BR" altLang="en-US" sz="2800" b="0" dirty="0">
+              <a:solidFill>
+                <a:srgbClr val="000000"/>
+              </a:solidFill>
+              <a:latin typeface="Calibri" panose="020F0502020204030204" charset="0"/>
+            </a:endParaRPr>
+          </a:p>
+          <a:p>
+            <a:pPr marL="800100" lvl="1" indent="-342900">
+              <a:buFont typeface="+mj-lt"/>
+              <a:buAutoNum type="romanLcPeriod"/>
+            </a:pPr>
+            <a:r>
+              <a:rPr lang="pt-BR" altLang="en-US" sz="2800" dirty="0">
+                <a:solidFill>
+                  <a:srgbClr val="000000"/>
+                </a:solidFill>
+                <a:latin typeface="Calibri" panose="020F0502020204030204" charset="0"/>
+                <a:sym typeface="+mn-ea"/>
+              </a:rPr>
+              <a:t>Estudo </a:t>
+            </a:r>
+            <a:r>
+              <a:rPr lang="en-US" sz="2800" dirty="0">
+                <a:solidFill>
+                  <a:srgbClr val="000000"/>
+                </a:solidFill>
+                <a:latin typeface="Calibri" panose="020F0502020204030204" charset="0"/>
+                <a:sym typeface="+mn-ea"/>
+              </a:rPr>
+              <a:t>de </a:t>
+            </a:r>
+            <a:r>
+              <a:rPr lang="en-US" sz="2800" dirty="0" err="1">
+                <a:solidFill>
+                  <a:srgbClr val="000000"/>
+                </a:solidFill>
+                <a:latin typeface="Calibri" panose="020F0502020204030204" charset="0"/>
+                <a:sym typeface="+mn-ea"/>
+              </a:rPr>
+              <a:t>ferramentas</a:t>
+            </a:r>
+            <a:r>
+              <a:rPr lang="en-US" sz="2800" dirty="0">
+                <a:solidFill>
+                  <a:srgbClr val="000000"/>
+                </a:solidFill>
+                <a:latin typeface="Calibri" panose="020F0502020204030204" charset="0"/>
+                <a:sym typeface="+mn-ea"/>
+              </a:rPr>
+              <a:t> de </a:t>
+            </a:r>
+            <a:r>
+              <a:rPr lang="en-US" sz="2800" dirty="0" err="1">
+                <a:solidFill>
+                  <a:srgbClr val="000000"/>
+                </a:solidFill>
+                <a:latin typeface="Calibri" panose="020F0502020204030204" charset="0"/>
+                <a:sym typeface="+mn-ea"/>
+              </a:rPr>
+              <a:t>integração</a:t>
+            </a:r>
+            <a:r>
+              <a:rPr lang="en-US" sz="2800" dirty="0">
+                <a:solidFill>
+                  <a:srgbClr val="000000"/>
+                </a:solidFill>
+                <a:latin typeface="Calibri" panose="020F0502020204030204" charset="0"/>
+                <a:sym typeface="+mn-ea"/>
+              </a:rPr>
+              <a:t>.</a:t>
+            </a:r>
+          </a:p>
+          <a:p>
+            <a:pPr marL="800100" lvl="1" indent="-342900">
+              <a:buFont typeface="+mj-lt"/>
+              <a:buAutoNum type="romanLcPeriod"/>
+            </a:pPr>
+            <a:r>
+              <a:rPr lang="en-US" altLang="en-US" sz="2800" b="0" dirty="0" err="1">
+                <a:solidFill>
+                  <a:srgbClr val="000000"/>
+                </a:solidFill>
+                <a:latin typeface="Calibri" panose="020F0502020204030204" charset="0"/>
+                <a:sym typeface="+mn-ea"/>
+              </a:rPr>
+              <a:t>Estudo</a:t>
+            </a:r>
+            <a:r>
+              <a:rPr lang="en-US" altLang="en-US" sz="2800" b="0" dirty="0">
+                <a:solidFill>
+                  <a:srgbClr val="000000"/>
+                </a:solidFill>
+                <a:latin typeface="Calibri" panose="020F0502020204030204" charset="0"/>
+                <a:sym typeface="+mn-ea"/>
+              </a:rPr>
+              <a:t> de </a:t>
+            </a:r>
+            <a:r>
+              <a:rPr lang="en-US" altLang="en-US" sz="2800" b="0" dirty="0" err="1">
+                <a:solidFill>
+                  <a:srgbClr val="000000"/>
+                </a:solidFill>
+                <a:latin typeface="Calibri" panose="020F0502020204030204" charset="0"/>
+                <a:sym typeface="+mn-ea"/>
+              </a:rPr>
+              <a:t>tecnologias</a:t>
+            </a:r>
+            <a:endParaRPr lang="en-US" altLang="en-US" sz="2800" b="0" dirty="0">
+              <a:solidFill>
+                <a:srgbClr val="000000"/>
+              </a:solidFill>
+              <a:latin typeface="Calibri" panose="020F0502020204030204" charset="0"/>
+            </a:endParaRPr>
+          </a:p>
+          <a:p>
+            <a:pPr marL="342900" indent="-342900">
+              <a:buFont typeface="Arial" panose="020B0604020202020204" pitchFamily="34" charset="0"/>
+              <a:buAutoNum type="arabicPeriod"/>
+            </a:pPr>
+            <a:r>
+              <a:rPr lang="en-US" sz="2800" dirty="0" err="1">
+                <a:solidFill>
+                  <a:srgbClr val="000000"/>
+                </a:solidFill>
+                <a:latin typeface="Calibri" panose="020F0502020204030204" charset="0"/>
+                <a:sym typeface="+mn-ea"/>
+              </a:rPr>
+              <a:t>Análise</a:t>
+            </a:r>
+            <a:r>
+              <a:rPr lang="en-US" sz="2800" dirty="0">
+                <a:solidFill>
+                  <a:srgbClr val="000000"/>
+                </a:solidFill>
+                <a:latin typeface="Calibri" panose="020F0502020204030204" charset="0"/>
+                <a:sym typeface="+mn-ea"/>
+              </a:rPr>
+              <a:t> </a:t>
+            </a:r>
+            <a:r>
+              <a:rPr lang="en-US" sz="2800" dirty="0" err="1">
+                <a:solidFill>
+                  <a:srgbClr val="000000"/>
+                </a:solidFill>
+                <a:latin typeface="Calibri" panose="020F0502020204030204" charset="0"/>
+                <a:sym typeface="+mn-ea"/>
+              </a:rPr>
+              <a:t>crítica</a:t>
+            </a:r>
+            <a:r>
+              <a:rPr lang="en-US" sz="2800" dirty="0">
+                <a:solidFill>
+                  <a:srgbClr val="000000"/>
+                </a:solidFill>
+                <a:latin typeface="Calibri" panose="020F0502020204030204" charset="0"/>
+                <a:sym typeface="+mn-ea"/>
+              </a:rPr>
+              <a:t> de </a:t>
+            </a:r>
+            <a:r>
+              <a:rPr lang="en-US" sz="2800" dirty="0" err="1">
+                <a:solidFill>
+                  <a:srgbClr val="000000"/>
+                </a:solidFill>
+                <a:latin typeface="Calibri" panose="020F0502020204030204" charset="0"/>
+                <a:sym typeface="+mn-ea"/>
+              </a:rPr>
+              <a:t>funcionalidades</a:t>
+            </a:r>
+            <a:r>
+              <a:rPr lang="en-US" sz="2800" dirty="0">
+                <a:solidFill>
+                  <a:srgbClr val="000000"/>
+                </a:solidFill>
+                <a:latin typeface="Calibri" panose="020F0502020204030204" charset="0"/>
+                <a:sym typeface="+mn-ea"/>
+              </a:rPr>
+              <a:t> e </a:t>
+            </a:r>
+            <a:r>
+              <a:rPr lang="en-US" sz="2800" dirty="0" err="1">
+                <a:solidFill>
+                  <a:srgbClr val="000000"/>
+                </a:solidFill>
+                <a:latin typeface="Calibri" panose="020F0502020204030204" charset="0"/>
+                <a:sym typeface="+mn-ea"/>
+              </a:rPr>
+              <a:t>tecnologia</a:t>
+            </a:r>
+            <a:r>
+              <a:rPr lang="en-US" sz="2800" dirty="0">
+                <a:solidFill>
+                  <a:srgbClr val="000000"/>
+                </a:solidFill>
+                <a:latin typeface="Calibri" panose="020F0502020204030204" charset="0"/>
+                <a:sym typeface="+mn-ea"/>
+              </a:rPr>
+              <a:t> </a:t>
+            </a:r>
+            <a:r>
+              <a:rPr lang="en-US" sz="2800" dirty="0" err="1">
+                <a:solidFill>
+                  <a:srgbClr val="000000"/>
+                </a:solidFill>
+                <a:latin typeface="Calibri" panose="020F0502020204030204" charset="0"/>
+                <a:sym typeface="+mn-ea"/>
+              </a:rPr>
+              <a:t>utilizada</a:t>
+            </a:r>
+            <a:r>
+              <a:rPr lang="en-US" sz="2800" dirty="0">
+                <a:solidFill>
+                  <a:srgbClr val="000000"/>
+                </a:solidFill>
+                <a:latin typeface="Calibri" panose="020F0502020204030204" charset="0"/>
+                <a:sym typeface="+mn-ea"/>
+              </a:rPr>
+              <a:t>.</a:t>
+            </a:r>
+            <a:endParaRPr lang="en-US" altLang="en-US" sz="2800" b="0" dirty="0">
+              <a:solidFill>
+                <a:srgbClr val="000000"/>
+              </a:solidFill>
+              <a:latin typeface="Calibri" panose="020F0502020204030204" charset="0"/>
+            </a:endParaRPr>
+          </a:p>
+          <a:p>
+            <a:pPr marL="342900" indent="-342900">
+              <a:buFont typeface="Arial" panose="020B0604020202020204" pitchFamily="34" charset="0"/>
+              <a:buAutoNum type="arabicPeriod"/>
+            </a:pPr>
+            <a:r>
+              <a:rPr lang="en-US" sz="2800" dirty="0" err="1">
+                <a:solidFill>
+                  <a:srgbClr val="000000"/>
+                </a:solidFill>
+                <a:latin typeface="Calibri" panose="020F0502020204030204" charset="0"/>
+                <a:sym typeface="+mn-ea"/>
+              </a:rPr>
+              <a:t>Definição</a:t>
+            </a:r>
+            <a:r>
+              <a:rPr lang="en-US" sz="2800" dirty="0">
+                <a:solidFill>
+                  <a:srgbClr val="000000"/>
+                </a:solidFill>
+                <a:latin typeface="Calibri" panose="020F0502020204030204" charset="0"/>
+                <a:sym typeface="+mn-ea"/>
+              </a:rPr>
+              <a:t> de </a:t>
+            </a:r>
+            <a:r>
+              <a:rPr lang="en-US" sz="2800" dirty="0" err="1">
+                <a:solidFill>
+                  <a:srgbClr val="000000"/>
+                </a:solidFill>
+                <a:latin typeface="Calibri" panose="020F0502020204030204" charset="0"/>
+                <a:sym typeface="+mn-ea"/>
+              </a:rPr>
+              <a:t>modelo</a:t>
+            </a:r>
+            <a:r>
+              <a:rPr lang="en-US" sz="2800" dirty="0">
+                <a:solidFill>
+                  <a:srgbClr val="000000"/>
+                </a:solidFill>
+                <a:latin typeface="Calibri" panose="020F0502020204030204" charset="0"/>
+                <a:sym typeface="+mn-ea"/>
+              </a:rPr>
+              <a:t> e </a:t>
+            </a:r>
+            <a:r>
+              <a:rPr lang="en-US" sz="2800" dirty="0" err="1">
+                <a:solidFill>
+                  <a:srgbClr val="000000"/>
+                </a:solidFill>
+                <a:latin typeface="Calibri" panose="020F0502020204030204" charset="0"/>
+                <a:sym typeface="+mn-ea"/>
+              </a:rPr>
+              <a:t>implementação</a:t>
+            </a:r>
+            <a:endParaRPr lang="en-US" sz="2800" dirty="0">
+              <a:solidFill>
+                <a:srgbClr val="000000"/>
+              </a:solidFill>
+              <a:latin typeface="Calibri" panose="020F0502020204030204" charset="0"/>
+              <a:sym typeface="+mn-ea"/>
+            </a:endParaRPr>
+          </a:p>
+          <a:p>
+            <a:pPr marL="342900" indent="-342900">
+              <a:buFont typeface="Arial" panose="020B0604020202020204" pitchFamily="34" charset="0"/>
+              <a:buAutoNum type="arabicPeriod"/>
+            </a:pPr>
+            <a:r>
+              <a:rPr lang="en-US" sz="2800" dirty="0" err="1">
+                <a:solidFill>
+                  <a:srgbClr val="000000"/>
+                </a:solidFill>
+                <a:latin typeface="Calibri" panose="020F0502020204030204" charset="0"/>
+                <a:sym typeface="+mn-ea"/>
+              </a:rPr>
+              <a:t>Finalização</a:t>
+            </a:r>
+            <a:r>
+              <a:rPr lang="en-US" sz="2800" dirty="0">
+                <a:solidFill>
+                  <a:srgbClr val="000000"/>
+                </a:solidFill>
+                <a:latin typeface="Calibri" panose="020F0502020204030204" charset="0"/>
+                <a:sym typeface="+mn-ea"/>
+              </a:rPr>
+              <a:t> do </a:t>
+            </a:r>
+            <a:r>
+              <a:rPr lang="en-US" sz="2800" dirty="0" err="1">
+                <a:solidFill>
+                  <a:srgbClr val="000000"/>
+                </a:solidFill>
+                <a:latin typeface="Calibri" panose="020F0502020204030204" charset="0"/>
+                <a:sym typeface="+mn-ea"/>
+              </a:rPr>
+              <a:t>trabalho</a:t>
+            </a:r>
+            <a:endParaRPr lang="pt-BR" altLang="en-US" dirty="0"/>
+          </a:p>
+        </p:txBody>
+      </p:sp>
+      <p:sp>
+        <p:nvSpPr>
+          <p:cNvPr id="2" name="Título 1"/>
+          <p:cNvSpPr>
+            <a:spLocks noGrp="1"/>
+          </p:cNvSpPr>
+          <p:nvPr>
+            <p:ph type="title"/>
+          </p:nvPr>
+        </p:nvSpPr>
+        <p:spPr/>
+        <p:txBody>
+          <a:bodyPr/>
+          <a:lstStyle/>
+          <a:p>
+            <a:r>
+              <a:rPr lang="pt-BR" altLang="en-US"/>
+              <a:t>Lista de atividades</a:t>
+            </a:r>
+          </a:p>
+        </p:txBody>
+      </p:sp>
+    </p:spTree>
+  </p:cSld>
+  <p:clrMapOvr>
+    <a:masterClrMapping/>
+  </p:clrMapOvr>
+</p:sld>
+</file>
+
+<file path=ppt/slides/slide6.xml><?xml version="1.0" encoding="utf-8"?>
+<p:sld xmlns:a="http://schemas.openxmlformats.org/drawingml/2006/main" xmlns:r="http://schemas.openxmlformats.org/officeDocument/2006/relationships" xmlns:p="http://schemas.openxmlformats.org/presentationml/2006/main">
+  <p:cSld>
+    <p:spTree>
+      <p:nvGrpSpPr>
+        <p:cNvPr id="1" name=""/>
+        <p:cNvGrpSpPr/>
+        <p:nvPr/>
+      </p:nvGrpSpPr>
+      <p:grpSpPr>
+        <a:xfrm>
+          <a:off x="0" y="0"/>
+          <a:ext cx="0" cy="0"/>
+          <a:chOff x="0" y="0"/>
+          <a:chExt cx="0" cy="0"/>
+        </a:xfrm>
+      </p:grpSpPr>
+      <p:sp>
+        <p:nvSpPr>
+          <p:cNvPr id="3" name="Espaço Reservado para Conteúdo 2"/>
+          <p:cNvSpPr>
+            <a:spLocks noGrp="1"/>
+          </p:cNvSpPr>
+          <p:nvPr>
+            <p:ph idx="1"/>
+          </p:nvPr>
+        </p:nvSpPr>
+        <p:spPr/>
+        <p:txBody>
+          <a:bodyPr/>
+          <a:lstStyle/>
+          <a:p>
+            <a:r>
+              <a:rPr lang="pt-BR" altLang="en-US" dirty="0"/>
+              <a:t>Protótipo de software funcional.</a:t>
+            </a:r>
+          </a:p>
+          <a:p>
+            <a:r>
+              <a:rPr lang="pt-BR" altLang="en-US" dirty="0"/>
+              <a:t>Relatório técnico.</a:t>
+            </a:r>
+          </a:p>
+        </p:txBody>
+      </p:sp>
+      <p:sp>
+        <p:nvSpPr>
+          <p:cNvPr id="2" name="Título 1"/>
+          <p:cNvSpPr>
+            <a:spLocks noGrp="1"/>
+          </p:cNvSpPr>
+          <p:nvPr>
+            <p:ph type="title"/>
+          </p:nvPr>
+        </p:nvSpPr>
+        <p:spPr/>
+        <p:txBody>
+          <a:bodyPr/>
+          <a:lstStyle/>
+          <a:p>
+            <a:r>
+              <a:rPr lang="pt-BR" altLang="en-US"/>
+              <a:t>Resultados esperados</a:t>
+            </a:r>
+          </a:p>
+        </p:txBody>
+      </p:sp>
+    </p:spTree>
+  </p:cSld>
+  <p:clrMapOvr>
+    <a:masterClrMapping/>
+  </p:clrMapOvr>
+</p:sld>
+</file>
+
+<file path=ppt/slides/slide7.xml><?xml version="1.0" encoding="utf-8"?>
 <p:sld xmlns:a="http://schemas.openxmlformats.org/drawingml/2006/main" xmlns:r="http://schemas.openxmlformats.org/officeDocument/2006/relationships" xmlns:p="http://schemas.openxmlformats.org/presentationml/2006/main">
   <p:cSld>
     <p:spTree>
@@ -5336,10 +11026,9 @@
           <a:p>
             <a:pPr algn="ctr"/>
             <a:r>
-              <a:rPr lang="pt-BR" dirty="0" smtClean="0"/>
-              <a:t>Apresentação Código</a:t>
-            </a:r>
-            <a:endParaRPr lang="pt-BR" dirty="0"/>
+              <a:rPr lang="pt-BR" dirty="0"/>
+              <a:t>Apresentação Código e Operação da Ferramenta</a:t>
+            </a:r>
           </a:p>
         </p:txBody>
       </p:sp>
@@ -5353,559 +11042,6 @@
   <p:clrMapOvr>
     <a:masterClrMapping/>
   </p:clrMapOvr>
-  <p:timing>
-    <p:tnLst>
-      <p:par>
-        <p:cTn id="1" dur="indefinite" restart="never" nodeType="tmRoot"/>
-      </p:par>
-    </p:tnLst>
-  </p:timing>
-</p:sld>
-</file>
-
-<file path=ppt/slides/slide6.xml><?xml version="1.0" encoding="utf-8"?>
-<p:sld xmlns:a="http://schemas.openxmlformats.org/drawingml/2006/main" xmlns:r="http://schemas.openxmlformats.org/officeDocument/2006/relationships" xmlns:p="http://schemas.openxmlformats.org/presentationml/2006/main">
-  <p:cSld>
-    <p:spTree>
-      <p:nvGrpSpPr>
-        <p:cNvPr id="1" name=""/>
-        <p:cNvGrpSpPr/>
-        <p:nvPr/>
-      </p:nvGrpSpPr>
-      <p:grpSpPr>
-        <a:xfrm>
-          <a:off x="0" y="0"/>
-          <a:ext cx="0" cy="0"/>
-          <a:chOff x="0" y="0"/>
-          <a:chExt cx="0" cy="0"/>
-        </a:xfrm>
-      </p:grpSpPr>
-      <p:sp>
-        <p:nvSpPr>
-          <p:cNvPr id="3" name="Espaço Reservado para Conteúdo 2"/>
-          <p:cNvSpPr>
-            <a:spLocks noGrp="1"/>
-          </p:cNvSpPr>
-          <p:nvPr>
-            <p:ph idx="1"/>
-          </p:nvPr>
-        </p:nvSpPr>
-        <p:spPr/>
-        <p:txBody>
-          <a:bodyPr/>
-          <a:lstStyle/>
-          <a:p>
-            <a:r>
-              <a:rPr lang="pt-BR" altLang="en-US" dirty="0" smtClean="0"/>
-              <a:t>Protótipo de software funcional.</a:t>
-            </a:r>
-            <a:endParaRPr lang="pt-BR" altLang="en-US" dirty="0"/>
-          </a:p>
-          <a:p>
-            <a:r>
-              <a:rPr lang="pt-BR" altLang="en-US" dirty="0" smtClean="0"/>
-              <a:t>Relat</a:t>
-            </a:r>
-            <a:r>
-              <a:rPr lang="pt-BR" altLang="en-US" dirty="0" smtClean="0"/>
-              <a:t>ório técnico</a:t>
-            </a:r>
-            <a:r>
-              <a:rPr lang="pt-BR" altLang="en-US" dirty="0" smtClean="0"/>
-              <a:t>.</a:t>
-            </a:r>
-            <a:endParaRPr lang="pt-BR" altLang="en-US" dirty="0"/>
-          </a:p>
-        </p:txBody>
-      </p:sp>
-      <p:sp>
-        <p:nvSpPr>
-          <p:cNvPr id="2" name="Título 1"/>
-          <p:cNvSpPr>
-            <a:spLocks noGrp="1"/>
-          </p:cNvSpPr>
-          <p:nvPr>
-            <p:ph type="title"/>
-          </p:nvPr>
-        </p:nvSpPr>
-        <p:spPr/>
-        <p:txBody>
-          <a:bodyPr/>
-          <a:lstStyle/>
-          <a:p>
-            <a:r>
-              <a:rPr lang="pt-BR" altLang="en-US"/>
-              <a:t>Resultados esperados</a:t>
-            </a:r>
-          </a:p>
-        </p:txBody>
-      </p:sp>
-    </p:spTree>
-  </p:cSld>
-  <p:clrMapOvr>
-    <a:masterClrMapping/>
-  </p:clrMapOvr>
-  <p:timing>
-    <p:tnLst>
-      <p:par>
-        <p:cTn id="1" dur="indefinite" restart="never" nodeType="tmRoot"/>
-      </p:par>
-    </p:tnLst>
-  </p:timing>
-</p:sld>
-</file>
-
-<file path=ppt/slides/slide7.xml><?xml version="1.0" encoding="utf-8"?>
-<p:sld xmlns:a="http://schemas.openxmlformats.org/drawingml/2006/main" xmlns:r="http://schemas.openxmlformats.org/officeDocument/2006/relationships" xmlns:p="http://schemas.openxmlformats.org/presentationml/2006/main">
-  <p:cSld>
-    <p:spTree>
-      <p:nvGrpSpPr>
-        <p:cNvPr id="1" name=""/>
-        <p:cNvGrpSpPr/>
-        <p:nvPr/>
-      </p:nvGrpSpPr>
-      <p:grpSpPr>
-        <a:xfrm>
-          <a:off x="0" y="0"/>
-          <a:ext cx="0" cy="0"/>
-          <a:chOff x="0" y="0"/>
-          <a:chExt cx="0" cy="0"/>
-        </a:xfrm>
-      </p:grpSpPr>
-      <p:sp>
-        <p:nvSpPr>
-          <p:cNvPr id="3" name="Espaço Reservado para Conteúdo 2"/>
-          <p:cNvSpPr>
-            <a:spLocks noGrp="1"/>
-          </p:cNvSpPr>
-          <p:nvPr>
-            <p:ph idx="1"/>
-          </p:nvPr>
-        </p:nvSpPr>
-        <p:spPr/>
-        <p:txBody>
-          <a:bodyPr>
-            <a:normAutofit/>
-          </a:bodyPr>
-          <a:lstStyle/>
-          <a:p>
-            <a:pPr marL="342900" indent="-342900">
-              <a:buFont typeface="Arial" panose="020B0604020202020204" pitchFamily="34" charset="0"/>
-              <a:buAutoNum type="arabicPeriod"/>
-            </a:pPr>
-            <a:r>
-              <a:rPr lang="pt-BR" altLang="en-US" sz="2800" dirty="0">
-                <a:solidFill>
-                  <a:srgbClr val="000000"/>
-                </a:solidFill>
-                <a:latin typeface="Calibri" panose="020F0502020204030204" charset="0"/>
-                <a:sym typeface="+mn-ea"/>
-              </a:rPr>
-              <a:t>Estudo de bibliografia</a:t>
-            </a:r>
-            <a:endParaRPr lang="pt-BR" altLang="en-US" sz="2800" b="0" dirty="0">
-              <a:solidFill>
-                <a:srgbClr val="000000"/>
-              </a:solidFill>
-              <a:latin typeface="Calibri" panose="020F0502020204030204" charset="0"/>
-            </a:endParaRPr>
-          </a:p>
-          <a:p>
-            <a:pPr marL="800100" lvl="1" indent="-342900">
-              <a:buFont typeface="+mj-lt"/>
-              <a:buAutoNum type="romanLcPeriod"/>
-            </a:pPr>
-            <a:r>
-              <a:rPr lang="pt-BR" altLang="en-US" sz="2800" dirty="0">
-                <a:solidFill>
-                  <a:srgbClr val="000000"/>
-                </a:solidFill>
-                <a:latin typeface="Calibri" panose="020F0502020204030204" charset="0"/>
-                <a:sym typeface="+mn-ea"/>
-              </a:rPr>
-              <a:t>Estudo </a:t>
-            </a:r>
-            <a:r>
-              <a:rPr lang="en-US" sz="2800" dirty="0">
-                <a:solidFill>
-                  <a:srgbClr val="000000"/>
-                </a:solidFill>
-                <a:latin typeface="Calibri" panose="020F0502020204030204" charset="0"/>
-                <a:sym typeface="+mn-ea"/>
-              </a:rPr>
-              <a:t>de </a:t>
-            </a:r>
-            <a:r>
-              <a:rPr lang="en-US" sz="2800" dirty="0" err="1">
-                <a:solidFill>
-                  <a:srgbClr val="000000"/>
-                </a:solidFill>
-                <a:latin typeface="Calibri" panose="020F0502020204030204" charset="0"/>
-                <a:sym typeface="+mn-ea"/>
-              </a:rPr>
-              <a:t>ferramentas</a:t>
-            </a:r>
-            <a:r>
-              <a:rPr lang="en-US" sz="2800" dirty="0">
-                <a:solidFill>
-                  <a:srgbClr val="000000"/>
-                </a:solidFill>
-                <a:latin typeface="Calibri" panose="020F0502020204030204" charset="0"/>
-                <a:sym typeface="+mn-ea"/>
-              </a:rPr>
-              <a:t> </a:t>
-            </a:r>
-            <a:r>
-              <a:rPr lang="en-US" sz="2800" dirty="0" smtClean="0">
-                <a:solidFill>
-                  <a:srgbClr val="000000"/>
-                </a:solidFill>
-                <a:latin typeface="Calibri" panose="020F0502020204030204" charset="0"/>
-                <a:sym typeface="+mn-ea"/>
-              </a:rPr>
-              <a:t>de </a:t>
-            </a:r>
-            <a:r>
-              <a:rPr lang="en-US" sz="2800" dirty="0" err="1" smtClean="0">
-                <a:solidFill>
-                  <a:srgbClr val="000000"/>
-                </a:solidFill>
-                <a:latin typeface="Calibri" panose="020F0502020204030204" charset="0"/>
-                <a:sym typeface="+mn-ea"/>
-              </a:rPr>
-              <a:t>integração</a:t>
-            </a:r>
-            <a:r>
-              <a:rPr lang="en-US" sz="2800" dirty="0" smtClean="0">
-                <a:solidFill>
-                  <a:srgbClr val="000000"/>
-                </a:solidFill>
-                <a:latin typeface="Calibri" panose="020F0502020204030204" charset="0"/>
-                <a:sym typeface="+mn-ea"/>
-              </a:rPr>
-              <a:t>.</a:t>
-            </a:r>
-          </a:p>
-          <a:p>
-            <a:pPr marL="800100" lvl="1" indent="-342900">
-              <a:buFont typeface="+mj-lt"/>
-              <a:buAutoNum type="romanLcPeriod"/>
-            </a:pPr>
-            <a:r>
-              <a:rPr lang="en-US" altLang="en-US" sz="2800" b="0" dirty="0" err="1" smtClean="0">
-                <a:solidFill>
-                  <a:srgbClr val="000000"/>
-                </a:solidFill>
-                <a:latin typeface="Calibri" panose="020F0502020204030204" charset="0"/>
-                <a:sym typeface="+mn-ea"/>
-              </a:rPr>
-              <a:t>Estudo</a:t>
-            </a:r>
-            <a:r>
-              <a:rPr lang="en-US" altLang="en-US" sz="2800" b="0" dirty="0" smtClean="0">
-                <a:solidFill>
-                  <a:srgbClr val="000000"/>
-                </a:solidFill>
-                <a:latin typeface="Calibri" panose="020F0502020204030204" charset="0"/>
-                <a:sym typeface="+mn-ea"/>
-              </a:rPr>
-              <a:t> de </a:t>
-            </a:r>
-            <a:r>
-              <a:rPr lang="en-US" altLang="en-US" sz="2800" b="0" dirty="0" err="1" smtClean="0">
-                <a:solidFill>
-                  <a:srgbClr val="000000"/>
-                </a:solidFill>
-                <a:latin typeface="Calibri" panose="020F0502020204030204" charset="0"/>
-                <a:sym typeface="+mn-ea"/>
-              </a:rPr>
-              <a:t>tecnologias</a:t>
-            </a:r>
-            <a:endParaRPr lang="en-US" altLang="en-US" sz="2800" b="0" dirty="0">
-              <a:solidFill>
-                <a:srgbClr val="000000"/>
-              </a:solidFill>
-              <a:latin typeface="Calibri" panose="020F0502020204030204" charset="0"/>
-            </a:endParaRPr>
-          </a:p>
-          <a:p>
-            <a:pPr marL="342900" indent="-342900">
-              <a:buFont typeface="Arial" panose="020B0604020202020204" pitchFamily="34" charset="0"/>
-              <a:buAutoNum type="arabicPeriod"/>
-            </a:pPr>
-            <a:r>
-              <a:rPr lang="en-US" sz="2800" dirty="0" err="1" smtClean="0">
-                <a:solidFill>
-                  <a:srgbClr val="000000"/>
-                </a:solidFill>
-                <a:latin typeface="Calibri" panose="020F0502020204030204" charset="0"/>
-                <a:sym typeface="+mn-ea"/>
-              </a:rPr>
-              <a:t>Análise</a:t>
-            </a:r>
-            <a:r>
-              <a:rPr lang="en-US" sz="2800" dirty="0" smtClean="0">
-                <a:solidFill>
-                  <a:srgbClr val="000000"/>
-                </a:solidFill>
-                <a:latin typeface="Calibri" panose="020F0502020204030204" charset="0"/>
-                <a:sym typeface="+mn-ea"/>
-              </a:rPr>
-              <a:t> </a:t>
-            </a:r>
-            <a:r>
-              <a:rPr lang="en-US" sz="2800" dirty="0" err="1" smtClean="0">
-                <a:solidFill>
-                  <a:srgbClr val="000000"/>
-                </a:solidFill>
-                <a:latin typeface="Calibri" panose="020F0502020204030204" charset="0"/>
-                <a:sym typeface="+mn-ea"/>
-              </a:rPr>
-              <a:t>crítica</a:t>
-            </a:r>
-            <a:r>
-              <a:rPr lang="en-US" sz="2800" dirty="0" smtClean="0">
-                <a:solidFill>
-                  <a:srgbClr val="000000"/>
-                </a:solidFill>
-                <a:latin typeface="Calibri" panose="020F0502020204030204" charset="0"/>
-                <a:sym typeface="+mn-ea"/>
-              </a:rPr>
-              <a:t> </a:t>
-            </a:r>
-            <a:r>
-              <a:rPr lang="en-US" sz="2800" dirty="0">
-                <a:solidFill>
-                  <a:srgbClr val="000000"/>
-                </a:solidFill>
-                <a:latin typeface="Calibri" panose="020F0502020204030204" charset="0"/>
-                <a:sym typeface="+mn-ea"/>
-              </a:rPr>
-              <a:t>de </a:t>
-            </a:r>
-            <a:r>
-              <a:rPr lang="en-US" sz="2800" dirty="0" err="1" smtClean="0">
-                <a:solidFill>
-                  <a:srgbClr val="000000"/>
-                </a:solidFill>
-                <a:latin typeface="Calibri" panose="020F0502020204030204" charset="0"/>
-                <a:sym typeface="+mn-ea"/>
-              </a:rPr>
-              <a:t>funcionalidades</a:t>
-            </a:r>
-            <a:r>
-              <a:rPr lang="en-US" sz="2800" dirty="0">
-                <a:solidFill>
-                  <a:srgbClr val="000000"/>
-                </a:solidFill>
-                <a:latin typeface="Calibri" panose="020F0502020204030204" charset="0"/>
-                <a:sym typeface="+mn-ea"/>
-              </a:rPr>
-              <a:t> </a:t>
-            </a:r>
-            <a:r>
-              <a:rPr lang="en-US" sz="2800" dirty="0" smtClean="0">
-                <a:solidFill>
-                  <a:srgbClr val="000000"/>
-                </a:solidFill>
-                <a:latin typeface="Calibri" panose="020F0502020204030204" charset="0"/>
-                <a:sym typeface="+mn-ea"/>
-              </a:rPr>
-              <a:t>e </a:t>
-            </a:r>
-            <a:r>
-              <a:rPr lang="en-US" sz="2800" dirty="0" err="1">
-                <a:solidFill>
-                  <a:srgbClr val="000000"/>
-                </a:solidFill>
-                <a:latin typeface="Calibri" panose="020F0502020204030204" charset="0"/>
-                <a:sym typeface="+mn-ea"/>
-              </a:rPr>
-              <a:t>tecnologia</a:t>
-            </a:r>
-            <a:r>
-              <a:rPr lang="en-US" sz="2800" dirty="0">
-                <a:solidFill>
-                  <a:srgbClr val="000000"/>
-                </a:solidFill>
-                <a:latin typeface="Calibri" panose="020F0502020204030204" charset="0"/>
-                <a:sym typeface="+mn-ea"/>
-              </a:rPr>
-              <a:t> </a:t>
-            </a:r>
-            <a:r>
-              <a:rPr lang="en-US" sz="2800" dirty="0" err="1" smtClean="0">
-                <a:solidFill>
-                  <a:srgbClr val="000000"/>
-                </a:solidFill>
-                <a:latin typeface="Calibri" panose="020F0502020204030204" charset="0"/>
-                <a:sym typeface="+mn-ea"/>
-              </a:rPr>
-              <a:t>utilizada</a:t>
-            </a:r>
-            <a:r>
-              <a:rPr lang="en-US" sz="2800" dirty="0" smtClean="0">
-                <a:solidFill>
-                  <a:srgbClr val="000000"/>
-                </a:solidFill>
-                <a:latin typeface="Calibri" panose="020F0502020204030204" charset="0"/>
-                <a:sym typeface="+mn-ea"/>
-              </a:rPr>
-              <a:t>.</a:t>
-            </a:r>
-            <a:endParaRPr lang="en-US" altLang="en-US" sz="2800" b="0" dirty="0">
-              <a:solidFill>
-                <a:srgbClr val="000000"/>
-              </a:solidFill>
-              <a:latin typeface="Calibri" panose="020F0502020204030204" charset="0"/>
-            </a:endParaRPr>
-          </a:p>
-          <a:p>
-            <a:pPr marL="342900" indent="-342900">
-              <a:buFont typeface="Arial" panose="020B0604020202020204" pitchFamily="34" charset="0"/>
-              <a:buAutoNum type="arabicPeriod"/>
-            </a:pPr>
-            <a:r>
-              <a:rPr lang="en-US" sz="2800" dirty="0" err="1" smtClean="0">
-                <a:solidFill>
-                  <a:srgbClr val="000000"/>
-                </a:solidFill>
-                <a:latin typeface="Calibri" panose="020F0502020204030204" charset="0"/>
-                <a:sym typeface="+mn-ea"/>
-              </a:rPr>
-              <a:t>Definição</a:t>
-            </a:r>
-            <a:r>
-              <a:rPr lang="en-US" sz="2800" dirty="0" smtClean="0">
-                <a:solidFill>
-                  <a:srgbClr val="000000"/>
-                </a:solidFill>
-                <a:latin typeface="Calibri" panose="020F0502020204030204" charset="0"/>
-                <a:sym typeface="+mn-ea"/>
-              </a:rPr>
-              <a:t> de </a:t>
-            </a:r>
-            <a:r>
-              <a:rPr lang="en-US" sz="2800" dirty="0" err="1" smtClean="0">
-                <a:solidFill>
-                  <a:srgbClr val="000000"/>
-                </a:solidFill>
-                <a:latin typeface="Calibri" panose="020F0502020204030204" charset="0"/>
-                <a:sym typeface="+mn-ea"/>
-              </a:rPr>
-              <a:t>modelo</a:t>
-            </a:r>
-            <a:r>
-              <a:rPr lang="en-US" sz="2800" dirty="0" smtClean="0">
-                <a:solidFill>
-                  <a:srgbClr val="000000"/>
-                </a:solidFill>
-                <a:latin typeface="Calibri" panose="020F0502020204030204" charset="0"/>
-                <a:sym typeface="+mn-ea"/>
-              </a:rPr>
-              <a:t> e </a:t>
-            </a:r>
-            <a:r>
-              <a:rPr lang="en-US" sz="2800" dirty="0" err="1" smtClean="0">
-                <a:solidFill>
-                  <a:srgbClr val="000000"/>
-                </a:solidFill>
-                <a:latin typeface="Calibri" panose="020F0502020204030204" charset="0"/>
-                <a:sym typeface="+mn-ea"/>
-              </a:rPr>
-              <a:t>implementação</a:t>
-            </a:r>
-            <a:endParaRPr lang="en-US" sz="2800" dirty="0" smtClean="0">
-              <a:solidFill>
-                <a:srgbClr val="000000"/>
-              </a:solidFill>
-              <a:latin typeface="Calibri" panose="020F0502020204030204" charset="0"/>
-              <a:sym typeface="+mn-ea"/>
-            </a:endParaRPr>
-          </a:p>
-          <a:p>
-            <a:pPr marL="342900" indent="-342900">
-              <a:buFont typeface="Arial" panose="020B0604020202020204" pitchFamily="34" charset="0"/>
-              <a:buAutoNum type="arabicPeriod"/>
-            </a:pPr>
-            <a:r>
-              <a:rPr lang="en-US" sz="2800" dirty="0" err="1" smtClean="0">
-                <a:solidFill>
-                  <a:srgbClr val="000000"/>
-                </a:solidFill>
-                <a:latin typeface="Calibri" panose="020F0502020204030204" charset="0"/>
-                <a:sym typeface="+mn-ea"/>
-              </a:rPr>
-              <a:t>Finalização</a:t>
-            </a:r>
-            <a:r>
-              <a:rPr lang="en-US" sz="2800" dirty="0" smtClean="0">
-                <a:solidFill>
-                  <a:srgbClr val="000000"/>
-                </a:solidFill>
-                <a:latin typeface="Calibri" panose="020F0502020204030204" charset="0"/>
-                <a:sym typeface="+mn-ea"/>
-              </a:rPr>
-              <a:t> </a:t>
-            </a:r>
-            <a:r>
-              <a:rPr lang="en-US" sz="2800" dirty="0">
-                <a:solidFill>
-                  <a:srgbClr val="000000"/>
-                </a:solidFill>
-                <a:latin typeface="Calibri" panose="020F0502020204030204" charset="0"/>
-                <a:sym typeface="+mn-ea"/>
-              </a:rPr>
-              <a:t>do </a:t>
-            </a:r>
-            <a:r>
-              <a:rPr lang="en-US" sz="2800" dirty="0" err="1">
-                <a:solidFill>
-                  <a:srgbClr val="000000"/>
-                </a:solidFill>
-                <a:latin typeface="Calibri" panose="020F0502020204030204" charset="0"/>
-                <a:sym typeface="+mn-ea"/>
-              </a:rPr>
-              <a:t>trabalho</a:t>
-            </a:r>
-            <a:endParaRPr lang="pt-BR" altLang="en-US" dirty="0"/>
-          </a:p>
-        </p:txBody>
-      </p:sp>
-      <p:sp>
-        <p:nvSpPr>
-          <p:cNvPr id="2" name="Título 1"/>
-          <p:cNvSpPr>
-            <a:spLocks noGrp="1"/>
-          </p:cNvSpPr>
-          <p:nvPr>
-            <p:ph type="title"/>
-          </p:nvPr>
-        </p:nvSpPr>
-        <p:spPr/>
-        <p:txBody>
-          <a:bodyPr/>
-          <a:lstStyle/>
-          <a:p>
-            <a:r>
-              <a:rPr lang="pt-BR" altLang="en-US"/>
-              <a:t>Lista de atividades</a:t>
-            </a:r>
-          </a:p>
-        </p:txBody>
-      </p:sp>
-    </p:spTree>
-  </p:cSld>
-  <p:clrMapOvr>
-    <a:masterClrMapping/>
-  </p:clrMapOvr>
-  <p:timing>
-    <p:tnLst>
-      <p:par>
-        <p:cTn id="1" dur="indefinite" restart="never" nodeType="tmRoot"/>
-      </p:par>
-    </p:tnLst>
-  </p:timing>
 </p:sld>
 </file>
 
@@ -5939,313 +11075,165 @@
         <p:spPr/>
         <p:txBody>
           <a:bodyPr>
-            <a:normAutofit fontScale="62500" lnSpcReduction="20000"/>
+            <a:noAutofit/>
           </a:bodyPr>
           <a:lstStyle/>
           <a:p>
-            <a:r>
-              <a:rPr lang="pt-BR" dirty="0"/>
-              <a:t>CUMMINS, Fred A. Enterprise </a:t>
-            </a:r>
-            <a:r>
-              <a:rPr lang="pt-BR" dirty="0" err="1"/>
-              <a:t>integration</a:t>
-            </a:r>
-            <a:r>
-              <a:rPr lang="pt-BR" dirty="0"/>
-              <a:t>: </a:t>
-            </a:r>
-            <a:r>
-              <a:rPr lang="pt-BR" dirty="0" err="1"/>
-              <a:t>an</a:t>
-            </a:r>
-            <a:r>
-              <a:rPr lang="pt-BR" dirty="0"/>
+            <a:pPr rtl="0"/>
+            <a:r>
+              <a:rPr lang="pt-BR" sz="2000" b="0" dirty="0">
+                <a:solidFill>
+                  <a:srgbClr val="000000"/>
+                </a:solidFill>
+                <a:effectLst/>
+              </a:rPr>
+              <a:t>Abordamos a necessidade de mercado.</a:t>
+            </a:r>
+          </a:p>
+          <a:p>
+            <a:pPr lvl="1"/>
+            <a:r>
+              <a:rPr lang="pt-BR" sz="2000" b="0" dirty="0">
+                <a:solidFill>
+                  <a:srgbClr val="000000"/>
+                </a:solidFill>
+                <a:effectLst/>
+              </a:rPr>
+              <a:t>Integração entre sistemas</a:t>
+            </a:r>
+          </a:p>
+          <a:p>
+            <a:pPr rtl="0"/>
+            <a:r>
+              <a:rPr lang="pt-BR" sz="2000" b="0" dirty="0">
+                <a:solidFill>
+                  <a:srgbClr val="000000"/>
+                </a:solidFill>
+                <a:effectLst/>
+              </a:rPr>
+              <a:t>O alto custo no desenvolvimento </a:t>
+            </a:r>
+          </a:p>
+          <a:p>
+            <a:pPr lvl="1"/>
+            <a:r>
+              <a:rPr lang="pt-BR" sz="2000" b="0" dirty="0">
+                <a:solidFill>
+                  <a:srgbClr val="000000"/>
+                </a:solidFill>
+                <a:effectLst/>
+              </a:rPr>
+              <a:t>como análise entre os sistemas, </a:t>
+            </a:r>
+          </a:p>
+          <a:p>
+            <a:pPr lvl="1"/>
+            <a:r>
+              <a:rPr lang="pt-BR" sz="2000" b="0" dirty="0">
+                <a:solidFill>
+                  <a:srgbClr val="000000"/>
+                </a:solidFill>
+                <a:effectLst/>
+              </a:rPr>
+              <a:t>criação e manutenção de estruturas, </a:t>
+            </a:r>
+          </a:p>
+          <a:p>
+            <a:pPr lvl="1"/>
+            <a:r>
+              <a:rPr lang="pt-BR" sz="2000" b="0" dirty="0">
+                <a:solidFill>
+                  <a:srgbClr val="000000"/>
+                </a:solidFill>
+                <a:effectLst/>
+              </a:rPr>
+              <a:t>desenvolvimento propriamente dito </a:t>
+            </a:r>
+          </a:p>
+          <a:p>
+            <a:pPr lvl="1"/>
+            <a:r>
+              <a:rPr lang="pt-BR" sz="2000" b="0" dirty="0">
+                <a:solidFill>
+                  <a:srgbClr val="000000"/>
+                </a:solidFill>
+                <a:effectLst/>
+              </a:rPr>
+              <a:t>adaptação na adoção de nova metodologia, </a:t>
+            </a:r>
+          </a:p>
+          <a:p>
+            <a:pPr lvl="1"/>
+            <a:r>
+              <a:rPr lang="pt-BR" sz="2000" dirty="0">
+                <a:solidFill>
+                  <a:srgbClr val="000000"/>
+                </a:solidFill>
+              </a:rPr>
+              <a:t>Tempo </a:t>
+            </a:r>
+            <a:r>
+              <a:rPr lang="pt-BR" sz="2000" b="0" dirty="0">
+                <a:solidFill>
+                  <a:srgbClr val="000000"/>
+                </a:solidFill>
+                <a:effectLst/>
+              </a:rPr>
+              <a:t>até a sua conclusão.</a:t>
+            </a:r>
+          </a:p>
+          <a:p>
+            <a:pPr rtl="0"/>
+            <a:r>
+              <a:rPr lang="pt-BR" sz="2000" b="0" dirty="0">
+                <a:solidFill>
+                  <a:srgbClr val="000000"/>
+                </a:solidFill>
+                <a:effectLst/>
+              </a:rPr>
+              <a:t>Abordagem de uma ferramenta </a:t>
+            </a:r>
+            <a:r>
+              <a:rPr lang="pt-BR" sz="2000" b="0" dirty="0" err="1">
+                <a:solidFill>
+                  <a:srgbClr val="000000"/>
+                </a:solidFill>
+                <a:effectLst/>
+              </a:rPr>
+              <a:t>cloud</a:t>
+            </a:r>
+            <a:r>
+              <a:rPr lang="pt-BR" sz="2000" b="0" dirty="0">
+                <a:solidFill>
+                  <a:srgbClr val="000000"/>
+                </a:solidFill>
+                <a:effectLst/>
+              </a:rPr>
               <a:t> </a:t>
             </a:r>
-            <a:r>
-              <a:rPr lang="pt-BR" dirty="0" err="1"/>
-              <a:t>architecture</a:t>
-            </a:r>
-            <a:r>
-              <a:rPr lang="pt-BR" dirty="0"/>
-              <a:t> for </a:t>
-            </a:r>
-            <a:r>
-              <a:rPr lang="pt-BR" dirty="0" err="1"/>
-              <a:t>enterprise</a:t>
-            </a:r>
-            <a:r>
-              <a:rPr lang="pt-BR" dirty="0"/>
-              <a:t> </a:t>
-            </a:r>
-            <a:r>
-              <a:rPr lang="pt-BR" dirty="0" err="1"/>
-              <a:t>application</a:t>
-            </a:r>
-            <a:r>
-              <a:rPr lang="pt-BR" dirty="0"/>
-              <a:t> </a:t>
-            </a:r>
-            <a:r>
-              <a:rPr lang="pt-BR" dirty="0" err="1"/>
-              <a:t>and</a:t>
-            </a:r>
-            <a:r>
-              <a:rPr lang="pt-BR" dirty="0"/>
-              <a:t> systems </a:t>
-            </a:r>
-            <a:r>
-              <a:rPr lang="pt-BR" dirty="0" err="1"/>
-              <a:t>integration</a:t>
-            </a:r>
-            <a:r>
-              <a:rPr lang="pt-BR" dirty="0"/>
-              <a:t>. 2002. </a:t>
-            </a:r>
-          </a:p>
-          <a:p>
-            <a:r>
-              <a:rPr lang="pt-BR" dirty="0"/>
-              <a:t>FERNANDES, Miguel Lemos Machado Vilaça. Enterprise </a:t>
-            </a:r>
-            <a:r>
-              <a:rPr lang="pt-BR" dirty="0" err="1"/>
-              <a:t>Architecture</a:t>
-            </a:r>
-            <a:r>
-              <a:rPr lang="pt-BR" dirty="0"/>
-              <a:t> as a </a:t>
-            </a:r>
-            <a:r>
-              <a:rPr lang="pt-BR" dirty="0" err="1"/>
-              <a:t>service-oriented</a:t>
-            </a:r>
-            <a:r>
-              <a:rPr lang="pt-BR" dirty="0"/>
-              <a:t> </a:t>
-            </a:r>
-            <a:r>
-              <a:rPr lang="pt-BR" dirty="0" err="1"/>
-              <a:t>model</a:t>
-            </a:r>
-            <a:r>
-              <a:rPr lang="pt-BR" dirty="0"/>
-              <a:t> </a:t>
-            </a:r>
-            <a:r>
-              <a:rPr lang="pt-BR" dirty="0" err="1"/>
-              <a:t>to</a:t>
-            </a:r>
-            <a:r>
-              <a:rPr lang="pt-BR" dirty="0"/>
-              <a:t> </a:t>
-            </a:r>
-            <a:r>
-              <a:rPr lang="pt-BR" dirty="0" err="1"/>
-              <a:t>sustainably</a:t>
-            </a:r>
-            <a:r>
-              <a:rPr lang="pt-BR" dirty="0"/>
-              <a:t> </a:t>
-            </a:r>
-            <a:r>
-              <a:rPr lang="pt-BR" dirty="0" err="1"/>
-              <a:t>support</a:t>
-            </a:r>
-            <a:r>
-              <a:rPr lang="pt-BR" dirty="0"/>
-              <a:t> IT Management. 2017. </a:t>
-            </a:r>
-          </a:p>
-          <a:p>
-            <a:r>
-              <a:rPr lang="pt-BR" dirty="0"/>
-              <a:t>ABILIO, Ramon et al. A Case </a:t>
-            </a:r>
-            <a:r>
-              <a:rPr lang="pt-BR" dirty="0" err="1"/>
-              <a:t>study</a:t>
-            </a:r>
-            <a:r>
-              <a:rPr lang="pt-BR" dirty="0"/>
-              <a:t> </a:t>
-            </a:r>
-            <a:r>
-              <a:rPr lang="pt-BR" dirty="0" err="1"/>
-              <a:t>on</a:t>
-            </a:r>
-            <a:r>
-              <a:rPr lang="pt-BR" dirty="0"/>
-              <a:t> a </a:t>
-            </a:r>
-            <a:r>
-              <a:rPr lang="pt-BR" dirty="0" err="1"/>
-              <a:t>service-based</a:t>
-            </a:r>
-            <a:r>
-              <a:rPr lang="pt-BR" dirty="0"/>
-              <a:t> </a:t>
-            </a:r>
-            <a:r>
-              <a:rPr lang="pt-BR" dirty="0" err="1"/>
-              <a:t>information</a:t>
-            </a:r>
-            <a:r>
-              <a:rPr lang="pt-BR" dirty="0"/>
-              <a:t> systems </a:t>
-            </a:r>
-            <a:r>
-              <a:rPr lang="pt-BR" dirty="0" err="1"/>
-              <a:t>integration</a:t>
-            </a:r>
-            <a:r>
-              <a:rPr lang="pt-BR" dirty="0"/>
-              <a:t> in </a:t>
-            </a:r>
-            <a:r>
-              <a:rPr lang="pt-BR" dirty="0" err="1"/>
-              <a:t>academic</a:t>
-            </a:r>
-            <a:r>
-              <a:rPr lang="pt-BR" dirty="0"/>
-              <a:t> </a:t>
-            </a:r>
-            <a:r>
-              <a:rPr lang="pt-BR" dirty="0" err="1"/>
-              <a:t>environment</a:t>
-            </a:r>
-            <a:r>
-              <a:rPr lang="pt-BR" dirty="0"/>
-              <a:t>. Revista Brasileira de Computação Aplicada, v. 11, n. 1, p. 2-13, 2019. </a:t>
-            </a:r>
-          </a:p>
-          <a:p>
-            <a:r>
-              <a:rPr lang="pt-BR" dirty="0"/>
-              <a:t>SIQUEIRA, Otávio Manoel Pereira; DE OLIVEIRA, Robert Anderson Nogueira; DE OLIVEIRA, </a:t>
-            </a:r>
-            <a:r>
-              <a:rPr lang="pt-BR" dirty="0" err="1"/>
-              <a:t>Adicinéia</a:t>
-            </a:r>
-            <a:r>
-              <a:rPr lang="pt-BR" dirty="0"/>
-              <a:t> Aparecida. Integração de sistemas de informação em saúde com a utilização de Service </a:t>
-            </a:r>
-            <a:r>
-              <a:rPr lang="pt-BR" dirty="0" err="1"/>
-              <a:t>Oriented</a:t>
-            </a:r>
-            <a:r>
-              <a:rPr lang="pt-BR" dirty="0"/>
-              <a:t> </a:t>
-            </a:r>
-            <a:r>
-              <a:rPr lang="pt-BR" dirty="0" err="1"/>
-              <a:t>Architecture</a:t>
-            </a:r>
-            <a:r>
-              <a:rPr lang="pt-BR" dirty="0"/>
-              <a:t> (SOA). JISTEM: </a:t>
-            </a:r>
-            <a:r>
-              <a:rPr lang="pt-BR" dirty="0" err="1"/>
-              <a:t>Journal</a:t>
-            </a:r>
-            <a:r>
-              <a:rPr lang="pt-BR" dirty="0"/>
-              <a:t> </a:t>
-            </a:r>
-            <a:r>
-              <a:rPr lang="pt-BR" dirty="0" err="1"/>
-              <a:t>of</a:t>
-            </a:r>
-            <a:r>
-              <a:rPr lang="pt-BR" dirty="0"/>
-              <a:t> </a:t>
-            </a:r>
-            <a:r>
-              <a:rPr lang="pt-BR" dirty="0" err="1"/>
-              <a:t>Information</a:t>
-            </a:r>
-            <a:r>
-              <a:rPr lang="pt-BR" dirty="0"/>
-              <a:t> Systems </a:t>
-            </a:r>
-            <a:r>
-              <a:rPr lang="pt-BR" dirty="0" err="1"/>
-              <a:t>and</a:t>
-            </a:r>
-            <a:r>
-              <a:rPr lang="pt-BR" dirty="0"/>
-              <a:t> Technology Management, v. 13, n. 2, p. 255-274, 2016. </a:t>
-            </a:r>
-          </a:p>
-          <a:p>
-            <a:r>
-              <a:rPr lang="pt-BR" dirty="0"/>
-              <a:t>TEIXEIRA, Pedro. Professional Node. </a:t>
-            </a:r>
-            <a:r>
-              <a:rPr lang="pt-BR" dirty="0" err="1"/>
-              <a:t>js</a:t>
-            </a:r>
-            <a:r>
-              <a:rPr lang="pt-BR" dirty="0"/>
-              <a:t>: </a:t>
-            </a:r>
-            <a:r>
-              <a:rPr lang="pt-BR" dirty="0" err="1"/>
-              <a:t>Building</a:t>
-            </a:r>
-            <a:r>
-              <a:rPr lang="pt-BR" dirty="0"/>
-              <a:t> </a:t>
-            </a:r>
-            <a:r>
-              <a:rPr lang="pt-BR" dirty="0" err="1"/>
-              <a:t>Javascript</a:t>
-            </a:r>
-            <a:r>
-              <a:rPr lang="pt-BR" dirty="0"/>
-              <a:t> </a:t>
-            </a:r>
-            <a:r>
-              <a:rPr lang="pt-BR" dirty="0" err="1"/>
-              <a:t>based</a:t>
-            </a:r>
-            <a:r>
-              <a:rPr lang="pt-BR" dirty="0"/>
-              <a:t> </a:t>
-            </a:r>
-            <a:r>
-              <a:rPr lang="pt-BR" dirty="0" err="1"/>
-              <a:t>scalable</a:t>
-            </a:r>
-            <a:r>
-              <a:rPr lang="pt-BR" dirty="0"/>
-              <a:t> software. 2012. </a:t>
-            </a:r>
-          </a:p>
-          <a:p>
-            <a:r>
-              <a:rPr lang="pt-BR" dirty="0"/>
-              <a:t>SAYÃO, Luís Fernando; MARCONDES, Carlos Henrique. O desafio da interoperabilidade e as novas perspectivas para as bibliotecas digitais. </a:t>
-            </a:r>
-            <a:r>
-              <a:rPr lang="pt-BR" dirty="0" err="1"/>
-              <a:t>Transinformação</a:t>
-            </a:r>
-            <a:r>
-              <a:rPr lang="pt-BR" dirty="0"/>
-              <a:t>, v. 20, n. 2, p. 133-148, 2008. </a:t>
-            </a:r>
-          </a:p>
-          <a:p>
-            <a:r>
-              <a:rPr lang="pt-BR" dirty="0"/>
-              <a:t>TEIXEIRA, Milene Santos et al. Sistema web para gerenciamento e acompanhamento de uso de medicação em ambientes de vivência assistida. In: Anais do XII Simpósio Brasileiro de Sistemas de Informação. SBC, 2016. p. 278-284. </a:t>
+          </a:p>
+          <a:p>
+            <a:pPr lvl="1"/>
+            <a:r>
+              <a:rPr lang="pt-BR" sz="2000" b="0" dirty="0">
+                <a:solidFill>
+                  <a:srgbClr val="000000"/>
+                </a:solidFill>
+                <a:effectLst/>
+              </a:rPr>
+              <a:t>para resolver essa demanda de uma integração direta</a:t>
+            </a:r>
+          </a:p>
+          <a:p>
+            <a:pPr lvl="1"/>
+            <a:r>
+              <a:rPr lang="pt-BR" sz="2000" b="0" dirty="0">
+                <a:solidFill>
+                  <a:srgbClr val="000000"/>
+                </a:solidFill>
+                <a:effectLst/>
+              </a:rPr>
+              <a:t>sem a necessidade de transformação de dados</a:t>
             </a:r>
           </a:p>
         </p:txBody>
@@ -6266,24 +11254,22 @@
           <a:lstStyle/>
           <a:p>
             <a:r>
-              <a:rPr lang="pt-BR" altLang="en-US"/>
-              <a:t>Referencias Bibliograficas</a:t>
+              <a:rPr lang="pt-BR" altLang="en-US" dirty="0"/>
+              <a:t>Conclusões</a:t>
             </a:r>
           </a:p>
         </p:txBody>
       </p:sp>
     </p:spTree>
+    <p:extLst>
+      <p:ext uri="{BB962C8B-B14F-4D97-AF65-F5344CB8AC3E}">
+        <p14:creationId xmlns:p14="http://schemas.microsoft.com/office/powerpoint/2010/main" val="804739813"/>
+      </p:ext>
+    </p:extLst>
   </p:cSld>
   <p:clrMapOvr>
     <a:masterClrMapping/>
   </p:clrMapOvr>
-  <p:timing>
-    <p:tnLst>
-      <p:par>
-        <p:cTn id="1" dur="indefinite" restart="never" nodeType="tmRoot"/>
-      </p:par>
-    </p:tnLst>
-  </p:timing>
 </p:sld>
 </file>
 
@@ -6306,289 +11292,203 @@
       </p:grpSpPr>
       <p:sp>
         <p:nvSpPr>
-          <p:cNvPr id="2" name="Title 1"/>
+          <p:cNvPr id="3" name="Espaço Reservado para Conteúdo 2"/>
           <p:cNvSpPr>
             <a:spLocks noGrp="1"/>
           </p:cNvSpPr>
           <p:nvPr>
-            <p:ph type="ctrTitle"/>
+            <p:ph idx="1"/>
           </p:nvPr>
         </p:nvSpPr>
         <p:spPr/>
         <p:txBody>
           <a:bodyPr>
-            <a:normAutofit/>
+            <a:noAutofit/>
           </a:bodyPr>
           <a:lstStyle/>
           <a:p>
             <a:r>
-              <a:rPr lang="pt-BR" dirty="0">
-                <a:effectLst/>
-              </a:rPr>
-              <a:t>SUÍTE DE INTEGRAÇÃO DE SISTEMAS WEB </a:t>
-            </a:r>
-            <a:endParaRPr lang="en-US" dirty="0"/>
+              <a:rPr lang="pt-BR" sz="2000" b="0" dirty="0">
+                <a:solidFill>
+                  <a:srgbClr val="000000"/>
+                </a:solidFill>
+                <a:effectLst/>
+              </a:rPr>
+              <a:t>Porém soluções </a:t>
+            </a:r>
+            <a:r>
+              <a:rPr lang="pt-BR" sz="2000" b="0" dirty="0" err="1">
+                <a:solidFill>
+                  <a:srgbClr val="000000"/>
+                </a:solidFill>
+                <a:effectLst/>
+              </a:rPr>
+              <a:t>PaaS</a:t>
+            </a:r>
+            <a:r>
+              <a:rPr lang="pt-BR" sz="2000" b="0" dirty="0">
+                <a:solidFill>
+                  <a:srgbClr val="000000"/>
+                </a:solidFill>
+                <a:effectLst/>
+              </a:rPr>
+              <a:t>, </a:t>
+            </a:r>
+            <a:r>
+              <a:rPr lang="pt-BR" sz="2000" b="0" dirty="0" err="1">
+                <a:solidFill>
+                  <a:srgbClr val="000000"/>
+                </a:solidFill>
+                <a:effectLst/>
+              </a:rPr>
+              <a:t>IaaS</a:t>
+            </a:r>
+            <a:r>
+              <a:rPr lang="pt-BR" sz="2000" b="0" dirty="0">
+                <a:solidFill>
+                  <a:srgbClr val="000000"/>
+                </a:solidFill>
+                <a:effectLst/>
+              </a:rPr>
+              <a:t> e SaaS cada vez mais presentes no mercado</a:t>
+            </a:r>
+          </a:p>
+          <a:p>
+            <a:pPr lvl="1"/>
+            <a:r>
+              <a:rPr lang="pt-BR" sz="2000" b="0" dirty="0">
+                <a:solidFill>
+                  <a:srgbClr val="000000"/>
+                </a:solidFill>
+                <a:effectLst/>
+              </a:rPr>
+              <a:t>terceirizando responsabilidades </a:t>
+            </a:r>
+          </a:p>
+          <a:p>
+            <a:pPr lvl="2"/>
+            <a:r>
+              <a:rPr lang="pt-BR" sz="2000" b="0" dirty="0">
+                <a:solidFill>
+                  <a:srgbClr val="000000"/>
+                </a:solidFill>
+                <a:effectLst/>
+              </a:rPr>
+              <a:t>funcionamento, </a:t>
+            </a:r>
+          </a:p>
+          <a:p>
+            <a:pPr lvl="2"/>
+            <a:r>
+              <a:rPr lang="pt-BR" sz="2000" b="0" dirty="0">
+                <a:solidFill>
+                  <a:srgbClr val="000000"/>
+                </a:solidFill>
+                <a:effectLst/>
+              </a:rPr>
+              <a:t>infraestrutura </a:t>
+            </a:r>
+          </a:p>
+          <a:p>
+            <a:pPr lvl="2"/>
+            <a:r>
+              <a:rPr lang="pt-BR" sz="2000" b="0" dirty="0">
+                <a:solidFill>
+                  <a:srgbClr val="000000"/>
+                </a:solidFill>
+                <a:effectLst/>
+              </a:rPr>
+              <a:t>e as vezes até de operação, </a:t>
+            </a:r>
+          </a:p>
+          <a:p>
+            <a:pPr lvl="1"/>
+            <a:r>
+              <a:rPr lang="pt-BR" sz="2000" b="0" dirty="0">
+                <a:solidFill>
+                  <a:srgbClr val="000000"/>
+                </a:solidFill>
+                <a:effectLst/>
+              </a:rPr>
+              <a:t>Aumentando... </a:t>
+            </a:r>
+          </a:p>
+          <a:p>
+            <a:pPr lvl="2"/>
+            <a:r>
+              <a:rPr lang="pt-BR" sz="2000" b="0" dirty="0">
+                <a:solidFill>
+                  <a:srgbClr val="000000"/>
+                </a:solidFill>
+                <a:effectLst/>
+              </a:rPr>
+              <a:t>poder de processamento </a:t>
+            </a:r>
+          </a:p>
+          <a:p>
+            <a:pPr lvl="2"/>
+            <a:r>
+              <a:rPr lang="pt-BR" sz="2000" b="0" dirty="0">
+                <a:solidFill>
+                  <a:srgbClr val="000000"/>
+                </a:solidFill>
+                <a:effectLst/>
+              </a:rPr>
+              <a:t>tempo de resposta na criação de uma nova solução </a:t>
+            </a:r>
+          </a:p>
+          <a:p>
+            <a:pPr lvl="2"/>
+            <a:r>
+              <a:rPr lang="pt-BR" sz="2000" b="0" dirty="0">
+                <a:solidFill>
+                  <a:srgbClr val="000000"/>
+                </a:solidFill>
+                <a:effectLst/>
+              </a:rPr>
+              <a:t>sem um alto custo.</a:t>
+            </a:r>
+          </a:p>
+          <a:p>
+            <a:pPr rtl="0"/>
+            <a:r>
+              <a:rPr lang="pt-BR" sz="2000" b="0" dirty="0">
+                <a:solidFill>
+                  <a:srgbClr val="000000"/>
+                </a:solidFill>
+                <a:effectLst/>
+              </a:rPr>
+              <a:t>E nesses casos, na visão de problemas de integração, o mercado apresenta soluções extremamente completas e de fácil operação. </a:t>
+            </a:r>
           </a:p>
         </p:txBody>
       </p:sp>
       <p:sp>
         <p:nvSpPr>
-          <p:cNvPr id="4" name="Subtitle 2"/>
+          <p:cNvPr id="2" name="Título 1"/>
           <p:cNvSpPr>
             <a:spLocks noGrp="1"/>
           </p:cNvSpPr>
-          <p:nvPr/>
+          <p:nvPr>
+            <p:ph type="title"/>
+          </p:nvPr>
         </p:nvSpPr>
-        <p:spPr>
-          <a:xfrm>
-            <a:off x="2153438" y="3915374"/>
-            <a:ext cx="9144000" cy="1133145"/>
-          </a:xfrm>
-          <a:prstGeom prst="rect">
-            <a:avLst/>
-          </a:prstGeom>
-        </p:spPr>
+        <p:spPr/>
         <p:txBody>
-          <a:bodyPr vert="horz" lIns="91440" tIns="45720" rIns="91440" bIns="45720" rtlCol="0">
-            <a:normAutofit fontScale="92500" lnSpcReduction="20000"/>
-          </a:bodyPr>
-          <a:lstStyle>
-            <a:lvl1pPr marL="0" indent="0" algn="ctr" defTabSz="914400" rtl="0" eaLnBrk="1" latinLnBrk="0" hangingPunct="1">
-              <a:lnSpc>
-                <a:spcPct val="90000"/>
-              </a:lnSpc>
-              <a:spcBef>
-                <a:spcPts val="1000"/>
-              </a:spcBef>
-              <a:buFont typeface="Arial" panose="020B0604020202020204" pitchFamily="34" charset="0"/>
-              <a:buNone/>
-              <a:defRPr sz="2400" kern="1200">
-                <a:solidFill>
-                  <a:schemeClr val="tx1"/>
-                </a:solidFill>
-                <a:latin typeface="+mn-lt"/>
-                <a:ea typeface="+mn-ea"/>
-                <a:cs typeface="+mn-cs"/>
-              </a:defRPr>
-            </a:lvl1pPr>
-            <a:lvl2pPr marL="457200" indent="0" algn="ctr" defTabSz="914400" rtl="0" eaLnBrk="1" latinLnBrk="0" hangingPunct="1">
-              <a:lnSpc>
-                <a:spcPct val="90000"/>
-              </a:lnSpc>
-              <a:spcBef>
-                <a:spcPts val="500"/>
-              </a:spcBef>
-              <a:buFont typeface="Arial" panose="020B0604020202020204" pitchFamily="34" charset="0"/>
-              <a:buNone/>
-              <a:defRPr sz="2000" kern="1200">
-                <a:solidFill>
-                  <a:schemeClr val="tx1"/>
-                </a:solidFill>
-                <a:latin typeface="+mn-lt"/>
-                <a:ea typeface="+mn-ea"/>
-                <a:cs typeface="+mn-cs"/>
-              </a:defRPr>
-            </a:lvl2pPr>
-            <a:lvl3pPr marL="914400" indent="0" algn="ctr" defTabSz="914400" rtl="0" eaLnBrk="1" latinLnBrk="0" hangingPunct="1">
-              <a:lnSpc>
-                <a:spcPct val="90000"/>
-              </a:lnSpc>
-              <a:spcBef>
-                <a:spcPts val="500"/>
-              </a:spcBef>
-              <a:buFont typeface="Arial" panose="020B0604020202020204" pitchFamily="34" charset="0"/>
-              <a:buNone/>
-              <a:defRPr sz="1800" kern="1200">
-                <a:solidFill>
-                  <a:schemeClr val="tx1"/>
-                </a:solidFill>
-                <a:latin typeface="+mn-lt"/>
-                <a:ea typeface="+mn-ea"/>
-                <a:cs typeface="+mn-cs"/>
-              </a:defRPr>
-            </a:lvl3pPr>
-            <a:lvl4pPr marL="1371600" indent="0" algn="ctr" defTabSz="914400" rtl="0" eaLnBrk="1" latinLnBrk="0" hangingPunct="1">
-              <a:lnSpc>
-                <a:spcPct val="90000"/>
-              </a:lnSpc>
-              <a:spcBef>
-                <a:spcPts val="500"/>
-              </a:spcBef>
-              <a:buFont typeface="Arial" panose="020B0604020202020204" pitchFamily="34" charset="0"/>
-              <a:buNone/>
-              <a:defRPr sz="1600" kern="1200">
-                <a:solidFill>
-                  <a:schemeClr val="tx1"/>
-                </a:solidFill>
-                <a:latin typeface="+mn-lt"/>
-                <a:ea typeface="+mn-ea"/>
-                <a:cs typeface="+mn-cs"/>
-              </a:defRPr>
-            </a:lvl4pPr>
-            <a:lvl5pPr marL="1828800" indent="0" algn="ctr" defTabSz="914400" rtl="0" eaLnBrk="1" latinLnBrk="0" hangingPunct="1">
-              <a:lnSpc>
-                <a:spcPct val="90000"/>
-              </a:lnSpc>
-              <a:spcBef>
-                <a:spcPts val="500"/>
-              </a:spcBef>
-              <a:buFont typeface="Arial" panose="020B0604020202020204" pitchFamily="34" charset="0"/>
-              <a:buNone/>
-              <a:defRPr sz="1600" kern="1200">
-                <a:solidFill>
-                  <a:schemeClr val="tx1"/>
-                </a:solidFill>
-                <a:latin typeface="+mn-lt"/>
-                <a:ea typeface="+mn-ea"/>
-                <a:cs typeface="+mn-cs"/>
-              </a:defRPr>
-            </a:lvl5pPr>
-            <a:lvl6pPr marL="2286000" indent="0" algn="ctr" defTabSz="914400" rtl="0" eaLnBrk="1" latinLnBrk="0" hangingPunct="1">
-              <a:lnSpc>
-                <a:spcPct val="90000"/>
-              </a:lnSpc>
-              <a:spcBef>
-                <a:spcPts val="500"/>
-              </a:spcBef>
-              <a:buFont typeface="Arial" panose="020B0604020202020204" pitchFamily="34" charset="0"/>
-              <a:buNone/>
-              <a:defRPr sz="1600" kern="1200">
-                <a:solidFill>
-                  <a:schemeClr val="tx1"/>
-                </a:solidFill>
-                <a:latin typeface="+mn-lt"/>
-                <a:ea typeface="+mn-ea"/>
-                <a:cs typeface="+mn-cs"/>
-              </a:defRPr>
-            </a:lvl6pPr>
-            <a:lvl7pPr marL="2743200" indent="0" algn="ctr" defTabSz="914400" rtl="0" eaLnBrk="1" latinLnBrk="0" hangingPunct="1">
-              <a:lnSpc>
-                <a:spcPct val="90000"/>
-              </a:lnSpc>
-              <a:spcBef>
-                <a:spcPts val="500"/>
-              </a:spcBef>
-              <a:buFont typeface="Arial" panose="020B0604020202020204" pitchFamily="34" charset="0"/>
-              <a:buNone/>
-              <a:defRPr sz="1600" kern="1200">
-                <a:solidFill>
-                  <a:schemeClr val="tx1"/>
-                </a:solidFill>
-                <a:latin typeface="+mn-lt"/>
-                <a:ea typeface="+mn-ea"/>
-                <a:cs typeface="+mn-cs"/>
-              </a:defRPr>
-            </a:lvl7pPr>
-            <a:lvl8pPr marL="3200400" indent="0" algn="ctr" defTabSz="914400" rtl="0" eaLnBrk="1" latinLnBrk="0" hangingPunct="1">
-              <a:lnSpc>
-                <a:spcPct val="90000"/>
-              </a:lnSpc>
-              <a:spcBef>
-                <a:spcPts val="500"/>
-              </a:spcBef>
-              <a:buFont typeface="Arial" panose="020B0604020202020204" pitchFamily="34" charset="0"/>
-              <a:buNone/>
-              <a:defRPr sz="1600" kern="1200">
-                <a:solidFill>
-                  <a:schemeClr val="tx1"/>
-                </a:solidFill>
-                <a:latin typeface="+mn-lt"/>
-                <a:ea typeface="+mn-ea"/>
-                <a:cs typeface="+mn-cs"/>
-              </a:defRPr>
-            </a:lvl8pPr>
-            <a:lvl9pPr marL="3657600" indent="0" algn="ctr" defTabSz="914400" rtl="0" eaLnBrk="1" latinLnBrk="0" hangingPunct="1">
-              <a:lnSpc>
-                <a:spcPct val="90000"/>
-              </a:lnSpc>
-              <a:spcBef>
-                <a:spcPts val="500"/>
-              </a:spcBef>
-              <a:buFont typeface="Arial" panose="020B0604020202020204" pitchFamily="34" charset="0"/>
-              <a:buNone/>
-              <a:defRPr sz="1600" kern="1200">
-                <a:solidFill>
-                  <a:schemeClr val="tx1"/>
-                </a:solidFill>
-                <a:latin typeface="+mn-lt"/>
-                <a:ea typeface="+mn-ea"/>
-                <a:cs typeface="+mn-cs"/>
-              </a:defRPr>
-            </a:lvl9pPr>
-          </a:lstStyle>
-          <a:p>
-            <a:pPr algn="r"/>
-            <a:r>
-              <a:rPr lang="pt-BR" altLang="en-US" sz="1600" dirty="0"/>
-              <a:t>Universidade Federal do Rio Grande</a:t>
-            </a:r>
-          </a:p>
-          <a:p>
-            <a:pPr algn="r"/>
-            <a:r>
-              <a:rPr lang="pt-BR" altLang="en-US" sz="1600" dirty="0"/>
-              <a:t>PPG Aplicações para </a:t>
-            </a:r>
-            <a:r>
-              <a:rPr lang="pt-BR" altLang="en-US" sz="1600" dirty="0" smtClean="0"/>
-              <a:t>Web - </a:t>
-            </a:r>
-            <a:r>
-              <a:rPr lang="pt-BR" altLang="en-US" sz="1600" dirty="0" smtClean="0">
-                <a:sym typeface="+mn-ea"/>
-              </a:rPr>
-              <a:t>Polo </a:t>
-            </a:r>
-            <a:r>
-              <a:rPr lang="pt-BR" altLang="en-US" sz="1600" dirty="0" smtClean="0">
-                <a:sym typeface="+mn-ea"/>
-              </a:rPr>
-              <a:t>SJN</a:t>
-            </a:r>
-          </a:p>
-          <a:p>
-            <a:pPr algn="r"/>
-            <a:r>
-              <a:rPr lang="pt-BR" altLang="en-US" sz="1600" dirty="0" smtClean="0">
-                <a:sym typeface="+mn-ea"/>
-              </a:rPr>
-              <a:t>Prof. Dr. Vinicius Menezes de Oliveira</a:t>
-            </a:r>
-            <a:r>
-              <a:rPr lang="pt-BR" altLang="en-US" sz="1600" dirty="0">
-                <a:sym typeface="+mn-ea"/>
-              </a:rPr>
-              <a:t/>
-            </a:r>
-            <a:br>
-              <a:rPr lang="pt-BR" altLang="en-US" sz="1600" dirty="0">
-                <a:sym typeface="+mn-ea"/>
-              </a:rPr>
-            </a:br>
-            <a:r>
-              <a:rPr lang="pt-BR" altLang="en-US" sz="1600" dirty="0">
-                <a:sym typeface="+mn-ea"/>
-              </a:rPr>
-              <a:t>Rodrigo de Matos Alves - 129095</a:t>
-            </a:r>
-            <a:r>
-              <a:rPr lang="pt-BR" altLang="en-US" dirty="0">
-                <a:sym typeface="+mn-ea"/>
-              </a:rPr>
-              <a:t> </a:t>
-            </a:r>
-            <a:endParaRPr lang="pt-BR" altLang="en-US" dirty="0"/>
-          </a:p>
-          <a:p>
-            <a:pPr algn="r"/>
-            <a:endParaRPr lang="en-US" dirty="0"/>
+          <a:bodyPr/>
+          <a:lstStyle/>
+          <a:p>
+            <a:r>
+              <a:rPr lang="pt-BR" altLang="en-US" dirty="0"/>
+              <a:t>Conclusões</a:t>
+            </a:r>
           </a:p>
         </p:txBody>
       </p:sp>
     </p:spTree>
     <p:extLst>
       <p:ext uri="{BB962C8B-B14F-4D97-AF65-F5344CB8AC3E}">
-        <p14:creationId xmlns:p14="http://schemas.microsoft.com/office/powerpoint/2010/main" val="1408342794"/>
+        <p14:creationId xmlns:p14="http://schemas.microsoft.com/office/powerpoint/2010/main" val="1575915110"/>
       </p:ext>
     </p:extLst>
   </p:cSld>
